--- a/teaching/customer-economics-lab.pptx
+++ b/teaching/customer-economics-lab.pptx
@@ -2,24 +2,24 @@
 <file path=ppt/presentation.xml><?xml version="1.0" encoding="utf-8"?>
 <p:presentation xmlns:p="http://schemas.openxmlformats.org/presentationml/2006/main">
   <p:sldMasterIdLst>
-    <p:sldMasterId xmlns:r="http://schemas.openxmlformats.org/officeDocument/2006/relationships" id="2147483648" r:id="R663f76719e4247db"/>
+    <p:sldMasterId xmlns:r="http://schemas.openxmlformats.org/officeDocument/2006/relationships" id="2147483648" r:id="R01334c59999141c2"/>
   </p:sldMasterIdLst>
   <p:notesMasterIdLst>
-    <p:notesMasterId xmlns:r="http://schemas.openxmlformats.org/officeDocument/2006/relationships" r:id="R0920dc3666bc44c7"/>
+    <p:notesMasterId xmlns:r="http://schemas.openxmlformats.org/officeDocument/2006/relationships" r:id="R9139feddb0304648"/>
   </p:notesMasterIdLst>
   <p:sldIdLst>
-    <p:sldId xmlns:r="http://schemas.openxmlformats.org/officeDocument/2006/relationships" id="256" r:id="R2eed7ec3b5a0422f"/>
-    <p:sldId xmlns:r="http://schemas.openxmlformats.org/officeDocument/2006/relationships" id="257" r:id="R04174adfb1ba459b"/>
-    <p:sldId xmlns:r="http://schemas.openxmlformats.org/officeDocument/2006/relationships" id="258" r:id="Rc7840ad085d747ca"/>
-    <p:sldId xmlns:r="http://schemas.openxmlformats.org/officeDocument/2006/relationships" id="259" r:id="Rfc53345cc3634aa1"/>
-    <p:sldId xmlns:r="http://schemas.openxmlformats.org/officeDocument/2006/relationships" id="260" r:id="Rbea48e61206f458d"/>
-    <p:sldId xmlns:r="http://schemas.openxmlformats.org/officeDocument/2006/relationships" id="261" r:id="R3765792863c44b38"/>
-    <p:sldId xmlns:r="http://schemas.openxmlformats.org/officeDocument/2006/relationships" id="262" r:id="Rad63bae12e5a45d6"/>
-    <p:sldId xmlns:r="http://schemas.openxmlformats.org/officeDocument/2006/relationships" id="263" r:id="R6b2316be45964f43"/>
-    <p:sldId xmlns:r="http://schemas.openxmlformats.org/officeDocument/2006/relationships" id="264" r:id="R048d287151614d94"/>
-    <p:sldId xmlns:r="http://schemas.openxmlformats.org/officeDocument/2006/relationships" id="265" r:id="R2510aa550433467e"/>
-    <p:sldId xmlns:r="http://schemas.openxmlformats.org/officeDocument/2006/relationships" id="266" r:id="R381fabe9e7b1481e"/>
-    <p:sldId xmlns:r="http://schemas.openxmlformats.org/officeDocument/2006/relationships" id="267" r:id="Rd1720e7b8d0e4477"/>
+    <p:sldId xmlns:r="http://schemas.openxmlformats.org/officeDocument/2006/relationships" id="256" r:id="Rbef2db27256948f2"/>
+    <p:sldId xmlns:r="http://schemas.openxmlformats.org/officeDocument/2006/relationships" id="257" r:id="Reb37945ed94645a3"/>
+    <p:sldId xmlns:r="http://schemas.openxmlformats.org/officeDocument/2006/relationships" id="258" r:id="R0a6ae2b91ee446ba"/>
+    <p:sldId xmlns:r="http://schemas.openxmlformats.org/officeDocument/2006/relationships" id="259" r:id="R70aab04b931b4bc5"/>
+    <p:sldId xmlns:r="http://schemas.openxmlformats.org/officeDocument/2006/relationships" id="260" r:id="R19f9744029ed4c4c"/>
+    <p:sldId xmlns:r="http://schemas.openxmlformats.org/officeDocument/2006/relationships" id="261" r:id="R4870dc90deff4358"/>
+    <p:sldId xmlns:r="http://schemas.openxmlformats.org/officeDocument/2006/relationships" id="262" r:id="R0726eb9fab134477"/>
+    <p:sldId xmlns:r="http://schemas.openxmlformats.org/officeDocument/2006/relationships" id="263" r:id="R549a046501d74faa"/>
+    <p:sldId xmlns:r="http://schemas.openxmlformats.org/officeDocument/2006/relationships" id="264" r:id="Rbd8e80e7c4df4813"/>
+    <p:sldId xmlns:r="http://schemas.openxmlformats.org/officeDocument/2006/relationships" id="265" r:id="Rdd4b88e1cb4b4408"/>
+    <p:sldId xmlns:r="http://schemas.openxmlformats.org/officeDocument/2006/relationships" id="266" r:id="R8a5df0145f4442b6"/>
+    <p:sldId xmlns:r="http://schemas.openxmlformats.org/officeDocument/2006/relationships" id="267" r:id="R16c77cfda388455e"/>
   </p:sldIdLst>
   <p:sldSz cx="12192000" cy="6858000"/>
   <p:notesSz cx="6858000" cy="9144000"/>
@@ -453,7 +453,7 @@
           <a:lstStyle xmlns:a="http://schemas.openxmlformats.org/drawingml/2006/main"/>
           <a:p xmlns:a="http://schemas.openxmlformats.org/drawingml/2006/main">
             <a:r>
-              <a:t>Before class: complete Python, Node, TeX and model smoke tests. This lab begins with eight raw CSVs, not a prejoined database. Keep one AI conversation and pause after each stage until the group says next.</a:t>
+              <a:t>Before class: complete the frozen Python environment, Node20+, pinned Playwright/Chromium, TeX and model smoke tests. The public ZIP works without Git. Use the bundled executive-report skill and style assets. This lab begins with eight raw CSVs, not a prejoined database. Keep one AI conversation and pause after each stage until the group says next.</a:t>
             </a:r>
           </a:p>
           <a:p xmlns:a="http://schemas.openxmlformats.org/drawingml/2006/main">
@@ -543,7 +543,7 @@
           <a:lstStyle xmlns:a="http://schemas.openxmlformats.org/drawingml/2006/main"/>
           <a:p xmlns:a="http://schemas.openxmlformats.org/drawingml/2006/main">
             <a:r>
-              <a:t>Discuss4minutes at stage5. Partner/build_skill has the stronger incremental contribution-after-media point estimate; Search/save_time is near break-even. Recommend a bounded repeat pilot, preserving eligibility and the evaluation window, rather than claiming certain superiority or optimal scale. These are distinct tested populations. Inspect uncertainty and keep control conversions in the baseline. Do not use predicted buyerLTV as an experimental lifetime treatment effect.</a:t>
+              <a:t>Discuss4minutes at stage5. The search/save_time point estimate is$1.161 contribution after media per assigned treatment prospect; partner/build_skill is-$0.3612. Both95% intervals include zero. The experiments measure May1–June1 (31days) and September1–October1 (30days), respectively. These short windows do not determine lifetime campaign profitability when observed cohort cash recovery takes roughly5–6months. Recommend preserving the randomized groups and following their contribution longer, with a prespecified common evaluation horizon and uncertainty, before declaring either campaign a winner or loser. Do not infer incremental payback from cohort accounting payback. Different populations and periods also prevent a direct head-to-head ranking. All randomized prospects, including nonbuyers, stay in the denominator. Forecast buyerLTV is not an experimental lifetime treatment effect.</a:t>
             </a:r>
           </a:p>
           <a:p xmlns:a="http://schemas.openxmlformats.org/drawingml/2006/main">
@@ -638,7 +638,7 @@
           <a:lstStyle xmlns:a="http://schemas.openxmlformats.org/drawingml/2006/main"/>
           <a:p xmlns:a="http://schemas.openxmlformats.org/drawingml/2006/main">
             <a:r>
-              <a:t>Stage6. Inspect forecast_curve.csv, cohort_valuation.csv and the held-out validation outputs. First receipt discount is1/(1.01), even though its age index is0. Read the model’s economics assumptions and parameter-uncertainty boundary in the generated report. Do not compare a 12-month forecast with a24-month realized total.</a:t>
+              <a:t>Stage6. Data generation gives every member a persistent theta drawn from a two-component Beta mixture, followed by monthly renewal decisions. It does not redraw theta every month. A temporary March–April2025 service disruption raises churn odds while the underlying propensity persists. The main inference model is hierarchical single-Beta shifted Beta-Geometric (sBG), fitted with four-chain NumPyro NUTS; Gamma positive-revenue model shares the inference workflow. It is deliberately different from the DGP. The separate Orduz benchmark is an actual four-hidden-layer Bayesian neural network fitted with SVI; it is not the main sBG model and must not be described as the DGP. The v2 first-three-age retention holdout MAE is1.1124 customers/cell for the main model,1.1461 for BNN and1.8942 for the naive baseline. Confirm the current output before discussing numbers. Observed contribution is used where available; forecasts extend only unobserved ages of a common12-month valuation horizon. Discount each month-end receipt at1% per month, with age0 discounted once. Net LTV subtracts CAC; cash payback is undiscounted. Model parameters, priors, sampler diagnostics, assumptions, intervals and chronological validation belong in the report appendix. Source adaptation: https://juanitorduz.github.io/revenue_retention_numpyro/; Lee,Fader,Hardie2007 contractual churn model. Model performance does not establish marketing incrementality.</a:t>
             </a:r>
           </a:p>
           <a:p xmlns:a="http://schemas.openxmlformats.org/drawingml/2006/main">
@@ -658,7 +658,12 @@
           </a:p>
           <a:p xmlns:a="http://schemas.openxmlformats.org/drawingml/2006/main">
             <a:r>
-              <a:t/>
+              <a:t>Saved SQL output: tables/forecast_curve.csv</a:t>
+            </a:r>
+          </a:p>
+          <a:p xmlns:a="http://schemas.openxmlformats.org/drawingml/2006/main">
+            <a:r>
+              <a:t>Saved SQL output: tables/cohort_valuation.csv</a:t>
             </a:r>
           </a:p>
         </p:txBody>
@@ -728,7 +733,7 @@
           <a:lstStyle xmlns:a="http://schemas.openxmlformats.org/drawingml/2006/main"/>
           <a:p xmlns:a="http://schemas.openxmlformats.org/drawingml/2006/main">
             <a:r>
-              <a:t>Stage7. The group supplies final_verdict and recommended_action. The AI may help express the judgment but should not substitute an unsupported conclusion. The report records the learner choices hash and evidence hashes. Ask whether the recommendation follows from observed, predicted or experimental evidence, and name the uncertainty that could change it.</a:t>
+              <a:t>Stage7. Write final_verdict and recommended_action in the same chat; the skill must wait for next between stages. The opening executive summary describes Studio North and states a bounded managerial recommendation before technical methods. Explain the model before presenting its results. The appendix is mandatory: parameters, units, priors, uncertainty, validation, every per-dataset UCV table, source grains/keys, and reproducibility evidence. The public project carries the Source Sans / forest-green / ochre LaTeX style and executive-report skill, so students do not need the instructor’s private skill directory. No Git installation is required. The report must distinguish observed, forecast and experimental evidence. Its figures and tables should not quietly replace a student’s supported judgment.</a:t>
             </a:r>
           </a:p>
           <a:p xmlns:a="http://schemas.openxmlformats.org/drawingml/2006/main">
@@ -998,7 +1003,7 @@
           <a:lstStyle xmlns:a="http://schemas.openxmlformats.org/drawingml/2006/main"/>
           <a:p xmlns:a="http://schemas.openxmlformats.org/drawingml/2006/main">
             <a:r>
-              <a:t>Run stage1. Open diagrams/source-systems.html and inspection.sql. The documented person_id is a clean joining key; there is no planted identity puzzle. A shared key does not erase grain, units or clock differences. Aggregate campaign spend before joining it to customer outcomes.</a:t>
+              <a:t>Stage1 produces a separate UCV table for every source: Identifiers, Engagement, Relationship, Perception. Every actual field appears once; justify ambiguous operational metadata and leave absent categories empty. In this example, age_band, household_type and region are profile descriptors in Identifiers. primary_need is self-reported before acquisition. The two timestamps are relationship/provenance metadata, not acquisition dates. Open diagrams/ucv-tables.json and source-tables.html. The full ERD retains all fields, SQL types, keys and cardinality; campaign_metadata is explicitly derived. One person links to many cycles, transactions, events and responses. Aggregate campaign spending independently before joining customer outcomes.</a:t>
             </a:r>
           </a:p>
           <a:p xmlns:a="http://schemas.openxmlformats.org/drawingml/2006/main">
@@ -1088,7 +1093,7 @@
           <a:lstStyle xmlns:a="http://schemas.openxmlformats.org/drawingml/2006/main"/>
           <a:p xmlns:a="http://schemas.openxmlformats.org/drawingml/2006/main">
             <a:r>
-              <a:t>Stage2 group decision, about3minutes. Stated need directly describes the intended onboarding objective, so it is the more defensible starting representation for this design. It does not prove everyone with the same need wants the identical experience, nor establish a causal benefit of tailored onboarding. The two conceptual maps are hypotheses. At stage4 inspect the actual six-month within-group variance; the advantage in this synthetic data is modest. Do not announce a predictive finding before constructing the SQL evidence.</a:t>
+              <a:t>Stage2 group decision, about3minutes. Stated need directly describes the intended onboarding objective, so it is the more defensible starting representation for this design. It does not prove everyone with the same need wants the identical experience, nor establish a causal benefit of tailored onboarding. The two conceptual maps are hypotheses. At stage4 inspect the actual six-month within-group variance; the v2 results must be inspected rather than assuming an old ranking persists. Do not announce a predictive finding before constructing the SQL evidence.</a:t>
             </a:r>
           </a:p>
           <a:p xmlns:a="http://schemas.openxmlformats.org/drawingml/2006/main">
@@ -1358,7 +1363,7 @@
           <a:lstStyle xmlns:a="http://schemas.openxmlformats.org/drawingml/2006/main"/>
           <a:p xmlns:a="http://schemas.openxmlformats.org/drawingml/2006/main">
             <a:r>
-              <a:t>Stage4 group decision, about3minutes. Every panel uses the same retained-share scale and age0–11 axis. Each curve is conditional on one joining cohort, channel and pre-acquisition need. July2025 ends at observed age5; missing future values are gaps, never zeros. All four age5 comparisons favor July2025 over January2024 in these synthetic data, which supports investigating within-group improvement rather than treating the whole aggregate difference as a mix change. This is descriptive, not a causal channel effect. The report separately contrasts retained people with retained revenue.</a:t>
+              <a:t>Stage4 group decision, about3minutes. Every panel uses the same retained-share scale and age0–11 axis. Each curve is conditional on one joining cohort, channel and pre-acquisition need. July2025 ends at observed age5; missing future values are gaps, never zeros. At age5, July2025 improves in three cells but search/save_time falls from63.0% to60.7%. Progress is therefore uneven. Distinguish changes within groups from a changing acquisition mix. This is descriptive, not a causal channel effect. The report separately contrasts retained people with retained revenue.</a:t>
             </a:r>
           </a:p>
           <a:p xmlns:a="http://schemas.openxmlformats.org/drawingml/2006/main">
@@ -1520,7 +1525,7 @@
           <p:cNvPr id="3" name="Title">
             <a:extLst xmlns:a="http://schemas.openxmlformats.org/drawingml/2006/main">
               <a:ext uri="{FF2B5EF4-FFF2-40B4-BE49-F238E27FC236}">
-                <a16:creationId xmlns:a16="http://schemas.microsoft.com/office/drawing/2014/main" id="{3A75515B-AC53-4105-B6F1-A5B98A1DE867}"/>
+                <a16:creationId xmlns:a16="http://schemas.microsoft.com/office/drawing/2014/main" id="{C7183A9F-797F-4DC9-AEC9-5F94E4E57D3A}"/>
               </a:ext>
             </a:extLst>
           </p:cNvPr>
@@ -1749,7 +1754,7 @@
           <p:cNvPr id="2" name="Subtitle">
             <a:extLst xmlns:a="http://schemas.openxmlformats.org/drawingml/2006/main">
               <a:ext uri="{FF2B5EF4-FFF2-40B4-BE49-F238E27FC236}">
-                <a16:creationId xmlns:a16="http://schemas.microsoft.com/office/drawing/2014/main" id="{35A24368-D96D-4B26-9C7E-6281670979FF}"/>
+                <a16:creationId xmlns:a16="http://schemas.microsoft.com/office/drawing/2014/main" id="{6587CCE4-98FD-4265-99B1-D6A023375452}"/>
               </a:ext>
             </a:extLst>
           </p:cNvPr>
@@ -1995,7 +2000,7 @@
           <p:cNvPr id="2" name="Section title">
             <a:extLst xmlns:a="http://schemas.openxmlformats.org/drawingml/2006/main">
               <a:ext uri="{FF2B5EF4-FFF2-40B4-BE49-F238E27FC236}">
-                <a16:creationId xmlns:a16="http://schemas.microsoft.com/office/drawing/2014/main" id="{0F95B157-173D-4785-9F4C-7CE98CEFB6C8}"/>
+                <a16:creationId xmlns:a16="http://schemas.microsoft.com/office/drawing/2014/main" id="{12FCBBDC-8346-4429-9B09-446F44F9EA3D}"/>
               </a:ext>
             </a:extLst>
           </p:cNvPr>
@@ -2241,7 +2246,7 @@
           <p:cNvPr id="3" name="Title">
             <a:extLst xmlns:a="http://schemas.openxmlformats.org/drawingml/2006/main">
               <a:ext uri="{FF2B5EF4-FFF2-40B4-BE49-F238E27FC236}">
-                <a16:creationId xmlns:a16="http://schemas.microsoft.com/office/drawing/2014/main" id="{94F09813-693C-47F8-AB39-DDF7198D5645}"/>
+                <a16:creationId xmlns:a16="http://schemas.microsoft.com/office/drawing/2014/main" id="{D73658B4-D7B0-4ADF-A445-61D59346D572}"/>
               </a:ext>
             </a:extLst>
           </p:cNvPr>
@@ -2470,7 +2475,7 @@
           <p:cNvPr id="2" name="Body">
             <a:extLst xmlns:a="http://schemas.openxmlformats.org/drawingml/2006/main">
               <a:ext uri="{FF2B5EF4-FFF2-40B4-BE49-F238E27FC236}">
-                <a16:creationId xmlns:a16="http://schemas.microsoft.com/office/drawing/2014/main" id="{8C82DE5B-38D5-4F1F-8E51-D3E40E4CC87E}"/>
+                <a16:creationId xmlns:a16="http://schemas.microsoft.com/office/drawing/2014/main" id="{A45D7EC8-879C-4068-9014-09581910A99D}"/>
               </a:ext>
             </a:extLst>
           </p:cNvPr>
@@ -2716,7 +2721,7 @@
           <p:cNvPr id="4" name="Title">
             <a:extLst xmlns:a="http://schemas.openxmlformats.org/drawingml/2006/main">
               <a:ext uri="{FF2B5EF4-FFF2-40B4-BE49-F238E27FC236}">
-                <a16:creationId xmlns:a16="http://schemas.microsoft.com/office/drawing/2014/main" id="{1D7BBC14-CC47-4837-853F-0A2167D08D10}"/>
+                <a16:creationId xmlns:a16="http://schemas.microsoft.com/office/drawing/2014/main" id="{0E818029-1CFE-49A3-B41A-3AE9D09E6D64}"/>
               </a:ext>
             </a:extLst>
           </p:cNvPr>
@@ -2945,7 +2950,7 @@
           <p:cNvPr id="2" name="Left column">
             <a:extLst xmlns:a="http://schemas.openxmlformats.org/drawingml/2006/main">
               <a:ext uri="{FF2B5EF4-FFF2-40B4-BE49-F238E27FC236}">
-                <a16:creationId xmlns:a16="http://schemas.microsoft.com/office/drawing/2014/main" id="{4A766480-B6DB-43BA-BA1C-A22BA8D11763}"/>
+                <a16:creationId xmlns:a16="http://schemas.microsoft.com/office/drawing/2014/main" id="{8F0C06AC-7E8D-40E2-9737-22D22F9854FB}"/>
               </a:ext>
             </a:extLst>
           </p:cNvPr>
@@ -3174,7 +3179,7 @@
           <p:cNvPr id="3" name="Right column">
             <a:extLst xmlns:a="http://schemas.openxmlformats.org/drawingml/2006/main">
               <a:ext uri="{FF2B5EF4-FFF2-40B4-BE49-F238E27FC236}">
-                <a16:creationId xmlns:a16="http://schemas.microsoft.com/office/drawing/2014/main" id="{E9737D02-FE2C-44C7-A7E0-74B34432CAF6}"/>
+                <a16:creationId xmlns:a16="http://schemas.microsoft.com/office/drawing/2014/main" id="{B34B698F-17EA-4AF6-B3FC-99D465569A51}"/>
               </a:ext>
             </a:extLst>
           </p:cNvPr>
@@ -3420,7 +3425,7 @@
           <p:cNvPr id="3" name="Title">
             <a:extLst xmlns:a="http://schemas.openxmlformats.org/drawingml/2006/main">
               <a:ext uri="{FF2B5EF4-FFF2-40B4-BE49-F238E27FC236}">
-                <a16:creationId xmlns:a16="http://schemas.microsoft.com/office/drawing/2014/main" id="{D8B710B2-1F62-4C92-8CD4-90CDB2FFD9E2}"/>
+                <a16:creationId xmlns:a16="http://schemas.microsoft.com/office/drawing/2014/main" id="{CA919B63-9237-4DA0-ACDB-B66AC5EE786B}"/>
               </a:ext>
             </a:extLst>
           </p:cNvPr>
@@ -3649,7 +3654,7 @@
           <p:cNvPr id="2" name="Left column">
             <a:extLst xmlns:a="http://schemas.openxmlformats.org/drawingml/2006/main">
               <a:ext uri="{FF2B5EF4-FFF2-40B4-BE49-F238E27FC236}">
-                <a16:creationId xmlns:a16="http://schemas.microsoft.com/office/drawing/2014/main" id="{F67004EF-BE7C-4C06-96C0-E33DAD2F1B3A}"/>
+                <a16:creationId xmlns:a16="http://schemas.microsoft.com/office/drawing/2014/main" id="{4B4DC977-F3EC-442E-B40A-FAF041E2E226}"/>
               </a:ext>
             </a:extLst>
           </p:cNvPr>
@@ -3916,12 +3921,12 @@
   </p:cSld>
   <p:clrMap bg1="lt1" tx1="dk1" bg2="lt2" tx2="dk2" accent1="accent1" accent2="accent2" accent3="accent3" accent4="accent4" accent5="accent5" accent6="accent6" hlink="hlink" folHlink="folHlink"/>
   <p:sldLayoutIdLst>
-    <p:sldLayoutId xmlns:r="http://schemas.openxmlformats.org/officeDocument/2006/relationships" id="2147483649" r:id="R3b9c728115504ff7"/>
-    <p:sldLayoutId xmlns:r="http://schemas.openxmlformats.org/officeDocument/2006/relationships" id="2147483650" r:id="R0c6a6e4659fc43f1"/>
-    <p:sldLayoutId xmlns:r="http://schemas.openxmlformats.org/officeDocument/2006/relationships" id="2147483651" r:id="R211a3cfd11eb4599"/>
-    <p:sldLayoutId xmlns:r="http://schemas.openxmlformats.org/officeDocument/2006/relationships" id="2147483652" r:id="R57f6b1e1f6e94e26"/>
-    <p:sldLayoutId xmlns:r="http://schemas.openxmlformats.org/officeDocument/2006/relationships" id="2147483653" r:id="R67d9c60e63a247f6"/>
-    <p:sldLayoutId xmlns:r="http://schemas.openxmlformats.org/officeDocument/2006/relationships" id="2147483654" r:id="R72e9b0be2a724251"/>
+    <p:sldLayoutId xmlns:r="http://schemas.openxmlformats.org/officeDocument/2006/relationships" id="2147483649" r:id="Rf1a84f586d8144c8"/>
+    <p:sldLayoutId xmlns:r="http://schemas.openxmlformats.org/officeDocument/2006/relationships" id="2147483650" r:id="R7202b3c3a1f54c2c"/>
+    <p:sldLayoutId xmlns:r="http://schemas.openxmlformats.org/officeDocument/2006/relationships" id="2147483651" r:id="R83cecbe8ec034c07"/>
+    <p:sldLayoutId xmlns:r="http://schemas.openxmlformats.org/officeDocument/2006/relationships" id="2147483652" r:id="R0bf1655a19e54d9c"/>
+    <p:sldLayoutId xmlns:r="http://schemas.openxmlformats.org/officeDocument/2006/relationships" id="2147483653" r:id="Rf700180f69e54f97"/>
+    <p:sldLayoutId xmlns:r="http://schemas.openxmlformats.org/officeDocument/2006/relationships" id="2147483654" r:id="Rc1adc8dce47a4139"/>
   </p:sldLayoutIdLst>
   <p:txStyles>
     <p:titleStyle>
@@ -4571,37 +4576,37 @@
                   <c:v>1</c:v>
                 </c:pt>
                 <c:pt idx="1">
+                  <c:v>0.891304347826</c:v>
+                </c:pt>
+                <c:pt idx="2">
+                  <c:v>0.782608695652</c:v>
+                </c:pt>
+                <c:pt idx="3">
+                  <c:v>0.760869565217</c:v>
+                </c:pt>
+                <c:pt idx="4">
                   <c:v>0.673913043478</c:v>
                 </c:pt>
-                <c:pt idx="2">
+                <c:pt idx="5">
+                  <c:v>0.630434782609</c:v>
+                </c:pt>
+                <c:pt idx="6">
                   <c:v>0.586956521739</c:v>
                 </c:pt>
-                <c:pt idx="3">
-                  <c:v>0.521739130435</c:v>
-                </c:pt>
-                <c:pt idx="4">
+                <c:pt idx="7">
+                  <c:v>0.54347826087</c:v>
+                </c:pt>
+                <c:pt idx="8">
+                  <c:v>0.478260869565</c:v>
+                </c:pt>
+                <c:pt idx="9">
                   <c:v>0.45652173913</c:v>
                 </c:pt>
-                <c:pt idx="5">
+                <c:pt idx="10">
+                  <c:v>0.45652173913</c:v>
+                </c:pt>
+                <c:pt idx="11">
                   <c:v>0.434782608696</c:v>
-                </c:pt>
-                <c:pt idx="6">
-                  <c:v>0.413043478261</c:v>
-                </c:pt>
-                <c:pt idx="7">
-                  <c:v>0.391304347826</c:v>
-                </c:pt>
-                <c:pt idx="8">
-                  <c:v>0.369565217391</c:v>
-                </c:pt>
-                <c:pt idx="9">
-                  <c:v>0.347826086957</c:v>
-                </c:pt>
-                <c:pt idx="10">
-                  <c:v>0.282608695652</c:v>
-                </c:pt>
-                <c:pt idx="11">
-                  <c:v>0.260869565217</c:v>
                 </c:pt>
               </c:numCache>
             </c:numRef>
@@ -4685,37 +4690,37 @@
                   <c:v>1</c:v>
                 </c:pt>
                 <c:pt idx="1">
-                  <c:v>0.727272727273</c:v>
+                  <c:v>0.8</c:v>
                 </c:pt>
                 <c:pt idx="2">
-                  <c:v>0.636363636364</c:v>
+                  <c:v>0.74</c:v>
                 </c:pt>
                 <c:pt idx="3">
-                  <c:v>0.581818181818</c:v>
+                  <c:v>0.66</c:v>
                 </c:pt>
                 <c:pt idx="4">
-                  <c:v>0.563636363636</c:v>
+                  <c:v>0.62</c:v>
                 </c:pt>
                 <c:pt idx="5">
-                  <c:v>0.563636363636</c:v>
+                  <c:v>0.54</c:v>
                 </c:pt>
                 <c:pt idx="6">
-                  <c:v>0.527272727273</c:v>
+                  <c:v>0.52</c:v>
                 </c:pt>
                 <c:pt idx="7">
-                  <c:v>0.509090909091</c:v>
+                  <c:v>0.52</c:v>
                 </c:pt>
                 <c:pt idx="8">
-                  <c:v>0.472727272727</c:v>
+                  <c:v>0.52</c:v>
                 </c:pt>
                 <c:pt idx="9">
-                  <c:v>0.418181818182</c:v>
+                  <c:v>0.5</c:v>
                 </c:pt>
                 <c:pt idx="10">
-                  <c:v>0.4</c:v>
+                  <c:v>0.5</c:v>
                 </c:pt>
                 <c:pt idx="11">
-                  <c:v>0.381818181818</c:v>
+                  <c:v>0.48</c:v>
                 </c:pt>
               </c:numCache>
             </c:numRef>
@@ -4781,19 +4786,19 @@
                   <c:v>1</c:v>
                 </c:pt>
                 <c:pt idx="1">
-                  <c:v>0.709677419355</c:v>
+                  <c:v>0.83606557377</c:v>
                 </c:pt>
                 <c:pt idx="2">
-                  <c:v>0.645161290323</c:v>
+                  <c:v>0.770491803279</c:v>
                 </c:pt>
                 <c:pt idx="3">
-                  <c:v>0.596774193548</c:v>
+                  <c:v>0.72131147541</c:v>
                 </c:pt>
                 <c:pt idx="4">
-                  <c:v>0.564516129032</c:v>
+                  <c:v>0.622950819672</c:v>
                 </c:pt>
                 <c:pt idx="5">
-                  <c:v>0.532258064516</c:v>
+                  <c:v>0.606557377049</c:v>
                 </c:pt>
               </c:numCache>
             </c:numRef>
@@ -5127,37 +5132,37 @@
                   <c:v>1</c:v>
                 </c:pt>
                 <c:pt idx="1">
-                  <c:v>0.828571428571</c:v>
+                  <c:v>0.871794871795</c:v>
                 </c:pt>
                 <c:pt idx="2">
-                  <c:v>0.742857142857</c:v>
+                  <c:v>0.846153846154</c:v>
                 </c:pt>
                 <c:pt idx="3">
-                  <c:v>0.742857142857</c:v>
+                  <c:v>0.769230769231</c:v>
                 </c:pt>
                 <c:pt idx="4">
-                  <c:v>0.742857142857</c:v>
+                  <c:v>0.769230769231</c:v>
                 </c:pt>
                 <c:pt idx="5">
-                  <c:v>0.657142857143</c:v>
+                  <c:v>0.717948717949</c:v>
                 </c:pt>
                 <c:pt idx="6">
-                  <c:v>0.657142857143</c:v>
+                  <c:v>0.692307692308</c:v>
                 </c:pt>
                 <c:pt idx="7">
-                  <c:v>0.657142857143</c:v>
+                  <c:v>0.666666666667</c:v>
                 </c:pt>
                 <c:pt idx="8">
-                  <c:v>0.657142857143</c:v>
+                  <c:v>0.564102564103</c:v>
                 </c:pt>
                 <c:pt idx="9">
-                  <c:v>0.6</c:v>
+                  <c:v>0.564102564103</c:v>
                 </c:pt>
                 <c:pt idx="10">
-                  <c:v>0.571428571429</c:v>
+                  <c:v>0.512820512821</c:v>
                 </c:pt>
                 <c:pt idx="11">
-                  <c:v>0.571428571429</c:v>
+                  <c:v>0.512820512821</c:v>
                 </c:pt>
               </c:numCache>
             </c:numRef>
@@ -5241,37 +5246,37 @@
                   <c:v>1</c:v>
                 </c:pt>
                 <c:pt idx="1">
-                  <c:v>0.823529411765</c:v>
+                  <c:v>0.829787234043</c:v>
                 </c:pt>
                 <c:pt idx="2">
-                  <c:v>0.78431372549</c:v>
+                  <c:v>0.787234042553</c:v>
                 </c:pt>
                 <c:pt idx="3">
-                  <c:v>0.764705882353</c:v>
+                  <c:v>0.744680851064</c:v>
                 </c:pt>
                 <c:pt idx="4">
-                  <c:v>0.764705882353</c:v>
+                  <c:v>0.68085106383</c:v>
                 </c:pt>
                 <c:pt idx="5">
-                  <c:v>0.745098039216</c:v>
+                  <c:v>0.617021276596</c:v>
                 </c:pt>
                 <c:pt idx="6">
-                  <c:v>0.725490196078</c:v>
+                  <c:v>0.574468085106</c:v>
                 </c:pt>
                 <c:pt idx="7">
-                  <c:v>0.705882352941</c:v>
+                  <c:v>0.574468085106</c:v>
                 </c:pt>
                 <c:pt idx="8">
-                  <c:v>0.686274509804</c:v>
+                  <c:v>0.553191489362</c:v>
                 </c:pt>
                 <c:pt idx="9">
-                  <c:v>0.647058823529</c:v>
+                  <c:v>0.510638297872</c:v>
                 </c:pt>
                 <c:pt idx="10">
-                  <c:v>0.607843137255</c:v>
+                  <c:v>0.489361702128</c:v>
                 </c:pt>
                 <c:pt idx="11">
-                  <c:v>0.607843137255</c:v>
+                  <c:v>0.468085106383</c:v>
                 </c:pt>
               </c:numCache>
             </c:numRef>
@@ -5337,19 +5342,19 @@
                   <c:v>1</c:v>
                 </c:pt>
                 <c:pt idx="1">
-                  <c:v>0.881355932203</c:v>
+                  <c:v>0.918032786885</c:v>
                 </c:pt>
                 <c:pt idx="2">
-                  <c:v>0.830508474576</c:v>
+                  <c:v>0.868852459016</c:v>
                 </c:pt>
                 <c:pt idx="3">
-                  <c:v>0.796610169492</c:v>
+                  <c:v>0.786885245902</c:v>
                 </c:pt>
                 <c:pt idx="4">
-                  <c:v>0.779661016949</c:v>
+                  <c:v>0.754098360656</c:v>
                 </c:pt>
                 <c:pt idx="5">
-                  <c:v>0.779661016949</c:v>
+                  <c:v>0.737704918033</c:v>
                 </c:pt>
               </c:numCache>
             </c:numRef>
@@ -5683,37 +5688,37 @@
                   <c:v>1</c:v>
                 </c:pt>
                 <c:pt idx="1">
-                  <c:v>0.78125</c:v>
+                  <c:v>0.848484848485</c:v>
                 </c:pt>
                 <c:pt idx="2">
-                  <c:v>0.75</c:v>
+                  <c:v>0.69696969697</c:v>
                 </c:pt>
                 <c:pt idx="3">
-                  <c:v>0.65625</c:v>
+                  <c:v>0.666666666667</c:v>
                 </c:pt>
                 <c:pt idx="4">
-                  <c:v>0.59375</c:v>
+                  <c:v>0.636363636364</c:v>
                 </c:pt>
                 <c:pt idx="5">
-                  <c:v>0.5625</c:v>
+                  <c:v>0.606060606061</c:v>
                 </c:pt>
                 <c:pt idx="6">
-                  <c:v>0.46875</c:v>
+                  <c:v>0.545454545455</c:v>
                 </c:pt>
                 <c:pt idx="7">
-                  <c:v>0.375</c:v>
+                  <c:v>0.515151515152</c:v>
                 </c:pt>
                 <c:pt idx="8">
-                  <c:v>0.375</c:v>
+                  <c:v>0.515151515152</c:v>
                 </c:pt>
                 <c:pt idx="9">
-                  <c:v>0.375</c:v>
+                  <c:v>0.484848484848</c:v>
                 </c:pt>
                 <c:pt idx="10">
-                  <c:v>0.34375</c:v>
+                  <c:v>0.484848484848</c:v>
                 </c:pt>
                 <c:pt idx="11">
-                  <c:v>0.3125</c:v>
+                  <c:v>0.454545454545</c:v>
                 </c:pt>
               </c:numCache>
             </c:numRef>
@@ -5797,37 +5802,37 @@
                   <c:v>1</c:v>
                 </c:pt>
                 <c:pt idx="1">
-                  <c:v>0.8</c:v>
+                  <c:v>0.883720930233</c:v>
                 </c:pt>
                 <c:pt idx="2">
-                  <c:v>0.725</c:v>
+                  <c:v>0.767441860465</c:v>
                 </c:pt>
                 <c:pt idx="3">
-                  <c:v>0.625</c:v>
+                  <c:v>0.697674418605</c:v>
                 </c:pt>
                 <c:pt idx="4">
-                  <c:v>0.575</c:v>
+                  <c:v>0.581395348837</c:v>
                 </c:pt>
                 <c:pt idx="5">
-                  <c:v>0.55</c:v>
+                  <c:v>0.581395348837</c:v>
                 </c:pt>
                 <c:pt idx="6">
-                  <c:v>0.525</c:v>
+                  <c:v>0.558139534884</c:v>
                 </c:pt>
                 <c:pt idx="7">
-                  <c:v>0.5</c:v>
+                  <c:v>0.558139534884</c:v>
                 </c:pt>
                 <c:pt idx="8">
-                  <c:v>0.475</c:v>
+                  <c:v>0.558139534884</c:v>
                 </c:pt>
                 <c:pt idx="9">
-                  <c:v>0.4</c:v>
+                  <c:v>0.558139534884</c:v>
                 </c:pt>
                 <c:pt idx="10">
-                  <c:v>0.4</c:v>
+                  <c:v>0.558139534884</c:v>
                 </c:pt>
                 <c:pt idx="11">
-                  <c:v>0.375</c:v>
+                  <c:v>0.53488372093</c:v>
                 </c:pt>
               </c:numCache>
             </c:numRef>
@@ -5893,19 +5898,19 @@
                   <c:v>1</c:v>
                 </c:pt>
                 <c:pt idx="1">
-                  <c:v>0.88</c:v>
+                  <c:v>0.941176470588</c:v>
                 </c:pt>
                 <c:pt idx="2">
-                  <c:v>0.84</c:v>
+                  <c:v>0.803921568627</c:v>
                 </c:pt>
                 <c:pt idx="3">
-                  <c:v>0.8</c:v>
+                  <c:v>0.745098039216</c:v>
                 </c:pt>
                 <c:pt idx="4">
-                  <c:v>0.76</c:v>
+                  <c:v>0.686274509804</c:v>
                 </c:pt>
                 <c:pt idx="5">
-                  <c:v>0.74</c:v>
+                  <c:v>0.647058823529</c:v>
                 </c:pt>
               </c:numCache>
             </c:numRef>
@@ -6239,31 +6244,31 @@
                   <c:v>1</c:v>
                 </c:pt>
                 <c:pt idx="1">
-                  <c:v>0.782608695652</c:v>
+                  <c:v>0.869565217391</c:v>
                 </c:pt>
                 <c:pt idx="2">
                   <c:v>0.782608695652</c:v>
                 </c:pt>
                 <c:pt idx="3">
-                  <c:v>0.695652173913</c:v>
+                  <c:v>0.608695652174</c:v>
                 </c:pt>
                 <c:pt idx="4">
-                  <c:v>0.695652173913</c:v>
+                  <c:v>0.608695652174</c:v>
                 </c:pt>
                 <c:pt idx="5">
-                  <c:v>0.608695652174</c:v>
+                  <c:v>0.521739130435</c:v>
                 </c:pt>
                 <c:pt idx="6">
-                  <c:v>0.565217391304</c:v>
+                  <c:v>0.521739130435</c:v>
                 </c:pt>
                 <c:pt idx="7">
-                  <c:v>0.565217391304</c:v>
+                  <c:v>0.478260869565</c:v>
                 </c:pt>
                 <c:pt idx="8">
-                  <c:v>0.521739130435</c:v>
+                  <c:v>0.478260869565</c:v>
                 </c:pt>
                 <c:pt idx="9">
-                  <c:v>0.521739130435</c:v>
+                  <c:v>0.478260869565</c:v>
                 </c:pt>
                 <c:pt idx="10">
                   <c:v>0.478260869565</c:v>
@@ -6353,37 +6358,37 @@
                   <c:v>1</c:v>
                 </c:pt>
                 <c:pt idx="1">
-                  <c:v>0.805555555556</c:v>
+                  <c:v>0.926829268293</c:v>
                 </c:pt>
                 <c:pt idx="2">
-                  <c:v>0.777777777778</c:v>
+                  <c:v>0.829268292683</c:v>
                 </c:pt>
                 <c:pt idx="3">
-                  <c:v>0.777777777778</c:v>
+                  <c:v>0.80487804878</c:v>
                 </c:pt>
                 <c:pt idx="4">
-                  <c:v>0.75</c:v>
+                  <c:v>0.780487804878</c:v>
                 </c:pt>
                 <c:pt idx="5">
-                  <c:v>0.722222222222</c:v>
+                  <c:v>0.731707317073</c:v>
                 </c:pt>
                 <c:pt idx="6">
-                  <c:v>0.722222222222</c:v>
+                  <c:v>0.731707317073</c:v>
                 </c:pt>
                 <c:pt idx="7">
-                  <c:v>0.694444444444</c:v>
+                  <c:v>0.707317073171</c:v>
                 </c:pt>
                 <c:pt idx="8">
-                  <c:v>0.666666666667</c:v>
+                  <c:v>0.707317073171</c:v>
                 </c:pt>
                 <c:pt idx="9">
-                  <c:v>0.666666666667</c:v>
+                  <c:v>0.658536585366</c:v>
                 </c:pt>
                 <c:pt idx="10">
-                  <c:v>0.638888888889</c:v>
+                  <c:v>0.585365853659</c:v>
                 </c:pt>
                 <c:pt idx="11">
-                  <c:v>0.638888888889</c:v>
+                  <c:v>0.560975609756</c:v>
                 </c:pt>
               </c:numCache>
             </c:numRef>
@@ -6449,19 +6454,19 @@
                   <c:v>1</c:v>
                 </c:pt>
                 <c:pt idx="1">
-                  <c:v>0.88</c:v>
+                  <c:v>0.979166666667</c:v>
                 </c:pt>
                 <c:pt idx="2">
-                  <c:v>0.84</c:v>
+                  <c:v>0.833333333333</c:v>
                 </c:pt>
                 <c:pt idx="3">
-                  <c:v>0.84</c:v>
+                  <c:v>0.791666666667</c:v>
                 </c:pt>
                 <c:pt idx="4">
-                  <c:v>0.76</c:v>
+                  <c:v>0.75</c:v>
                 </c:pt>
                 <c:pt idx="5">
-                  <c:v>0.74</c:v>
+                  <c:v>0.729166666667</c:v>
                 </c:pt>
               </c:numCache>
             </c:numRef>
@@ -6783,76 +6788,76 @@
                 <c:formatCode>#,##0</c:formatCode>
                 <c:ptCount val="24"/>
                 <c:pt idx="0">
-                  <c:v>136</c:v>
+                  <c:v>141</c:v>
                 </c:pt>
                 <c:pt idx="1">
-                  <c:v>103</c:v>
+                  <c:v>123</c:v>
                 </c:pt>
                 <c:pt idx="2">
-                  <c:v>95</c:v>
+                  <c:v>110</c:v>
                 </c:pt>
                 <c:pt idx="3">
-                  <c:v>87</c:v>
+                  <c:v>101</c:v>
                 </c:pt>
                 <c:pt idx="4">
-                  <c:v>82</c:v>
+                  <c:v>96</c:v>
                 </c:pt>
                 <c:pt idx="5">
-                  <c:v>75</c:v>
+                  <c:v>89</c:v>
                 </c:pt>
                 <c:pt idx="6">
+                  <c:v>84</c:v>
+                </c:pt>
+                <c:pt idx="7">
+                  <c:v>79</c:v>
+                </c:pt>
+                <c:pt idx="8">
+                  <c:v>72</c:v>
+                </c:pt>
+                <c:pt idx="9">
                   <c:v>70</c:v>
                 </c:pt>
-                <c:pt idx="7">
+                <c:pt idx="10">
+                  <c:v>68</c:v>
+                </c:pt>
+                <c:pt idx="11">
                   <c:v>66</c:v>
                 </c:pt>
-                <c:pt idx="8">
-                  <c:v>64</c:v>
-                </c:pt>
-                <c:pt idx="9">
+                <c:pt idx="12">
                   <c:v>61</c:v>
                 </c:pt>
-                <c:pt idx="10">
-                  <c:v>55</c:v>
-                </c:pt>
-                <c:pt idx="11">
-                  <c:v>53</c:v>
-                </c:pt>
-                <c:pt idx="12">
-                  <c:v>52</c:v>
-                </c:pt>
                 <c:pt idx="13">
-                  <c:v>50</c:v>
+                  <c:v>58</c:v>
                 </c:pt>
                 <c:pt idx="14">
+                  <c:v>56</c:v>
+                </c:pt>
+                <c:pt idx="15">
+                  <c:v>51</c:v>
+                </c:pt>
+                <c:pt idx="16">
+                  <c:v>49</c:v>
+                </c:pt>
+                <c:pt idx="17">
+                  <c:v>49</c:v>
+                </c:pt>
+                <c:pt idx="18">
                   <c:v>48</c:v>
                 </c:pt>
-                <c:pt idx="15">
+                <c:pt idx="19">
+                  <c:v>48</c:v>
+                </c:pt>
+                <c:pt idx="20">
                   <c:v>46</c:v>
                 </c:pt>
-                <c:pt idx="16">
-                  <c:v>42</c:v>
-                </c:pt>
-                <c:pt idx="17">
-                  <c:v>39</c:v>
-                </c:pt>
-                <c:pt idx="18">
-                  <c:v>37</c:v>
-                </c:pt>
-                <c:pt idx="19">
-                  <c:v>35</c:v>
-                </c:pt>
-                <c:pt idx="20">
-                  <c:v>33</c:v>
-                </c:pt>
                 <c:pt idx="21">
-                  <c:v>31</c:v>
+                  <c:v>45</c:v>
                 </c:pt>
                 <c:pt idx="22">
-                  <c:v>31</c:v>
+                  <c:v>45</c:v>
                 </c:pt>
                 <c:pt idx="23">
-                  <c:v>31</c:v>
+                  <c:v>43</c:v>
                 </c:pt>
               </c:numCache>
             </c:numRef>
@@ -6964,73 +6969,73 @@
                   <c:v>0</c:v>
                 </c:pt>
                 <c:pt idx="1">
-                  <c:v>147</c:v>
+                  <c:v>151</c:v>
                 </c:pt>
                 <c:pt idx="2">
-                  <c:v>125</c:v>
+                  <c:v>130</c:v>
                 </c:pt>
                 <c:pt idx="3">
-                  <c:v>117</c:v>
+                  <c:v>121</c:v>
                 </c:pt>
                 <c:pt idx="4">
-                  <c:v>104</c:v>
+                  <c:v>116</c:v>
                 </c:pt>
                 <c:pt idx="5">
-                  <c:v>98</c:v>
+                  <c:v>111</c:v>
                 </c:pt>
                 <c:pt idx="6">
-                  <c:v>95</c:v>
+                  <c:v>102</c:v>
                 </c:pt>
                 <c:pt idx="7">
+                  <c:v>96</c:v>
+                </c:pt>
+                <c:pt idx="8">
                   <c:v>93</c:v>
                 </c:pt>
-                <c:pt idx="8">
-                  <c:v>87</c:v>
-                </c:pt>
                 <c:pt idx="9">
-                  <c:v>83</c:v>
+                  <c:v>88</c:v>
                 </c:pt>
                 <c:pt idx="10">
+                  <c:v>85</c:v>
+                </c:pt>
+                <c:pt idx="11">
                   <c:v>81</c:v>
-                </c:pt>
-                <c:pt idx="11">
-                  <c:v>80</c:v>
                 </c:pt>
                 <c:pt idx="12">
                   <c:v>76</c:v>
                 </c:pt>
                 <c:pt idx="13">
-                  <c:v>74</c:v>
+                  <c:v>75</c:v>
                 </c:pt>
                 <c:pt idx="14">
-                  <c:v>74</c:v>
+                  <c:v>72</c:v>
                 </c:pt>
                 <c:pt idx="15">
-                  <c:v>72</c:v>
+                  <c:v>69</c:v>
                 </c:pt>
                 <c:pt idx="16">
-                  <c:v>71</c:v>
+                  <c:v>68</c:v>
                 </c:pt>
                 <c:pt idx="17">
+                  <c:v>66</c:v>
+                </c:pt>
+                <c:pt idx="18">
                   <c:v>65</c:v>
                 </c:pt>
-                <c:pt idx="18">
+                <c:pt idx="19">
+                  <c:v>65</c:v>
+                </c:pt>
+                <c:pt idx="20">
+                  <c:v>63</c:v>
+                </c:pt>
+                <c:pt idx="21">
                   <c:v>61</c:v>
                 </c:pt>
-                <c:pt idx="19">
+                <c:pt idx="22">
+                  <c:v>59</c:v>
+                </c:pt>
+                <c:pt idx="23">
                   <c:v>58</c:v>
-                </c:pt>
-                <c:pt idx="20">
-                  <c:v>58</c:v>
-                </c:pt>
-                <c:pt idx="21">
-                  <c:v>56</c:v>
-                </c:pt>
-                <c:pt idx="22">
-                  <c:v>52</c:v>
-                </c:pt>
-                <c:pt idx="23">
-                  <c:v>52</c:v>
                 </c:pt>
               </c:numCache>
             </c:numRef>
@@ -7145,16 +7150,16 @@
                   <c:v>0</c:v>
                 </c:pt>
                 <c:pt idx="2">
-                  <c:v>150</c:v>
+                  <c:v>158</c:v>
                 </c:pt>
                 <c:pt idx="3">
-                  <c:v>121</c:v>
+                  <c:v>133</c:v>
                 </c:pt>
                 <c:pt idx="4">
-                  <c:v>108</c:v>
+                  <c:v>114</c:v>
                 </c:pt>
                 <c:pt idx="5">
-                  <c:v>99</c:v>
+                  <c:v>105</c:v>
                 </c:pt>
                 <c:pt idx="6">
                   <c:v>97</c:v>
@@ -7163,52 +7168,52 @@
                   <c:v>93</c:v>
                 </c:pt>
                 <c:pt idx="8">
-                  <c:v>89</c:v>
+                  <c:v>92</c:v>
                 </c:pt>
                 <c:pt idx="9">
-                  <c:v>88</c:v>
+                  <c:v>84</c:v>
                 </c:pt>
                 <c:pt idx="10">
-                  <c:v>82</c:v>
+                  <c:v>77</c:v>
                 </c:pt>
                 <c:pt idx="11">
-                  <c:v>74</c:v>
+                  <c:v>76</c:v>
                 </c:pt>
                 <c:pt idx="12">
-                  <c:v>68</c:v>
+                  <c:v>70</c:v>
                 </c:pt>
                 <c:pt idx="13">
-                  <c:v>62</c:v>
+                  <c:v>65</c:v>
                 </c:pt>
                 <c:pt idx="14">
-                  <c:v>60</c:v>
+                  <c:v>58</c:v>
                 </c:pt>
                 <c:pt idx="15">
-                  <c:v>58</c:v>
+                  <c:v>51</c:v>
                 </c:pt>
                 <c:pt idx="16">
-                  <c:v>57</c:v>
+                  <c:v>49</c:v>
                 </c:pt>
                 <c:pt idx="17">
-                  <c:v>54</c:v>
+                  <c:v>49</c:v>
                 </c:pt>
                 <c:pt idx="18">
-                  <c:v>53</c:v>
+                  <c:v>47</c:v>
                 </c:pt>
                 <c:pt idx="19">
-                  <c:v>50</c:v>
+                  <c:v>47</c:v>
                 </c:pt>
                 <c:pt idx="20">
-                  <c:v>48</c:v>
+                  <c:v>44</c:v>
                 </c:pt>
                 <c:pt idx="21">
-                  <c:v>46</c:v>
+                  <c:v>42</c:v>
                 </c:pt>
                 <c:pt idx="22">
-                  <c:v>45</c:v>
+                  <c:v>40</c:v>
                 </c:pt>
                 <c:pt idx="23">
-                  <c:v>42</c:v>
+                  <c:v>40</c:v>
                 </c:pt>
               </c:numCache>
             </c:numRef>
@@ -7326,67 +7331,67 @@
                   <c:v>0</c:v>
                 </c:pt>
                 <c:pt idx="3">
-                  <c:v>158</c:v>
+                  <c:v>159</c:v>
                 </c:pt>
                 <c:pt idx="4">
-                  <c:v>131</c:v>
+                  <c:v>141</c:v>
                 </c:pt>
                 <c:pt idx="5">
-                  <c:v>122</c:v>
+                  <c:v>121</c:v>
                 </c:pt>
                 <c:pt idx="6">
-                  <c:v>110</c:v>
+                  <c:v>106</c:v>
                 </c:pt>
                 <c:pt idx="7">
-                  <c:v>106</c:v>
+                  <c:v>100</c:v>
                 </c:pt>
                 <c:pt idx="8">
-                  <c:v>100</c:v>
+                  <c:v>92</c:v>
                 </c:pt>
                 <c:pt idx="9">
-                  <c:v>95</c:v>
+                  <c:v>88</c:v>
                 </c:pt>
                 <c:pt idx="10">
-                  <c:v>92</c:v>
+                  <c:v>80</c:v>
                 </c:pt>
                 <c:pt idx="11">
-                  <c:v>90</c:v>
+                  <c:v>75</c:v>
                 </c:pt>
                 <c:pt idx="12">
-                  <c:v>86</c:v>
+                  <c:v>71</c:v>
                 </c:pt>
                 <c:pt idx="13">
-                  <c:v>79</c:v>
+                  <c:v>68</c:v>
                 </c:pt>
                 <c:pt idx="14">
-                  <c:v>76</c:v>
+                  <c:v>66</c:v>
                 </c:pt>
                 <c:pt idx="15">
-                  <c:v>74</c:v>
+                  <c:v>63</c:v>
                 </c:pt>
                 <c:pt idx="16">
-                  <c:v>71</c:v>
+                  <c:v>60</c:v>
                 </c:pt>
                 <c:pt idx="17">
-                  <c:v>67</c:v>
+                  <c:v>60</c:v>
                 </c:pt>
                 <c:pt idx="18">
-                  <c:v>63</c:v>
+                  <c:v>58</c:v>
                 </c:pt>
                 <c:pt idx="19">
-                  <c:v>62</c:v>
+                  <c:v>57</c:v>
                 </c:pt>
                 <c:pt idx="20">
-                  <c:v>60</c:v>
+                  <c:v>55</c:v>
                 </c:pt>
                 <c:pt idx="21">
-                  <c:v>59</c:v>
+                  <c:v>55</c:v>
                 </c:pt>
                 <c:pt idx="22">
-                  <c:v>57</c:v>
+                  <c:v>55</c:v>
                 </c:pt>
                 <c:pt idx="23">
-                  <c:v>56</c:v>
+                  <c:v>55</c:v>
                 </c:pt>
               </c:numCache>
             </c:numRef>
@@ -7507,64 +7512,64 @@
                   <c:v>0</c:v>
                 </c:pt>
                 <c:pt idx="4">
-                  <c:v>153</c:v>
+                  <c:v>152</c:v>
                 </c:pt>
                 <c:pt idx="5">
-                  <c:v>127</c:v>
+                  <c:v>130</c:v>
                 </c:pt>
                 <c:pt idx="6">
-                  <c:v>122</c:v>
+                  <c:v>116</c:v>
                 </c:pt>
                 <c:pt idx="7">
-                  <c:v>107</c:v>
+                  <c:v>111</c:v>
                 </c:pt>
                 <c:pt idx="8">
-                  <c:v>104</c:v>
+                  <c:v>102</c:v>
                 </c:pt>
                 <c:pt idx="9">
-                  <c:v>101</c:v>
+                  <c:v>93</c:v>
                 </c:pt>
                 <c:pt idx="10">
-                  <c:v>100</c:v>
+                  <c:v>86</c:v>
                 </c:pt>
                 <c:pt idx="11">
-                  <c:v>91</c:v>
+                  <c:v>79</c:v>
                 </c:pt>
                 <c:pt idx="12">
-                  <c:v>83</c:v>
+                  <c:v>75</c:v>
                 </c:pt>
                 <c:pt idx="13">
-                  <c:v>81</c:v>
+                  <c:v>73</c:v>
                 </c:pt>
                 <c:pt idx="14">
-                  <c:v>77</c:v>
+                  <c:v>70</c:v>
                 </c:pt>
                 <c:pt idx="15">
-                  <c:v>74</c:v>
+                  <c:v>68</c:v>
                 </c:pt>
                 <c:pt idx="16">
-                  <c:v>71</c:v>
+                  <c:v>66</c:v>
                 </c:pt>
                 <c:pt idx="17">
-                  <c:v>69</c:v>
+                  <c:v>65</c:v>
                 </c:pt>
                 <c:pt idx="18">
-                  <c:v>66</c:v>
+                  <c:v>63</c:v>
                 </c:pt>
                 <c:pt idx="19">
-                  <c:v>63</c:v>
+                  <c:v>60</c:v>
                 </c:pt>
                 <c:pt idx="20">
-                  <c:v>62</c:v>
+                  <c:v>58</c:v>
                 </c:pt>
                 <c:pt idx="21">
-                  <c:v>60</c:v>
+                  <c:v>57</c:v>
                 </c:pt>
                 <c:pt idx="22">
-                  <c:v>59</c:v>
+                  <c:v>54</c:v>
                 </c:pt>
                 <c:pt idx="23">
-                  <c:v>57</c:v>
+                  <c:v>54</c:v>
                 </c:pt>
               </c:numCache>
             </c:numRef>
@@ -7688,61 +7693,61 @@
                   <c:v>0</c:v>
                 </c:pt>
                 <c:pt idx="5">
-                  <c:v>149</c:v>
+                  <c:v>148</c:v>
                 </c:pt>
                 <c:pt idx="6">
-                  <c:v>113</c:v>
+                  <c:v>130</c:v>
                 </c:pt>
                 <c:pt idx="7">
-                  <c:v>105</c:v>
+                  <c:v>115</c:v>
                 </c:pt>
                 <c:pt idx="8">
-                  <c:v>97</c:v>
+                  <c:v>109</c:v>
                 </c:pt>
                 <c:pt idx="9">
-                  <c:v>93</c:v>
+                  <c:v>102</c:v>
                 </c:pt>
                 <c:pt idx="10">
-                  <c:v>87</c:v>
+                  <c:v>92</c:v>
                 </c:pt>
                 <c:pt idx="11">
                   <c:v>86</c:v>
                 </c:pt>
                 <c:pt idx="12">
-                  <c:v>81</c:v>
+                  <c:v>83</c:v>
                 </c:pt>
                 <c:pt idx="13">
-                  <c:v>77</c:v>
+                  <c:v>79</c:v>
                 </c:pt>
                 <c:pt idx="14">
+                  <c:v>75</c:v>
+                </c:pt>
+                <c:pt idx="15">
                   <c:v>73</c:v>
                 </c:pt>
-                <c:pt idx="15">
+                <c:pt idx="16">
                   <c:v>71</c:v>
                 </c:pt>
-                <c:pt idx="16">
-                  <c:v>67</c:v>
-                </c:pt>
                 <c:pt idx="17">
-                  <c:v>66</c:v>
+                  <c:v>68</c:v>
                 </c:pt>
                 <c:pt idx="18">
-                  <c:v>58</c:v>
+                  <c:v>65</c:v>
                 </c:pt>
                 <c:pt idx="19">
-                  <c:v>55</c:v>
+                  <c:v>63</c:v>
                 </c:pt>
                 <c:pt idx="20">
-                  <c:v>52</c:v>
+                  <c:v>61</c:v>
                 </c:pt>
                 <c:pt idx="21">
-                  <c:v>50</c:v>
+                  <c:v>59</c:v>
                 </c:pt>
                 <c:pt idx="22">
-                  <c:v>48</c:v>
+                  <c:v>57</c:v>
                 </c:pt>
                 <c:pt idx="23">
-                  <c:v>47</c:v>
+                  <c:v>54</c:v>
                 </c:pt>
               </c:numCache>
             </c:numRef>
@@ -7869,58 +7874,58 @@
                   <c:v>0</c:v>
                 </c:pt>
                 <c:pt idx="6">
-                  <c:v>163</c:v>
+                  <c:v>159</c:v>
                 </c:pt>
                 <c:pt idx="7">
-                  <c:v>137</c:v>
+                  <c:v>145</c:v>
                 </c:pt>
                 <c:pt idx="8">
-                  <c:v>127</c:v>
+                  <c:v>129</c:v>
                 </c:pt>
                 <c:pt idx="9">
-                  <c:v>117</c:v>
+                  <c:v>116</c:v>
                 </c:pt>
                 <c:pt idx="10">
-                  <c:v>114</c:v>
+                  <c:v>104</c:v>
                 </c:pt>
                 <c:pt idx="11">
-                  <c:v>108</c:v>
+                  <c:v>99</c:v>
                 </c:pt>
                 <c:pt idx="12">
-                  <c:v>104</c:v>
+                  <c:v>93</c:v>
                 </c:pt>
                 <c:pt idx="13">
-                  <c:v>100</c:v>
+                  <c:v>82</c:v>
                 </c:pt>
                 <c:pt idx="14">
-                  <c:v>99</c:v>
+                  <c:v>80</c:v>
                 </c:pt>
                 <c:pt idx="15">
-                  <c:v>93</c:v>
+                  <c:v>74</c:v>
                 </c:pt>
                 <c:pt idx="16">
-                  <c:v>93</c:v>
+                  <c:v>73</c:v>
                 </c:pt>
                 <c:pt idx="17">
-                  <c:v>90</c:v>
+                  <c:v>70</c:v>
                 </c:pt>
                 <c:pt idx="18">
-                  <c:v>85</c:v>
+                  <c:v>66</c:v>
                 </c:pt>
                 <c:pt idx="19">
-                  <c:v>78</c:v>
+                  <c:v>64</c:v>
                 </c:pt>
                 <c:pt idx="20">
-                  <c:v>76</c:v>
+                  <c:v>60</c:v>
                 </c:pt>
                 <c:pt idx="21">
-                  <c:v>71</c:v>
+                  <c:v>57</c:v>
                 </c:pt>
                 <c:pt idx="22">
-                  <c:v>70</c:v>
+                  <c:v>57</c:v>
                 </c:pt>
                 <c:pt idx="23">
-                  <c:v>67</c:v>
+                  <c:v>53</c:v>
                 </c:pt>
               </c:numCache>
             </c:numRef>
@@ -8050,55 +8055,55 @@
                   <c:v>0</c:v>
                 </c:pt>
                 <c:pt idx="7">
-                  <c:v>169</c:v>
+                  <c:v>158</c:v>
                 </c:pt>
                 <c:pt idx="8">
-                  <c:v>134</c:v>
+                  <c:v>141</c:v>
                 </c:pt>
                 <c:pt idx="9">
                   <c:v>126</c:v>
                 </c:pt>
                 <c:pt idx="10">
-                  <c:v>116</c:v>
+                  <c:v>118</c:v>
                 </c:pt>
                 <c:pt idx="11">
-                  <c:v>113</c:v>
+                  <c:v>109</c:v>
                 </c:pt>
                 <c:pt idx="12">
-                  <c:v>107</c:v>
+                  <c:v>98</c:v>
                 </c:pt>
                 <c:pt idx="13">
-                  <c:v>102</c:v>
+                  <c:v>91</c:v>
                 </c:pt>
                 <c:pt idx="14">
-                  <c:v>99</c:v>
+                  <c:v>86</c:v>
                 </c:pt>
                 <c:pt idx="15">
-                  <c:v>94</c:v>
+                  <c:v>84</c:v>
                 </c:pt>
                 <c:pt idx="16">
-                  <c:v>85</c:v>
+                  <c:v>82</c:v>
                 </c:pt>
                 <c:pt idx="17">
-                  <c:v>81</c:v>
+                  <c:v>78</c:v>
                 </c:pt>
                 <c:pt idx="18">
-                  <c:v>78</c:v>
+                  <c:v>75</c:v>
                 </c:pt>
                 <c:pt idx="19">
-                  <c:v>75</c:v>
+                  <c:v>73</c:v>
                 </c:pt>
                 <c:pt idx="20">
-                  <c:v>71</c:v>
+                  <c:v>73</c:v>
                 </c:pt>
                 <c:pt idx="21">
-                  <c:v>70</c:v>
+                  <c:v>73</c:v>
                 </c:pt>
                 <c:pt idx="22">
                   <c:v>67</c:v>
                 </c:pt>
                 <c:pt idx="23">
-                  <c:v>66</c:v>
+                  <c:v>67</c:v>
                 </c:pt>
               </c:numCache>
             </c:numRef>
@@ -8231,49 +8236,49 @@
                   <c:v>0</c:v>
                 </c:pt>
                 <c:pt idx="8">
-                  <c:v>173</c:v>
+                  <c:v>174</c:v>
                 </c:pt>
                 <c:pt idx="9">
-                  <c:v>138</c:v>
+                  <c:v>159</c:v>
                 </c:pt>
                 <c:pt idx="10">
-                  <c:v>132</c:v>
+                  <c:v>150</c:v>
                 </c:pt>
                 <c:pt idx="11">
-                  <c:v>124</c:v>
+                  <c:v>136</c:v>
                 </c:pt>
                 <c:pt idx="12">
-                  <c:v>122</c:v>
+                  <c:v>127</c:v>
                 </c:pt>
                 <c:pt idx="13">
-                  <c:v>118</c:v>
+                  <c:v>123</c:v>
                 </c:pt>
                 <c:pt idx="14">
-                  <c:v>111</c:v>
+                  <c:v>113</c:v>
                 </c:pt>
                 <c:pt idx="15">
                   <c:v>105</c:v>
                 </c:pt>
                 <c:pt idx="16">
-                  <c:v>102</c:v>
+                  <c:v>98</c:v>
                 </c:pt>
                 <c:pt idx="17">
-                  <c:v>97</c:v>
+                  <c:v>95</c:v>
                 </c:pt>
                 <c:pt idx="18">
-                  <c:v>95</c:v>
+                  <c:v>94</c:v>
                 </c:pt>
                 <c:pt idx="19">
-                  <c:v>92</c:v>
+                  <c:v>91</c:v>
                 </c:pt>
                 <c:pt idx="20">
-                  <c:v>91</c:v>
+                  <c:v>88</c:v>
                 </c:pt>
                 <c:pt idx="21">
-                  <c:v>88</c:v>
+                  <c:v>83</c:v>
                 </c:pt>
                 <c:pt idx="22">
-                  <c:v>86</c:v>
+                  <c:v>83</c:v>
                 </c:pt>
                 <c:pt idx="23">
                   <c:v>83</c:v>
@@ -8412,49 +8417,49 @@
                   <c:v>0</c:v>
                 </c:pt>
                 <c:pt idx="9">
-                  <c:v>184</c:v>
+                  <c:v>187</c:v>
                 </c:pt>
                 <c:pt idx="10">
-                  <c:v>150</c:v>
+                  <c:v>161</c:v>
                 </c:pt>
                 <c:pt idx="11">
-                  <c:v>136</c:v>
+                  <c:v>152</c:v>
                 </c:pt>
                 <c:pt idx="12">
-                  <c:v>131</c:v>
+                  <c:v>140</c:v>
                 </c:pt>
                 <c:pt idx="13">
-                  <c:v>129</c:v>
+                  <c:v>134</c:v>
                 </c:pt>
                 <c:pt idx="14">
-                  <c:v>124</c:v>
+                  <c:v>123</c:v>
                 </c:pt>
                 <c:pt idx="15">
-                  <c:v>118</c:v>
+                  <c:v>116</c:v>
                 </c:pt>
                 <c:pt idx="16">
-                  <c:v>112</c:v>
+                  <c:v>110</c:v>
                 </c:pt>
                 <c:pt idx="17">
-                  <c:v>104</c:v>
+                  <c:v>105</c:v>
                 </c:pt>
                 <c:pt idx="18">
-                  <c:v>101</c:v>
+                  <c:v>99</c:v>
                 </c:pt>
                 <c:pt idx="19">
-                  <c:v>99</c:v>
+                  <c:v>94</c:v>
                 </c:pt>
                 <c:pt idx="20">
-                  <c:v>95</c:v>
+                  <c:v>93</c:v>
                 </c:pt>
                 <c:pt idx="21">
-                  <c:v>94</c:v>
+                  <c:v>89</c:v>
                 </c:pt>
                 <c:pt idx="22">
-                  <c:v>87</c:v>
+                  <c:v>84</c:v>
                 </c:pt>
                 <c:pt idx="23">
-                  <c:v>85</c:v>
+                  <c:v>83</c:v>
                 </c:pt>
               </c:numCache>
             </c:numRef>
@@ -8593,40 +8598,40 @@
                   <c:v>0</c:v>
                 </c:pt>
                 <c:pt idx="10">
-                  <c:v>182</c:v>
+                  <c:v>178</c:v>
                 </c:pt>
                 <c:pt idx="11">
-                  <c:v>148</c:v>
+                  <c:v>161</c:v>
                 </c:pt>
                 <c:pt idx="12">
-                  <c:v>143</c:v>
+                  <c:v>149</c:v>
                 </c:pt>
                 <c:pt idx="13">
-                  <c:v>131</c:v>
+                  <c:v>134</c:v>
                 </c:pt>
                 <c:pt idx="14">
-                  <c:v>126</c:v>
+                  <c:v>123</c:v>
                 </c:pt>
                 <c:pt idx="15">
-                  <c:v>121</c:v>
+                  <c:v>115</c:v>
                 </c:pt>
                 <c:pt idx="16">
-                  <c:v>119</c:v>
+                  <c:v>108</c:v>
                 </c:pt>
                 <c:pt idx="17">
-                  <c:v>113</c:v>
+                  <c:v>105</c:v>
                 </c:pt>
                 <c:pt idx="18">
-                  <c:v>109</c:v>
+                  <c:v>101</c:v>
                 </c:pt>
                 <c:pt idx="19">
-                  <c:v>104</c:v>
+                  <c:v>99</c:v>
                 </c:pt>
                 <c:pt idx="20">
-                  <c:v>100</c:v>
+                  <c:v>98</c:v>
                 </c:pt>
                 <c:pt idx="21">
-                  <c:v>99</c:v>
+                  <c:v>95</c:v>
                 </c:pt>
                 <c:pt idx="22">
                   <c:v>91</c:v>
@@ -8774,43 +8779,43 @@
                   <c:v>0</c:v>
                 </c:pt>
                 <c:pt idx="11">
-                  <c:v>176</c:v>
+                  <c:v>187</c:v>
                 </c:pt>
                 <c:pt idx="12">
-                  <c:v>141</c:v>
+                  <c:v>172</c:v>
                 </c:pt>
                 <c:pt idx="13">
-                  <c:v>133</c:v>
+                  <c:v>158</c:v>
                 </c:pt>
                 <c:pt idx="14">
-                  <c:v>117</c:v>
+                  <c:v>138</c:v>
                 </c:pt>
                 <c:pt idx="15">
-                  <c:v>108</c:v>
+                  <c:v>122</c:v>
                 </c:pt>
                 <c:pt idx="16">
-                  <c:v>105</c:v>
+                  <c:v>111</c:v>
                 </c:pt>
                 <c:pt idx="17">
-                  <c:v>101</c:v>
+                  <c:v>103</c:v>
                 </c:pt>
                 <c:pt idx="18">
-                  <c:v>98</c:v>
+                  <c:v>97</c:v>
                 </c:pt>
                 <c:pt idx="19">
-                  <c:v>96</c:v>
+                  <c:v>90</c:v>
                 </c:pt>
                 <c:pt idx="20">
-                  <c:v>88</c:v>
+                  <c:v>87</c:v>
                 </c:pt>
                 <c:pt idx="21">
                   <c:v>83</c:v>
                 </c:pt>
                 <c:pt idx="22">
-                  <c:v>80</c:v>
+                  <c:v>79</c:v>
                 </c:pt>
                 <c:pt idx="23">
-                  <c:v>80</c:v>
+                  <c:v>79</c:v>
                 </c:pt>
               </c:numCache>
             </c:numRef>
@@ -8955,40 +8960,40 @@
                   <c:v>0</c:v>
                 </c:pt>
                 <c:pt idx="12">
-                  <c:v>182</c:v>
+                  <c:v>181</c:v>
                 </c:pt>
                 <c:pt idx="13">
-                  <c:v>143</c:v>
+                  <c:v>155</c:v>
                 </c:pt>
                 <c:pt idx="14">
-                  <c:v>132</c:v>
+                  <c:v>141</c:v>
                 </c:pt>
                 <c:pt idx="15">
-                  <c:v>124</c:v>
+                  <c:v>131</c:v>
                 </c:pt>
                 <c:pt idx="16">
                   <c:v>120</c:v>
                 </c:pt>
                 <c:pt idx="17">
-                  <c:v>117</c:v>
+                  <c:v>111</c:v>
                 </c:pt>
                 <c:pt idx="18">
-                  <c:v>113</c:v>
+                  <c:v>107</c:v>
                 </c:pt>
                 <c:pt idx="19">
-                  <c:v>109</c:v>
+                  <c:v>106</c:v>
                 </c:pt>
                 <c:pt idx="20">
-                  <c:v>104</c:v>
+                  <c:v>105</c:v>
                 </c:pt>
                 <c:pt idx="21">
+                  <c:v>100</c:v>
+                </c:pt>
+                <c:pt idx="22">
                   <c:v>96</c:v>
                 </c:pt>
-                <c:pt idx="22">
+                <c:pt idx="23">
                   <c:v>92</c:v>
-                </c:pt>
-                <c:pt idx="23">
-                  <c:v>90</c:v>
                 </c:pt>
               </c:numCache>
             </c:numRef>
@@ -9139,34 +9144,34 @@
                   <c:v>185</c:v>
                 </c:pt>
                 <c:pt idx="14">
-                  <c:v>163</c:v>
+                  <c:v>156</c:v>
                 </c:pt>
                 <c:pt idx="15">
-                  <c:v>157</c:v>
+                  <c:v>141</c:v>
                 </c:pt>
                 <c:pt idx="16">
-                  <c:v>142</c:v>
+                  <c:v>121</c:v>
                 </c:pt>
                 <c:pt idx="17">
-                  <c:v>136</c:v>
+                  <c:v>118</c:v>
                 </c:pt>
                 <c:pt idx="18">
-                  <c:v>130</c:v>
+                  <c:v>110</c:v>
                 </c:pt>
                 <c:pt idx="19">
-                  <c:v>123</c:v>
+                  <c:v>100</c:v>
                 </c:pt>
                 <c:pt idx="20">
-                  <c:v>116</c:v>
+                  <c:v>96</c:v>
                 </c:pt>
                 <c:pt idx="21">
-                  <c:v>115</c:v>
+                  <c:v>90</c:v>
                 </c:pt>
                 <c:pt idx="22">
-                  <c:v>107</c:v>
+                  <c:v>87</c:v>
                 </c:pt>
                 <c:pt idx="23">
-                  <c:v>102</c:v>
+                  <c:v>83</c:v>
                 </c:pt>
               </c:numCache>
             </c:numRef>
@@ -9317,34 +9322,34 @@
                   <c:v>0</c:v>
                 </c:pt>
                 <c:pt idx="14">
-                  <c:v>191</c:v>
+                  <c:v>189</c:v>
                 </c:pt>
                 <c:pt idx="15">
-                  <c:v>153</c:v>
+                  <c:v>157</c:v>
                 </c:pt>
                 <c:pt idx="16">
-                  <c:v>138</c:v>
+                  <c:v>143</c:v>
                 </c:pt>
                 <c:pt idx="17">
-                  <c:v>126</c:v>
+                  <c:v>133</c:v>
                 </c:pt>
                 <c:pt idx="18">
-                  <c:v>123</c:v>
+                  <c:v>127</c:v>
                 </c:pt>
                 <c:pt idx="19">
-                  <c:v>119</c:v>
+                  <c:v>121</c:v>
                 </c:pt>
                 <c:pt idx="20">
-                  <c:v>116</c:v>
+                  <c:v>114</c:v>
                 </c:pt>
                 <c:pt idx="21">
-                  <c:v>112</c:v>
+                  <c:v>107</c:v>
                 </c:pt>
                 <c:pt idx="22">
-                  <c:v>108</c:v>
+                  <c:v>100</c:v>
                 </c:pt>
                 <c:pt idx="23">
-                  <c:v>104</c:v>
+                  <c:v>95</c:v>
                 </c:pt>
               </c:numCache>
             </c:numRef>
@@ -9498,31 +9503,31 @@
                   <c:v>0</c:v>
                 </c:pt>
                 <c:pt idx="15">
-                  <c:v>200</c:v>
+                  <c:v>209</c:v>
                 </c:pt>
                 <c:pt idx="16">
-                  <c:v>160</c:v>
+                  <c:v>180</c:v>
                 </c:pt>
                 <c:pt idx="17">
-                  <c:v>143</c:v>
+                  <c:v>153</c:v>
                 </c:pt>
                 <c:pt idx="18">
-                  <c:v>131</c:v>
+                  <c:v>144</c:v>
                 </c:pt>
                 <c:pt idx="19">
-                  <c:v>124</c:v>
+                  <c:v>137</c:v>
                 </c:pt>
                 <c:pt idx="20">
-                  <c:v>122</c:v>
+                  <c:v>132</c:v>
                 </c:pt>
                 <c:pt idx="21">
-                  <c:v>117</c:v>
+                  <c:v>123</c:v>
                 </c:pt>
                 <c:pt idx="22">
-                  <c:v>112</c:v>
+                  <c:v>118</c:v>
                 </c:pt>
                 <c:pt idx="23">
-                  <c:v>109</c:v>
+                  <c:v>110</c:v>
                 </c:pt>
               </c:numCache>
             </c:numRef>
@@ -9679,28 +9684,28 @@
                   <c:v>0</c:v>
                 </c:pt>
                 <c:pt idx="16">
-                  <c:v>285</c:v>
+                  <c:v>306</c:v>
                 </c:pt>
                 <c:pt idx="17">
-                  <c:v>222</c:v>
+                  <c:v>268</c:v>
                 </c:pt>
                 <c:pt idx="18">
-                  <c:v>204</c:v>
+                  <c:v>242</c:v>
                 </c:pt>
                 <c:pt idx="19">
-                  <c:v>189</c:v>
+                  <c:v>225</c:v>
                 </c:pt>
                 <c:pt idx="20">
-                  <c:v>181</c:v>
+                  <c:v>199</c:v>
                 </c:pt>
                 <c:pt idx="21">
-                  <c:v>170</c:v>
+                  <c:v>191</c:v>
                 </c:pt>
                 <c:pt idx="22">
-                  <c:v>163</c:v>
+                  <c:v>172</c:v>
                 </c:pt>
                 <c:pt idx="23">
-                  <c:v>157</c:v>
+                  <c:v>158</c:v>
                 </c:pt>
               </c:numCache>
             </c:numRef>
@@ -9860,25 +9865,25 @@
                   <c:v>0</c:v>
                 </c:pt>
                 <c:pt idx="17">
-                  <c:v>213</c:v>
+                  <c:v>210</c:v>
                 </c:pt>
                 <c:pt idx="18">
-                  <c:v>176</c:v>
+                  <c:v>185</c:v>
                 </c:pt>
                 <c:pt idx="19">
-                  <c:v>165</c:v>
+                  <c:v>162</c:v>
                 </c:pt>
                 <c:pt idx="20">
-                  <c:v>157</c:v>
+                  <c:v>147</c:v>
                 </c:pt>
                 <c:pt idx="21">
-                  <c:v>150</c:v>
+                  <c:v>133</c:v>
                 </c:pt>
                 <c:pt idx="22">
-                  <c:v>140</c:v>
+                  <c:v>124</c:v>
                 </c:pt>
                 <c:pt idx="23">
-                  <c:v>133</c:v>
+                  <c:v>119</c:v>
                 </c:pt>
               </c:numCache>
             </c:numRef>
@@ -10044,19 +10049,19 @@
                   <c:v>221</c:v>
                 </c:pt>
                 <c:pt idx="19">
-                  <c:v>184</c:v>
+                  <c:v>202</c:v>
                 </c:pt>
                 <c:pt idx="20">
-                  <c:v>173</c:v>
+                  <c:v>181</c:v>
                 </c:pt>
                 <c:pt idx="21">
-                  <c:v>166</c:v>
+                  <c:v>168</c:v>
                 </c:pt>
                 <c:pt idx="22">
-                  <c:v>157</c:v>
+                  <c:v>155</c:v>
                 </c:pt>
                 <c:pt idx="23">
-                  <c:v>153</c:v>
+                  <c:v>150</c:v>
                 </c:pt>
               </c:numCache>
             </c:numRef>
@@ -10222,19 +10227,19 @@
                   <c:v>0</c:v>
                 </c:pt>
                 <c:pt idx="19">
-                  <c:v>216</c:v>
+                  <c:v>217</c:v>
                 </c:pt>
                 <c:pt idx="20">
-                  <c:v>178</c:v>
+                  <c:v>195</c:v>
                 </c:pt>
                 <c:pt idx="21">
-                  <c:v>165</c:v>
+                  <c:v>176</c:v>
                 </c:pt>
                 <c:pt idx="22">
-                  <c:v>159</c:v>
+                  <c:v>162</c:v>
                 </c:pt>
                 <c:pt idx="23">
-                  <c:v>155</c:v>
+                  <c:v>152</c:v>
                 </c:pt>
               </c:numCache>
             </c:numRef>
@@ -10403,16 +10408,16 @@
                   <c:v>0</c:v>
                 </c:pt>
                 <c:pt idx="20">
-                  <c:v>300</c:v>
+                  <c:v>307</c:v>
                 </c:pt>
                 <c:pt idx="21">
-                  <c:v>243</c:v>
+                  <c:v>269</c:v>
                 </c:pt>
                 <c:pt idx="22">
-                  <c:v>230</c:v>
+                  <c:v>245</c:v>
                 </c:pt>
                 <c:pt idx="23">
-                  <c:v>211</c:v>
+                  <c:v>229</c:v>
                 </c:pt>
               </c:numCache>
             </c:numRef>
@@ -10584,13 +10589,13 @@
                   <c:v>0</c:v>
                 </c:pt>
                 <c:pt idx="21">
-                  <c:v>216</c:v>
+                  <c:v>222</c:v>
                 </c:pt>
                 <c:pt idx="22">
-                  <c:v>184</c:v>
+                  <c:v>197</c:v>
                 </c:pt>
                 <c:pt idx="23">
-                  <c:v>176</c:v>
+                  <c:v>175</c:v>
                 </c:pt>
               </c:numCache>
             </c:numRef>
@@ -10765,10 +10770,10 @@
                   <c:v>0</c:v>
                 </c:pt>
                 <c:pt idx="22">
-                  <c:v>231</c:v>
+                  <c:v>230</c:v>
                 </c:pt>
                 <c:pt idx="23">
-                  <c:v>194</c:v>
+                  <c:v>200</c:v>
                 </c:pt>
               </c:numCache>
             </c:numRef>
@@ -10946,7 +10951,7 @@
                   <c:v>0</c:v>
                 </c:pt>
                 <c:pt idx="23">
-                  <c:v>237</c:v>
+                  <c:v>243</c:v>
                 </c:pt>
               </c:numCache>
             </c:numRef>
@@ -11172,10 +11177,10 @@
       </p:grpSpPr>
       <p:sp>
         <p:nvSpPr>
-          <p:cNvPr id="23" name="">
+          <p:cNvPr id="25" name="">
             <a:extLst xmlns:a="http://schemas.openxmlformats.org/drawingml/2006/main">
               <a:ext uri="{FF2B5EF4-FFF2-40B4-BE49-F238E27FC236}">
-                <a16:creationId xmlns:a16="http://schemas.microsoft.com/office/drawing/2014/main" id="{071EBFA8-A5C4-45B4-A312-1AF17940F207}"/>
+                <a16:creationId xmlns:a16="http://schemas.microsoft.com/office/drawing/2014/main" id="{E88D1906-892E-4481-9786-D55FF294C719}"/>
               </a:ext>
             </a:extLst>
           </p:cNvPr>
@@ -11206,7 +11211,7 @@
           <p:cNvPr id="2" name="">
             <a:extLst xmlns:a="http://schemas.openxmlformats.org/drawingml/2006/main">
               <a:ext uri="{FF2B5EF4-FFF2-40B4-BE49-F238E27FC236}">
-                <a16:creationId xmlns:a16="http://schemas.microsoft.com/office/drawing/2014/main" id="{1B742CB7-FB87-4204-ADEB-C241FC1F1F1D}"/>
+                <a16:creationId xmlns:a16="http://schemas.microsoft.com/office/drawing/2014/main" id="{36506C51-0615-4186-88E0-766B389B528D}"/>
               </a:ext>
             </a:extLst>
           </p:cNvPr>
@@ -11353,7 +11358,7 @@
                 <a:ea typeface="Arial"/>
                 <a:cs typeface="Arial"/>
               </a:rPr>
-              <a:t>Customer economics lab</a:t>
+              <a:t>Studio North: customer economics lab</a:t>
             </a:r>
           </a:p>
         </p:txBody>
@@ -11363,7 +11368,7 @@
           <p:cNvPr id="3" name="">
             <a:extLst xmlns:a="http://schemas.openxmlformats.org/drawingml/2006/main">
               <a:ext uri="{FF2B5EF4-FFF2-40B4-BE49-F238E27FC236}">
-                <a16:creationId xmlns:a16="http://schemas.microsoft.com/office/drawing/2014/main" id="{ABA4DDF4-5768-4C0E-B29A-645F13CA8015}"/>
+                <a16:creationId xmlns:a16="http://schemas.microsoft.com/office/drawing/2014/main" id="{C202C556-F200-4FAE-ACB1-6F95E21506A5}"/>
               </a:ext>
             </a:extLst>
           </p:cNvPr>
@@ -11520,7 +11525,7 @@
           <p:cNvPr id="4" name="">
             <a:extLst xmlns:a="http://schemas.openxmlformats.org/drawingml/2006/main">
               <a:ext uri="{FF2B5EF4-FFF2-40B4-BE49-F238E27FC236}">
-                <a16:creationId xmlns:a16="http://schemas.microsoft.com/office/drawing/2014/main" id="{E089B3E6-7B27-412B-B000-6A25267A5B3F}"/>
+                <a16:creationId xmlns:a16="http://schemas.microsoft.com/office/drawing/2014/main" id="{B2F883C0-8AB9-420C-87FD-9EE60EE5C33A}"/>
               </a:ext>
             </a:extLst>
           </p:cNvPr>
@@ -11677,7 +11682,7 @@
           <p:cNvPr id="5" name="">
             <a:extLst xmlns:a="http://schemas.openxmlformats.org/drawingml/2006/main">
               <a:ext uri="{FF2B5EF4-FFF2-40B4-BE49-F238E27FC236}">
-                <a16:creationId xmlns:a16="http://schemas.microsoft.com/office/drawing/2014/main" id="{2DBE52EB-2C00-4902-8BEC-06AEB935DB89}"/>
+                <a16:creationId xmlns:a16="http://schemas.microsoft.com/office/drawing/2014/main" id="{A473BDDC-A016-48D1-A494-7ACD0F84E500}"/>
               </a:ext>
             </a:extLst>
           </p:cNvPr>
@@ -11857,7 +11862,7 @@
           <p:cNvPr id="6" name="">
             <a:extLst xmlns:a="http://schemas.openxmlformats.org/drawingml/2006/main">
               <a:ext uri="{FF2B5EF4-FFF2-40B4-BE49-F238E27FC236}">
-                <a16:creationId xmlns:a16="http://schemas.microsoft.com/office/drawing/2014/main" id="{C237EF59-3313-454E-A088-ABF000A0D6A3}"/>
+                <a16:creationId xmlns:a16="http://schemas.microsoft.com/office/drawing/2014/main" id="{253775E4-9256-46D3-9AF1-F2865D90DF4B}"/>
               </a:ext>
             </a:extLst>
           </p:cNvPr>
@@ -11868,8 +11873,8 @@
         </p:nvSpPr>
         <p:spPr>
           <a:xfrm xmlns:a="http://schemas.openxmlformats.org/drawingml/2006/main">
-            <a:off x="638175" y="3629025"/>
-            <a:ext cx="5905500" cy="1066800"/>
+            <a:off x="638175" y="3257550"/>
+            <a:ext cx="6191250" cy="695325"/>
           </a:xfrm>
           <a:prstGeom xmlns:a="http://schemas.openxmlformats.org/drawingml/2006/main" prst="rect">
             <a:avLst/>
@@ -11884,9 +11889,9 @@
           <a:bodyPr xmlns:a="http://schemas.openxmlformats.org/drawingml/2006/main" lIns="0" tIns="0" rIns="0" bIns="0" anchor="ctr"/>
           <a:lstStyle xmlns:a="http://schemas.openxmlformats.org/drawingml/2006/main">
             <a:defPPr>
-              <a:defRPr sz="1800" b="0">
-                <a:solidFill>
-                  <a:srgbClr val="172D3C"/>
+              <a:defRPr sz="1725" b="1">
+                <a:solidFill>
+                  <a:srgbClr val="087F8C"/>
                 </a:solidFill>
                 <a:latin typeface="Arial"/>
                 <a:ea typeface="Arial"/>
@@ -11894,9 +11899,9 @@
               </a:defRPr>
             </a:defPPr>
             <a:lvl1pPr>
-              <a:defRPr sz="1800" b="0">
-                <a:solidFill>
-                  <a:srgbClr val="172D3C"/>
+              <a:defRPr sz="1725" b="1">
+                <a:solidFill>
+                  <a:srgbClr val="087F8C"/>
                 </a:solidFill>
                 <a:latin typeface="Arial"/>
                 <a:ea typeface="Arial"/>
@@ -11904,9 +11909,9 @@
               </a:defRPr>
             </a:lvl1pPr>
             <a:lvl2pPr>
-              <a:defRPr sz="1800" b="0">
-                <a:solidFill>
-                  <a:srgbClr val="172D3C"/>
+              <a:defRPr sz="1725" b="1">
+                <a:solidFill>
+                  <a:srgbClr val="087F8C"/>
                 </a:solidFill>
                 <a:latin typeface="Arial"/>
                 <a:ea typeface="Arial"/>
@@ -11914,9 +11919,9 @@
               </a:defRPr>
             </a:lvl2pPr>
             <a:lvl3pPr>
-              <a:defRPr sz="1800" b="0">
-                <a:solidFill>
-                  <a:srgbClr val="172D3C"/>
+              <a:defRPr sz="1725" b="1">
+                <a:solidFill>
+                  <a:srgbClr val="087F8C"/>
                 </a:solidFill>
                 <a:latin typeface="Arial"/>
                 <a:ea typeface="Arial"/>
@@ -11924,9 +11929,9 @@
               </a:defRPr>
             </a:lvl3pPr>
             <a:lvl4pPr>
-              <a:defRPr sz="1800" b="0">
-                <a:solidFill>
-                  <a:srgbClr val="172D3C"/>
+              <a:defRPr sz="1725" b="1">
+                <a:solidFill>
+                  <a:srgbClr val="087F8C"/>
                 </a:solidFill>
                 <a:latin typeface="Arial"/>
                 <a:ea typeface="Arial"/>
@@ -11934,9 +11939,9 @@
               </a:defRPr>
             </a:lvl4pPr>
             <a:lvl5pPr>
-              <a:defRPr sz="1800" b="0">
-                <a:solidFill>
-                  <a:srgbClr val="172D3C"/>
+              <a:defRPr sz="1725" b="1">
+                <a:solidFill>
+                  <a:srgbClr val="087F8C"/>
                 </a:solidFill>
                 <a:latin typeface="Arial"/>
                 <a:ea typeface="Arial"/>
@@ -11944,9 +11949,9 @@
               </a:defRPr>
             </a:lvl5pPr>
             <a:lvl6pPr>
-              <a:defRPr sz="1800" b="0">
-                <a:solidFill>
-                  <a:srgbClr val="172D3C"/>
+              <a:defRPr sz="1725" b="1">
+                <a:solidFill>
+                  <a:srgbClr val="087F8C"/>
                 </a:solidFill>
                 <a:latin typeface="Arial"/>
                 <a:ea typeface="Arial"/>
@@ -11954,9 +11959,9 @@
               </a:defRPr>
             </a:lvl6pPr>
             <a:lvl7pPr>
-              <a:defRPr sz="1800" b="0">
-                <a:solidFill>
-                  <a:srgbClr val="172D3C"/>
+              <a:defRPr sz="1725" b="1">
+                <a:solidFill>
+                  <a:srgbClr val="087F8C"/>
                 </a:solidFill>
                 <a:latin typeface="Arial"/>
                 <a:ea typeface="Arial"/>
@@ -11964,9 +11969,9 @@
               </a:defRPr>
             </a:lvl7pPr>
             <a:lvl8pPr>
-              <a:defRPr sz="1800" b="0">
-                <a:solidFill>
-                  <a:srgbClr val="172D3C"/>
+              <a:defRPr sz="1725" b="1">
+                <a:solidFill>
+                  <a:srgbClr val="087F8C"/>
                 </a:solidFill>
                 <a:latin typeface="Arial"/>
                 <a:ea typeface="Arial"/>
@@ -11974,9 +11979,9 @@
               </a:defRPr>
             </a:lvl8pPr>
             <a:lvl9pPr>
-              <a:defRPr sz="1800" b="0">
-                <a:solidFill>
-                  <a:srgbClr val="172D3C"/>
+              <a:defRPr sz="1725" b="1">
+                <a:solidFill>
+                  <a:srgbClr val="087F8C"/>
                 </a:solidFill>
                 <a:latin typeface="Arial"/>
                 <a:ea typeface="Arial"/>
@@ -11986,9 +11991,9 @@
           </a:lstStyle>
           <a:p xmlns:a="http://schemas.openxmlformats.org/drawingml/2006/main">
             <a:pPr>
-              <a:defRPr sz="1800" b="0">
-                <a:solidFill>
-                  <a:srgbClr val="172D3C"/>
+              <a:defRPr sz="1725" b="1">
+                <a:solidFill>
+                  <a:srgbClr val="087F8C"/>
                 </a:solidFill>
                 <a:latin typeface="Arial"/>
                 <a:ea typeface="Arial"/>
@@ -11996,15 +12001,15 @@
               </a:defRPr>
             </a:pPr>
             <a:r>
-              <a:rPr sz="1800" b="0">
-                <a:solidFill>
-                  <a:srgbClr val="172D3C"/>
+              <a:rPr sz="1725" b="1">
+                <a:solidFill>
+                  <a:srgbClr val="087F8C"/>
                 </a:solidFill>
                 <a:latin typeface="Arial"/>
                 <a:ea typeface="Arial"/>
                 <a:cs typeface="Arial"/>
               </a:rPr>
-              <a:t>Connect separate CSV exports, inspect customer cohorts, and distinguish predicted value from incremental marketing effects.</a:t>
+              <a:t>Compare acquisition efficiency, contribution value and cash recovery across cohorts.</a:t>
             </a:r>
           </a:p>
         </p:txBody>
@@ -12014,7 +12019,344 @@
           <p:cNvPr id="7" name="">
             <a:extLst xmlns:a="http://schemas.openxmlformats.org/drawingml/2006/main">
               <a:ext uri="{FF2B5EF4-FFF2-40B4-BE49-F238E27FC236}">
-                <a16:creationId xmlns:a16="http://schemas.microsoft.com/office/drawing/2014/main" id="{A5F4D458-25AA-47CB-A6CB-C7D033A0DBC7}"/>
+                <a16:creationId xmlns:a16="http://schemas.microsoft.com/office/drawing/2014/main" id="{1EBACCCB-A1BB-4A7A-9074-444CA8851164}"/>
+              </a:ext>
+            </a:extLst>
+          </p:cNvPr>
+          <p:cNvSpPr>
+            <a:spLocks xmlns:a="http://schemas.openxmlformats.org/drawingml/2006/main" noGrp="1"/>
+          </p:cNvSpPr>
+          <p:nvPr/>
+        </p:nvSpPr>
+        <p:spPr>
+          <a:xfrm xmlns:a="http://schemas.openxmlformats.org/drawingml/2006/main">
+            <a:off x="638175" y="4057650"/>
+            <a:ext cx="6191250" cy="904875"/>
+          </a:xfrm>
+          <a:prstGeom xmlns:a="http://schemas.openxmlformats.org/drawingml/2006/main" prst="rect">
+            <a:avLst/>
+          </a:prstGeom>
+          <a:noFill xmlns:a="http://schemas.openxmlformats.org/drawingml/2006/main"/>
+          <a:ln xmlns:a="http://schemas.openxmlformats.org/drawingml/2006/main" w="0">
+            <a:noFill/>
+            <a:prstDash val="solid"/>
+          </a:ln>
+        </p:spPr>
+        <p:txBody>
+          <a:bodyPr xmlns:a="http://schemas.openxmlformats.org/drawingml/2006/main" lIns="0" tIns="0" rIns="0" bIns="0" anchor="ctr"/>
+          <a:lstStyle xmlns:a="http://schemas.openxmlformats.org/drawingml/2006/main">
+            <a:defPPr>
+              <a:defRPr sz="1575" b="0">
+                <a:solidFill>
+                  <a:srgbClr val="172D3C"/>
+                </a:solidFill>
+                <a:latin typeface="Arial"/>
+                <a:ea typeface="Arial"/>
+                <a:cs typeface="Arial"/>
+              </a:defRPr>
+            </a:defPPr>
+            <a:lvl1pPr>
+              <a:defRPr sz="1575" b="0">
+                <a:solidFill>
+                  <a:srgbClr val="172D3C"/>
+                </a:solidFill>
+                <a:latin typeface="Arial"/>
+                <a:ea typeface="Arial"/>
+                <a:cs typeface="Arial"/>
+              </a:defRPr>
+            </a:lvl1pPr>
+            <a:lvl2pPr>
+              <a:defRPr sz="1575" b="0">
+                <a:solidFill>
+                  <a:srgbClr val="172D3C"/>
+                </a:solidFill>
+                <a:latin typeface="Arial"/>
+                <a:ea typeface="Arial"/>
+                <a:cs typeface="Arial"/>
+              </a:defRPr>
+            </a:lvl2pPr>
+            <a:lvl3pPr>
+              <a:defRPr sz="1575" b="0">
+                <a:solidFill>
+                  <a:srgbClr val="172D3C"/>
+                </a:solidFill>
+                <a:latin typeface="Arial"/>
+                <a:ea typeface="Arial"/>
+                <a:cs typeface="Arial"/>
+              </a:defRPr>
+            </a:lvl3pPr>
+            <a:lvl4pPr>
+              <a:defRPr sz="1575" b="0">
+                <a:solidFill>
+                  <a:srgbClr val="172D3C"/>
+                </a:solidFill>
+                <a:latin typeface="Arial"/>
+                <a:ea typeface="Arial"/>
+                <a:cs typeface="Arial"/>
+              </a:defRPr>
+            </a:lvl4pPr>
+            <a:lvl5pPr>
+              <a:defRPr sz="1575" b="0">
+                <a:solidFill>
+                  <a:srgbClr val="172D3C"/>
+                </a:solidFill>
+                <a:latin typeface="Arial"/>
+                <a:ea typeface="Arial"/>
+                <a:cs typeface="Arial"/>
+              </a:defRPr>
+            </a:lvl5pPr>
+            <a:lvl6pPr>
+              <a:defRPr sz="1575" b="0">
+                <a:solidFill>
+                  <a:srgbClr val="172D3C"/>
+                </a:solidFill>
+                <a:latin typeface="Arial"/>
+                <a:ea typeface="Arial"/>
+                <a:cs typeface="Arial"/>
+              </a:defRPr>
+            </a:lvl6pPr>
+            <a:lvl7pPr>
+              <a:defRPr sz="1575" b="0">
+                <a:solidFill>
+                  <a:srgbClr val="172D3C"/>
+                </a:solidFill>
+                <a:latin typeface="Arial"/>
+                <a:ea typeface="Arial"/>
+                <a:cs typeface="Arial"/>
+              </a:defRPr>
+            </a:lvl7pPr>
+            <a:lvl8pPr>
+              <a:defRPr sz="1575" b="0">
+                <a:solidFill>
+                  <a:srgbClr val="172D3C"/>
+                </a:solidFill>
+                <a:latin typeface="Arial"/>
+                <a:ea typeface="Arial"/>
+                <a:cs typeface="Arial"/>
+              </a:defRPr>
+            </a:lvl8pPr>
+            <a:lvl9pPr>
+              <a:defRPr sz="1575" b="0">
+                <a:solidFill>
+                  <a:srgbClr val="172D3C"/>
+                </a:solidFill>
+                <a:latin typeface="Arial"/>
+                <a:ea typeface="Arial"/>
+                <a:cs typeface="Arial"/>
+              </a:defRPr>
+            </a:lvl9pPr>
+          </a:lstStyle>
+          <a:p xmlns:a="http://schemas.openxmlformats.org/drawingml/2006/main">
+            <a:pPr>
+              <a:defRPr sz="1575" b="0">
+                <a:solidFill>
+                  <a:srgbClr val="172D3C"/>
+                </a:solidFill>
+                <a:latin typeface="Arial"/>
+                <a:ea typeface="Arial"/>
+                <a:cs typeface="Arial"/>
+              </a:defRPr>
+            </a:pPr>
+            <a:r>
+              <a:rPr sz="1575" b="0">
+                <a:solidFill>
+                  <a:srgbClr val="172D3C"/>
+                </a:solidFill>
+                <a:latin typeface="Arial"/>
+                <a:ea typeface="Arial"/>
+                <a:cs typeface="Arial"/>
+              </a:rPr>
+              <a:t>A monthly creative-work membership for independent professionals: templates save time, guided learning builds skills, and workshops add value.</a:t>
+            </a:r>
+          </a:p>
+        </p:txBody>
+      </p:sp>
+      <p:sp>
+        <p:nvSpPr>
+          <p:cNvPr id="8" name="">
+            <a:extLst xmlns:a="http://schemas.openxmlformats.org/drawingml/2006/main">
+              <a:ext uri="{FF2B5EF4-FFF2-40B4-BE49-F238E27FC236}">
+                <a16:creationId xmlns:a16="http://schemas.microsoft.com/office/drawing/2014/main" id="{EC536923-CF68-46A0-A156-C1B5794C88C5}"/>
+              </a:ext>
+            </a:extLst>
+          </p:cNvPr>
+          <p:cNvSpPr>
+            <a:spLocks xmlns:a="http://schemas.openxmlformats.org/drawingml/2006/main" noGrp="1"/>
+          </p:cNvSpPr>
+          <p:nvPr/>
+        </p:nvSpPr>
+        <p:spPr>
+          <a:xfrm xmlns:a="http://schemas.openxmlformats.org/drawingml/2006/main">
+            <a:off x="638175" y="5095875"/>
+            <a:ext cx="6191250" cy="476250"/>
+          </a:xfrm>
+          <a:prstGeom xmlns:a="http://schemas.openxmlformats.org/drawingml/2006/main" prst="rect">
+            <a:avLst/>
+          </a:prstGeom>
+          <a:noFill xmlns:a="http://schemas.openxmlformats.org/drawingml/2006/main"/>
+          <a:ln xmlns:a="http://schemas.openxmlformats.org/drawingml/2006/main" w="0">
+            <a:noFill/>
+            <a:prstDash val="solid"/>
+          </a:ln>
+        </p:spPr>
+        <p:txBody>
+          <a:bodyPr xmlns:a="http://schemas.openxmlformats.org/drawingml/2006/main" lIns="0" tIns="0" rIns="0" bIns="0" anchor="ctr"/>
+          <a:lstStyle xmlns:a="http://schemas.openxmlformats.org/drawingml/2006/main">
+            <a:defPPr>
+              <a:defRPr sz="1275" b="0">
+                <a:solidFill>
+                  <a:srgbClr val="687780"/>
+                </a:solidFill>
+                <a:latin typeface="Arial"/>
+                <a:ea typeface="Arial"/>
+                <a:cs typeface="Arial"/>
+              </a:defRPr>
+            </a:defPPr>
+            <a:lvl1pPr>
+              <a:defRPr sz="1275" b="0">
+                <a:solidFill>
+                  <a:srgbClr val="687780"/>
+                </a:solidFill>
+                <a:latin typeface="Arial"/>
+                <a:ea typeface="Arial"/>
+                <a:cs typeface="Arial"/>
+              </a:defRPr>
+            </a:lvl1pPr>
+            <a:lvl2pPr>
+              <a:defRPr sz="1275" b="0">
+                <a:solidFill>
+                  <a:srgbClr val="687780"/>
+                </a:solidFill>
+                <a:latin typeface="Arial"/>
+                <a:ea typeface="Arial"/>
+                <a:cs typeface="Arial"/>
+              </a:defRPr>
+            </a:lvl2pPr>
+            <a:lvl3pPr>
+              <a:defRPr sz="1275" b="0">
+                <a:solidFill>
+                  <a:srgbClr val="687780"/>
+                </a:solidFill>
+                <a:latin typeface="Arial"/>
+                <a:ea typeface="Arial"/>
+                <a:cs typeface="Arial"/>
+              </a:defRPr>
+            </a:lvl3pPr>
+            <a:lvl4pPr>
+              <a:defRPr sz="1275" b="0">
+                <a:solidFill>
+                  <a:srgbClr val="687780"/>
+                </a:solidFill>
+                <a:latin typeface="Arial"/>
+                <a:ea typeface="Arial"/>
+                <a:cs typeface="Arial"/>
+              </a:defRPr>
+            </a:lvl4pPr>
+            <a:lvl5pPr>
+              <a:defRPr sz="1275" b="0">
+                <a:solidFill>
+                  <a:srgbClr val="687780"/>
+                </a:solidFill>
+                <a:latin typeface="Arial"/>
+                <a:ea typeface="Arial"/>
+                <a:cs typeface="Arial"/>
+              </a:defRPr>
+            </a:lvl5pPr>
+            <a:lvl6pPr>
+              <a:defRPr sz="1275" b="0">
+                <a:solidFill>
+                  <a:srgbClr val="687780"/>
+                </a:solidFill>
+                <a:latin typeface="Arial"/>
+                <a:ea typeface="Arial"/>
+                <a:cs typeface="Arial"/>
+              </a:defRPr>
+            </a:lvl6pPr>
+            <a:lvl7pPr>
+              <a:defRPr sz="1275" b="0">
+                <a:solidFill>
+                  <a:srgbClr val="687780"/>
+                </a:solidFill>
+                <a:latin typeface="Arial"/>
+                <a:ea typeface="Arial"/>
+                <a:cs typeface="Arial"/>
+              </a:defRPr>
+            </a:lvl7pPr>
+            <a:lvl8pPr>
+              <a:defRPr sz="1275" b="0">
+                <a:solidFill>
+                  <a:srgbClr val="687780"/>
+                </a:solidFill>
+                <a:latin typeface="Arial"/>
+                <a:ea typeface="Arial"/>
+                <a:cs typeface="Arial"/>
+              </a:defRPr>
+            </a:lvl8pPr>
+            <a:lvl9pPr>
+              <a:defRPr sz="1275" b="0">
+                <a:solidFill>
+                  <a:srgbClr val="687780"/>
+                </a:solidFill>
+                <a:latin typeface="Arial"/>
+                <a:ea typeface="Arial"/>
+                <a:cs typeface="Arial"/>
+              </a:defRPr>
+            </a:lvl9pPr>
+          </a:lstStyle>
+          <a:p xmlns:a="http://schemas.openxmlformats.org/drawingml/2006/main">
+            <a:pPr>
+              <a:defRPr sz="1275" b="0">
+                <a:solidFill>
+                  <a:srgbClr val="687780"/>
+                </a:solidFill>
+                <a:latin typeface="Arial"/>
+                <a:ea typeface="Arial"/>
+                <a:cs typeface="Arial"/>
+              </a:defRPr>
+            </a:pPr>
+            <a:r>
+              <a:rPr sz="1275" b="0">
+                <a:solidFill>
+                  <a:srgbClr val="687780"/>
+                </a:solidFill>
+                <a:latin typeface="Arial"/>
+                <a:ea typeface="Arial"/>
+                <a:cs typeface="Arial"/>
+              </a:rPr>
+              <a:t>24 joining cohorts: January 2024–December 2025.</a:t>
+            </a:r>
+          </a:p>
+          <a:p xmlns:a="http://schemas.openxmlformats.org/drawingml/2006/main">
+            <a:pPr>
+              <a:defRPr sz="1275" b="0">
+                <a:solidFill>
+                  <a:srgbClr val="687780"/>
+                </a:solidFill>
+                <a:latin typeface="Arial"/>
+                <a:ea typeface="Arial"/>
+                <a:cs typeface="Arial"/>
+              </a:defRPr>
+            </a:pPr>
+            <a:r>
+              <a:rPr sz="1275" b="0">
+                <a:solidFill>
+                  <a:srgbClr val="687780"/>
+                </a:solidFill>
+                <a:latin typeface="Arial"/>
+                <a:ea typeface="Arial"/>
+                <a:cs typeface="Arial"/>
+              </a:rPr>
+              <a:t>Monthly renewals; cutoff January 1, 2026 (exclusive).</a:t>
+            </a:r>
+          </a:p>
+        </p:txBody>
+      </p:sp>
+      <p:sp>
+        <p:nvSpPr>
+          <p:cNvPr id="9" name="">
+            <a:extLst xmlns:a="http://schemas.openxmlformats.org/drawingml/2006/main">
+              <a:ext uri="{FF2B5EF4-FFF2-40B4-BE49-F238E27FC236}">
+                <a16:creationId xmlns:a16="http://schemas.microsoft.com/office/drawing/2014/main" id="{C955CD5F-7DA6-4816-B33B-C48581068DA3}"/>
               </a:ext>
             </a:extLst>
           </p:cNvPr>
@@ -12042,10 +12384,10 @@
       </p:sp>
       <p:sp>
         <p:nvSpPr>
-          <p:cNvPr id="8" name="">
+          <p:cNvPr id="10" name="">
             <a:extLst xmlns:a="http://schemas.openxmlformats.org/drawingml/2006/main">
               <a:ext uri="{FF2B5EF4-FFF2-40B4-BE49-F238E27FC236}">
-                <a16:creationId xmlns:a16="http://schemas.microsoft.com/office/drawing/2014/main" id="{0688D3B5-3B98-40B5-96E4-8023D3E9B732}"/>
+                <a16:creationId xmlns:a16="http://schemas.microsoft.com/office/drawing/2014/main" id="{5EF53085-DCF9-417E-AF0C-EBE334CF6160}"/>
               </a:ext>
             </a:extLst>
           </p:cNvPr>
@@ -12199,10 +12541,10 @@
       </p:sp>
       <p:sp>
         <p:nvSpPr>
-          <p:cNvPr id="9" name="">
+          <p:cNvPr id="11" name="">
             <a:extLst xmlns:a="http://schemas.openxmlformats.org/drawingml/2006/main">
               <a:ext uri="{FF2B5EF4-FFF2-40B4-BE49-F238E27FC236}">
-                <a16:creationId xmlns:a16="http://schemas.microsoft.com/office/drawing/2014/main" id="{AF03E9BB-0FBD-4E22-9994-807523CEB2B5}"/>
+                <a16:creationId xmlns:a16="http://schemas.microsoft.com/office/drawing/2014/main" id="{7248BD78-92F4-4C14-B0DB-243B3EB359FC}"/>
               </a:ext>
             </a:extLst>
           </p:cNvPr>
@@ -12230,10 +12572,10 @@
       </p:sp>
       <p:sp>
         <p:nvSpPr>
-          <p:cNvPr id="10" name="">
+          <p:cNvPr id="12" name="">
             <a:extLst xmlns:a="http://schemas.openxmlformats.org/drawingml/2006/main">
               <a:ext uri="{FF2B5EF4-FFF2-40B4-BE49-F238E27FC236}">
-                <a16:creationId xmlns:a16="http://schemas.microsoft.com/office/drawing/2014/main" id="{240AF894-C3FE-48DD-B4EC-011C1E5EC70C}"/>
+                <a16:creationId xmlns:a16="http://schemas.microsoft.com/office/drawing/2014/main" id="{901691CD-50C2-408F-978C-BDD995F7F313}"/>
               </a:ext>
             </a:extLst>
           </p:cNvPr>
@@ -12387,10 +12729,10 @@
       </p:sp>
       <p:sp>
         <p:nvSpPr>
-          <p:cNvPr id="11" name="">
+          <p:cNvPr id="13" name="">
             <a:extLst xmlns:a="http://schemas.openxmlformats.org/drawingml/2006/main">
               <a:ext uri="{FF2B5EF4-FFF2-40B4-BE49-F238E27FC236}">
-                <a16:creationId xmlns:a16="http://schemas.microsoft.com/office/drawing/2014/main" id="{70C81519-7C6E-435A-9079-1EC8E409E26D}"/>
+                <a16:creationId xmlns:a16="http://schemas.microsoft.com/office/drawing/2014/main" id="{75EA0847-0554-4571-88BB-87AA4BB30504}"/>
               </a:ext>
             </a:extLst>
           </p:cNvPr>
@@ -12418,10 +12760,10 @@
       </p:sp>
       <p:sp>
         <p:nvSpPr>
-          <p:cNvPr id="12" name="">
+          <p:cNvPr id="14" name="">
             <a:extLst xmlns:a="http://schemas.openxmlformats.org/drawingml/2006/main">
               <a:ext uri="{FF2B5EF4-FFF2-40B4-BE49-F238E27FC236}">
-                <a16:creationId xmlns:a16="http://schemas.microsoft.com/office/drawing/2014/main" id="{76267A6A-C74F-49C5-9C1E-D643E816B129}"/>
+                <a16:creationId xmlns:a16="http://schemas.microsoft.com/office/drawing/2014/main" id="{84EFFACE-A10E-488E-8E24-21F2A4CB5C14}"/>
               </a:ext>
             </a:extLst>
           </p:cNvPr>
@@ -12575,10 +12917,10 @@
       </p:sp>
       <p:sp>
         <p:nvSpPr>
-          <p:cNvPr id="13" name="">
+          <p:cNvPr id="15" name="">
             <a:extLst xmlns:a="http://schemas.openxmlformats.org/drawingml/2006/main">
               <a:ext uri="{FF2B5EF4-FFF2-40B4-BE49-F238E27FC236}">
-                <a16:creationId xmlns:a16="http://schemas.microsoft.com/office/drawing/2014/main" id="{BAC2AA83-92BF-484B-988A-335D0583CCDF}"/>
+                <a16:creationId xmlns:a16="http://schemas.microsoft.com/office/drawing/2014/main" id="{8964666D-CB34-484F-ABB5-70F2791910DE}"/>
               </a:ext>
             </a:extLst>
           </p:cNvPr>
@@ -12606,10 +12948,10 @@
       </p:sp>
       <p:sp>
         <p:nvSpPr>
-          <p:cNvPr id="14" name="">
+          <p:cNvPr id="16" name="">
             <a:extLst xmlns:a="http://schemas.openxmlformats.org/drawingml/2006/main">
               <a:ext uri="{FF2B5EF4-FFF2-40B4-BE49-F238E27FC236}">
-                <a16:creationId xmlns:a16="http://schemas.microsoft.com/office/drawing/2014/main" id="{4904BC62-6DE0-4EF6-BBA1-13CE264674D7}"/>
+                <a16:creationId xmlns:a16="http://schemas.microsoft.com/office/drawing/2014/main" id="{40B3C0B3-B813-4BAD-ADBE-C57DF049F21B}"/>
               </a:ext>
             </a:extLst>
           </p:cNvPr>
@@ -12763,10 +13105,10 @@
       </p:sp>
       <p:sp>
         <p:nvSpPr>
-          <p:cNvPr id="15" name="">
+          <p:cNvPr id="17" name="">
             <a:extLst xmlns:a="http://schemas.openxmlformats.org/drawingml/2006/main">
               <a:ext uri="{FF2B5EF4-FFF2-40B4-BE49-F238E27FC236}">
-                <a16:creationId xmlns:a16="http://schemas.microsoft.com/office/drawing/2014/main" id="{9723481C-7AC3-44B8-A821-430F6B2787AD}"/>
+                <a16:creationId xmlns:a16="http://schemas.microsoft.com/office/drawing/2014/main" id="{708DB089-1DF8-4988-B064-68BBF20736E9}"/>
               </a:ext>
             </a:extLst>
           </p:cNvPr>
@@ -12794,10 +13136,10 @@
       </p:sp>
       <p:sp>
         <p:nvSpPr>
-          <p:cNvPr id="16" name="">
+          <p:cNvPr id="18" name="">
             <a:extLst xmlns:a="http://schemas.openxmlformats.org/drawingml/2006/main">
               <a:ext uri="{FF2B5EF4-FFF2-40B4-BE49-F238E27FC236}">
-                <a16:creationId xmlns:a16="http://schemas.microsoft.com/office/drawing/2014/main" id="{B27B79D3-37D2-45CD-8F7B-BCAABB8F1431}"/>
+                <a16:creationId xmlns:a16="http://schemas.microsoft.com/office/drawing/2014/main" id="{BE0100E7-3910-42FD-8826-663131098959}"/>
               </a:ext>
             </a:extLst>
           </p:cNvPr>
@@ -12951,10 +13293,10 @@
       </p:sp>
       <p:sp>
         <p:nvSpPr>
-          <p:cNvPr id="17" name="">
+          <p:cNvPr id="19" name="">
             <a:extLst xmlns:a="http://schemas.openxmlformats.org/drawingml/2006/main">
               <a:ext uri="{FF2B5EF4-FFF2-40B4-BE49-F238E27FC236}">
-                <a16:creationId xmlns:a16="http://schemas.microsoft.com/office/drawing/2014/main" id="{CE98ABCA-D4A9-4D6A-A99C-A29B02D5C7F0}"/>
+                <a16:creationId xmlns:a16="http://schemas.microsoft.com/office/drawing/2014/main" id="{5B383CEC-280E-4257-B7F5-E57D65B8FBAA}"/>
               </a:ext>
             </a:extLst>
           </p:cNvPr>
@@ -12982,10 +13324,10 @@
       </p:sp>
       <p:sp>
         <p:nvSpPr>
-          <p:cNvPr id="18" name="">
+          <p:cNvPr id="20" name="">
             <a:extLst xmlns:a="http://schemas.openxmlformats.org/drawingml/2006/main">
               <a:ext uri="{FF2B5EF4-FFF2-40B4-BE49-F238E27FC236}">
-                <a16:creationId xmlns:a16="http://schemas.microsoft.com/office/drawing/2014/main" id="{5BEE758D-40DD-4FAD-986F-1E1DB8EE69EA}"/>
+                <a16:creationId xmlns:a16="http://schemas.microsoft.com/office/drawing/2014/main" id="{DBE197DA-E43C-474B-BE55-868A248F1495}"/>
               </a:ext>
             </a:extLst>
           </p:cNvPr>
@@ -13139,10 +13481,10 @@
       </p:sp>
       <p:sp>
         <p:nvSpPr>
-          <p:cNvPr id="19" name="">
+          <p:cNvPr id="21" name="">
             <a:extLst xmlns:a="http://schemas.openxmlformats.org/drawingml/2006/main">
               <a:ext uri="{FF2B5EF4-FFF2-40B4-BE49-F238E27FC236}">
-                <a16:creationId xmlns:a16="http://schemas.microsoft.com/office/drawing/2014/main" id="{3025041D-72E4-436F-B383-9BBD89351091}"/>
+                <a16:creationId xmlns:a16="http://schemas.microsoft.com/office/drawing/2014/main" id="{8060F412-0419-4F8B-A07B-A5FDEB51284B}"/>
               </a:ext>
             </a:extLst>
           </p:cNvPr>
@@ -13170,10 +13512,10 @@
       </p:sp>
       <p:sp>
         <p:nvSpPr>
-          <p:cNvPr id="20" name="">
+          <p:cNvPr id="22" name="">
             <a:extLst xmlns:a="http://schemas.openxmlformats.org/drawingml/2006/main">
               <a:ext uri="{FF2B5EF4-FFF2-40B4-BE49-F238E27FC236}">
-                <a16:creationId xmlns:a16="http://schemas.microsoft.com/office/drawing/2014/main" id="{A5B85DA3-7DF9-4C8D-82A2-33868F2A889D}"/>
+                <a16:creationId xmlns:a16="http://schemas.microsoft.com/office/drawing/2014/main" id="{623B9416-5214-4C5E-99D5-01314914B6FE}"/>
               </a:ext>
             </a:extLst>
           </p:cNvPr>
@@ -13327,10 +13669,10 @@
       </p:sp>
       <p:sp>
         <p:nvSpPr>
-          <p:cNvPr id="21" name="">
+          <p:cNvPr id="23" name="">
             <a:extLst xmlns:a="http://schemas.openxmlformats.org/drawingml/2006/main">
               <a:ext uri="{FF2B5EF4-FFF2-40B4-BE49-F238E27FC236}">
-                <a16:creationId xmlns:a16="http://schemas.microsoft.com/office/drawing/2014/main" id="{DD2DB42F-1555-469B-A499-A10A56428B20}"/>
+                <a16:creationId xmlns:a16="http://schemas.microsoft.com/office/drawing/2014/main" id="{37DDC9F3-38A7-45E6-8551-49D41B8AF183}"/>
               </a:ext>
             </a:extLst>
           </p:cNvPr>
@@ -13358,10 +13700,10 @@
       </p:sp>
       <p:sp>
         <p:nvSpPr>
-          <p:cNvPr id="22" name="">
+          <p:cNvPr id="24" name="">
             <a:extLst xmlns:a="http://schemas.openxmlformats.org/drawingml/2006/main">
               <a:ext uri="{FF2B5EF4-FFF2-40B4-BE49-F238E27FC236}">
-                <a16:creationId xmlns:a16="http://schemas.microsoft.com/office/drawing/2014/main" id="{A5AF4032-A932-400B-B16E-B874DB90F967}"/>
+                <a16:creationId xmlns:a16="http://schemas.microsoft.com/office/drawing/2014/main" id="{1B099141-4194-4B14-BD40-8A7CB97EEDA8}"/>
               </a:ext>
             </a:extLst>
           </p:cNvPr>
@@ -13516,7 +13858,7 @@
     </p:spTree>
     <p:extLst>
       <p:ext uri="{BB962C8B-B14F-4D97-AF65-F5344CB8AC3E}">
-        <p14:creationId xmlns:p14="http://schemas.microsoft.com/office/powerpoint/2010/main" val="1324676297"/>
+        <p14:creationId xmlns:p14="http://schemas.microsoft.com/office/powerpoint/2010/main" val="1741626160"/>
       </p:ext>
     </p:extLst>
   </p:cSld>
@@ -13547,7 +13889,7 @@
           <p:cNvPr id="10" name="">
             <a:extLst xmlns:a="http://schemas.openxmlformats.org/drawingml/2006/main">
               <a:ext uri="{FF2B5EF4-FFF2-40B4-BE49-F238E27FC236}">
-                <a16:creationId xmlns:a16="http://schemas.microsoft.com/office/drawing/2014/main" id="{524F15A3-62FD-4163-9899-FAB8CD54026A}"/>
+                <a16:creationId xmlns:a16="http://schemas.microsoft.com/office/drawing/2014/main" id="{7E1E7414-2B39-4174-8D08-1C674E78B788}"/>
               </a:ext>
             </a:extLst>
           </p:cNvPr>
@@ -13578,7 +13920,7 @@
           <p:cNvPr id="2" name="">
             <a:extLst xmlns:a="http://schemas.openxmlformats.org/drawingml/2006/main">
               <a:ext uri="{FF2B5EF4-FFF2-40B4-BE49-F238E27FC236}">
-                <a16:creationId xmlns:a16="http://schemas.microsoft.com/office/drawing/2014/main" id="{9B4FC9A9-AA6F-4AEF-9415-9287F83B03A5}"/>
+                <a16:creationId xmlns:a16="http://schemas.microsoft.com/office/drawing/2014/main" id="{013A04E3-E0C7-4F68-A577-C8F49BADE11F}"/>
               </a:ext>
             </a:extLst>
           </p:cNvPr>
@@ -13725,7 +14067,7 @@
                 <a:ea typeface="Arial"/>
                 <a:cs typeface="Arial"/>
               </a:rPr>
-              <a:t>Group decision 3: which campaign merits a repeat pilot?</a:t>
+              <a:t>Group decision 3: is one month enough to decide?</a:t>
             </a:r>
           </a:p>
         </p:txBody>
@@ -13735,7 +14077,7 @@
           <p:cNvPr id="3" name="">
             <a:extLst xmlns:a="http://schemas.openxmlformats.org/drawingml/2006/main">
               <a:ext uri="{FF2B5EF4-FFF2-40B4-BE49-F238E27FC236}">
-                <a16:creationId xmlns:a16="http://schemas.microsoft.com/office/drawing/2014/main" id="{B900D152-A8C1-43B0-AACA-4AF3B55E13F2}"/>
+                <a16:creationId xmlns:a16="http://schemas.microsoft.com/office/drawing/2014/main" id="{D079BD4A-A036-4A3C-BAD0-BCD67E12B76C}"/>
               </a:ext>
             </a:extLst>
           </p:cNvPr>
@@ -13892,7 +14234,7 @@
           <p:cNvPr id="4" name="">
             <a:extLst xmlns:a="http://schemas.openxmlformats.org/drawingml/2006/main">
               <a:ext uri="{FF2B5EF4-FFF2-40B4-BE49-F238E27FC236}">
-                <a16:creationId xmlns:a16="http://schemas.microsoft.com/office/drawing/2014/main" id="{7117CC5B-EA49-4F65-A508-2A0E3ECDF285}"/>
+                <a16:creationId xmlns:a16="http://schemas.microsoft.com/office/drawing/2014/main" id="{FECAD0A0-4178-4AC9-89E0-9B46B1699C71}"/>
               </a:ext>
             </a:extLst>
           </p:cNvPr>
@@ -14049,7 +14391,7 @@
           <p:cNvPr id="5" name="">
             <a:extLst xmlns:a="http://schemas.openxmlformats.org/drawingml/2006/main">
               <a:ext uri="{FF2B5EF4-FFF2-40B4-BE49-F238E27FC236}">
-                <a16:creationId xmlns:a16="http://schemas.microsoft.com/office/drawing/2014/main" id="{657FDA03-1601-4815-B15A-2613BB5C17AA}"/>
+                <a16:creationId xmlns:a16="http://schemas.microsoft.com/office/drawing/2014/main" id="{D5A6D2C2-02B3-4000-8A2B-283BD8A66E26}"/>
               </a:ext>
             </a:extLst>
           </p:cNvPr>
@@ -14061,7 +14403,7 @@
         <p:spPr>
           <a:xfrm xmlns:a="http://schemas.openxmlformats.org/drawingml/2006/main">
             <a:off x="609600" y="1495425"/>
-            <a:ext cx="10972800" cy="571500"/>
+            <a:ext cx="10972800" cy="666750"/>
           </a:xfrm>
           <a:prstGeom xmlns:a="http://schemas.openxmlformats.org/drawingml/2006/main" prst="rect">
             <a:avLst/>
@@ -14196,7 +14538,7 @@
                 <a:ea typeface="Arial"/>
                 <a:cs typeface="Arial"/>
               </a:rPr>
-              <a:t>Each campaign randomized 250 eligible prospects to treatment and 250 to its own no-campaign control.</a:t>
+              <a:t>Each campaign randomized 250 prospects to treatment and 250 to its own control. Follow-up lasts about one month.</a:t>
             </a:r>
           </a:p>
         </p:txBody>
@@ -14206,7 +14548,7 @@
           <p:cNvPr id="6" name="">
             <a:extLst xmlns:a="http://schemas.openxmlformats.org/drawingml/2006/main">
               <a:ext uri="{FF2B5EF4-FFF2-40B4-BE49-F238E27FC236}">
-                <a16:creationId xmlns:a16="http://schemas.microsoft.com/office/drawing/2014/main" id="{4A42074D-6DAD-41A2-802C-642E0437348E}"/>
+                <a16:creationId xmlns:a16="http://schemas.microsoft.com/office/drawing/2014/main" id="{6A04DBAA-9152-448B-B53C-F11E9F034DAF}"/>
               </a:ext>
             </a:extLst>
           </p:cNvPr>
@@ -14215,19 +14557,19 @@
         </p:nvGraphicFramePr>
         <p:xfrm>
           <a:off xmlns:a="http://schemas.openxmlformats.org/drawingml/2006/main" x="609600" y="2381250"/>
-          <a:ext xmlns:a="http://schemas.openxmlformats.org/drawingml/2006/main" cx="10972800" cy="1619250"/>
+          <a:ext xmlns:a="http://schemas.openxmlformats.org/drawingml/2006/main" cx="10972800" cy="1714500"/>
         </p:xfrm>
         <a:graphic xmlns:a="http://schemas.openxmlformats.org/drawingml/2006/main">
           <a:graphicData uri="http://schemas.openxmlformats.org/drawingml/2006/table">
             <a:tbl>
               <a:tblPr/>
               <a:tblGrid>
-                <a:gridCol w="3000375"/>
-                <a:gridCol w="2762250"/>
-                <a:gridCol w="2095500"/>
-                <a:gridCol w="3114675"/>
+                <a:gridCol w="3429000"/>
+                <a:gridCol w="1619250"/>
+                <a:gridCol w="2857500"/>
+                <a:gridCol w="3067050"/>
               </a:tblGrid>
-              <a:tr h="539750">
+              <a:tr h="571500">
                 <a:tc>
                   <a:txBody>
                     <a:bodyPr/>
@@ -14266,7 +14608,7 @@
                           <a:ea typeface="Arial"/>
                           <a:cs typeface="Arial"/>
                         </a:rPr>
-                        <a:t>Incremental contribution</a:t>
+                        <a:t>Follow-up</a:t>
                       </a:r>
                     </a:p>
                   </a:txBody>
@@ -14290,7 +14632,7 @@
                           <a:ea typeface="Arial"/>
                           <a:cs typeface="Arial"/>
                         </a:rPr>
-                        <a:t>Additional media</a:t>
+                        <a:t>Incremental contribution after media / prospect</a:t>
                       </a:r>
                     </a:p>
                   </a:txBody>
@@ -14314,7 +14656,7 @@
                           <a:ea typeface="Arial"/>
                           <a:cs typeface="Arial"/>
                         </a:rPr>
-                        <a:t>After media / eligible prospect</a:t>
+                        <a:t>Approx. 95% interval</a:t>
                       </a:r>
                     </a:p>
                   </a:txBody>
@@ -14325,7 +14667,7 @@
                   </a:tcPr>
                 </a:tc>
               </a:tr>
-              <a:tr h="539750">
+              <a:tr h="571500">
                 <a:tc>
                   <a:txBody>
                     <a:bodyPr/>
@@ -14364,7 +14706,7 @@
                           <a:ea typeface="Arial"/>
                           <a:cs typeface="Arial"/>
                         </a:rPr>
-                        <a:t>$658.80</a:t>
+                        <a:t>31 days</a:t>
                       </a:r>
                     </a:p>
                   </a:txBody>
@@ -14388,7 +14730,7 @@
                           <a:ea typeface="Arial"/>
                           <a:cs typeface="Arial"/>
                         </a:rPr>
-                        <a:t>$650.00</a:t>
+                        <a:t>$1.16</a:t>
                       </a:r>
                     </a:p>
                   </a:txBody>
@@ -14412,7 +14754,7 @@
                           <a:ea typeface="Arial"/>
                           <a:cs typeface="Arial"/>
                         </a:rPr>
-                        <a:t>$0.04</a:t>
+                        <a:t>-$0.62 to $2.94</a:t>
                       </a:r>
                     </a:p>
                   </a:txBody>
@@ -14423,7 +14765,7 @@
                   </a:tcPr>
                 </a:tc>
               </a:tr>
-              <a:tr h="539750">
+              <a:tr h="571500">
                 <a:tc>
                   <a:txBody>
                     <a:bodyPr/>
@@ -14462,7 +14804,7 @@
                           <a:ea typeface="Arial"/>
                           <a:cs typeface="Arial"/>
                         </a:rPr>
-                        <a:t>$1,161.65</a:t>
+                        <a:t>30 days</a:t>
                       </a:r>
                     </a:p>
                   </a:txBody>
@@ -14486,7 +14828,7 @@
                           <a:ea typeface="Arial"/>
                           <a:cs typeface="Arial"/>
                         </a:rPr>
-                        <a:t>$900.00</a:t>
+                        <a:t>-$0.36</a:t>
                       </a:r>
                     </a:p>
                   </a:txBody>
@@ -14510,7 +14852,7 @@
                           <a:ea typeface="Arial"/>
                           <a:cs typeface="Arial"/>
                         </a:rPr>
-                        <a:t>$1.05</a:t>
+                        <a:t>-$2.26 to $1.54</a:t>
                       </a:r>
                     </a:p>
                   </a:txBody>
@@ -14530,7 +14872,7 @@
           <p:cNvPr id="7" name="">
             <a:extLst xmlns:a="http://schemas.openxmlformats.org/drawingml/2006/main">
               <a:ext uri="{FF2B5EF4-FFF2-40B4-BE49-F238E27FC236}">
-                <a16:creationId xmlns:a16="http://schemas.microsoft.com/office/drawing/2014/main" id="{433FF798-0887-4A28-B9DA-7A448B8C2A32}"/>
+                <a16:creationId xmlns:a16="http://schemas.microsoft.com/office/drawing/2014/main" id="{FB4276DE-C0AF-4EED-8D2C-F6E92CCB3224}"/>
               </a:ext>
             </a:extLst>
           </p:cNvPr>
@@ -14541,8 +14883,8 @@
         </p:nvSpPr>
         <p:spPr>
           <a:xfrm xmlns:a="http://schemas.openxmlformats.org/drawingml/2006/main">
-            <a:off x="609600" y="4314825"/>
-            <a:ext cx="10972800" cy="647700"/>
+            <a:off x="609600" y="4352925"/>
+            <a:ext cx="10972800" cy="714375"/>
           </a:xfrm>
           <a:prstGeom xmlns:a="http://schemas.openxmlformats.org/drawingml/2006/main" prst="rect">
             <a:avLst/>
@@ -14677,7 +15019,7 @@
                 <a:ea typeface="Arial"/>
                 <a:cs typeface="Arial"/>
               </a:rPr>
-              <a:t>Which tested campaign would you prioritize for a repeat pilot, and what limits that recommendation?</a:t>
+              <a:t>Would you scale, stop, or keep measuring? What evidence would change your decision?</a:t>
             </a:r>
           </a:p>
         </p:txBody>
@@ -14687,7 +15029,7 @@
           <p:cNvPr id="8" name="">
             <a:extLst xmlns:a="http://schemas.openxmlformats.org/drawingml/2006/main">
               <a:ext uri="{FF2B5EF4-FFF2-40B4-BE49-F238E27FC236}">
-                <a16:creationId xmlns:a16="http://schemas.microsoft.com/office/drawing/2014/main" id="{7157565C-2CED-49F8-846C-B8ADC6332A43}"/>
+                <a16:creationId xmlns:a16="http://schemas.microsoft.com/office/drawing/2014/main" id="{73C7F91F-D197-480C-89BA-2941ECC2349F}"/>
               </a:ext>
             </a:extLst>
           </p:cNvPr>
@@ -14718,7 +15060,7 @@
           <p:cNvPr id="9" name="">
             <a:extLst xmlns:a="http://schemas.openxmlformats.org/drawingml/2006/main">
               <a:ext uri="{FF2B5EF4-FFF2-40B4-BE49-F238E27FC236}">
-                <a16:creationId xmlns:a16="http://schemas.microsoft.com/office/drawing/2014/main" id="{F6ED55AD-E4B6-41DF-93E5-A76D780B09FD}"/>
+                <a16:creationId xmlns:a16="http://schemas.microsoft.com/office/drawing/2014/main" id="{A6F76899-C22C-4AFB-94E8-09A045ECD8C6}"/>
               </a:ext>
             </a:extLst>
           </p:cNvPr>
@@ -14865,7 +15207,7 @@
                 <a:ea typeface="Arial"/>
                 <a:cs typeface="Arial"/>
               </a:rPr>
-              <a:t>Keep each test’s control and all nonbuyers. These point estimates do not establish an optimal marginal budget allocation.</a:t>
+              <a:t>Cohort payback takes months. Predicted customer LTV cannot replace longer experimental follow-up.</a:t>
             </a:r>
           </a:p>
         </p:txBody>
@@ -14873,7 +15215,7 @@
     </p:spTree>
     <p:extLst>
       <p:ext uri="{BB962C8B-B14F-4D97-AF65-F5344CB8AC3E}">
-        <p14:creationId xmlns:p14="http://schemas.microsoft.com/office/powerpoint/2010/main" val="84053613"/>
+        <p14:creationId xmlns:p14="http://schemas.microsoft.com/office/powerpoint/2010/main" val="44384454"/>
       </p:ext>
     </p:extLst>
   </p:cSld>
@@ -14904,7 +15246,7 @@
           <p:cNvPr id="20" name="">
             <a:extLst xmlns:a="http://schemas.openxmlformats.org/drawingml/2006/main">
               <a:ext uri="{FF2B5EF4-FFF2-40B4-BE49-F238E27FC236}">
-                <a16:creationId xmlns:a16="http://schemas.microsoft.com/office/drawing/2014/main" id="{8FA95192-706A-458F-83F5-500A877FA7C7}"/>
+                <a16:creationId xmlns:a16="http://schemas.microsoft.com/office/drawing/2014/main" id="{6FACA31C-8688-483E-A379-3A817092343C}"/>
               </a:ext>
             </a:extLst>
           </p:cNvPr>
@@ -14935,7 +15277,7 @@
           <p:cNvPr id="2" name="">
             <a:extLst xmlns:a="http://schemas.openxmlformats.org/drawingml/2006/main">
               <a:ext uri="{FF2B5EF4-FFF2-40B4-BE49-F238E27FC236}">
-                <a16:creationId xmlns:a16="http://schemas.microsoft.com/office/drawing/2014/main" id="{AB04EC6E-0337-4DE5-AB80-C3C3A04389E9}"/>
+                <a16:creationId xmlns:a16="http://schemas.microsoft.com/office/drawing/2014/main" id="{CCA6623C-5F27-4688-891E-193B0F4E67DA}"/>
               </a:ext>
             </a:extLst>
           </p:cNvPr>
@@ -15082,7 +15424,7 @@
                 <a:ea typeface="Arial"/>
                 <a:cs typeface="Arial"/>
               </a:rPr>
-              <a:t>LTV extends the observed history under assumptions</a:t>
+              <a:t>A model turns observed renewal histories into an LTV forecast</a:t>
             </a:r>
           </a:p>
         </p:txBody>
@@ -15092,7 +15434,7 @@
           <p:cNvPr id="3" name="">
             <a:extLst xmlns:a="http://schemas.openxmlformats.org/drawingml/2006/main">
               <a:ext uri="{FF2B5EF4-FFF2-40B4-BE49-F238E27FC236}">
-                <a16:creationId xmlns:a16="http://schemas.microsoft.com/office/drawing/2014/main" id="{C6A136CA-981B-4431-89DF-A73814129508}"/>
+                <a16:creationId xmlns:a16="http://schemas.microsoft.com/office/drawing/2014/main" id="{C9D73068-1D55-4140-837E-04A8336D5140}"/>
               </a:ext>
             </a:extLst>
           </p:cNvPr>
@@ -15249,7 +15591,7 @@
           <p:cNvPr id="4" name="">
             <a:extLst xmlns:a="http://schemas.openxmlformats.org/drawingml/2006/main">
               <a:ext uri="{FF2B5EF4-FFF2-40B4-BE49-F238E27FC236}">
-                <a16:creationId xmlns:a16="http://schemas.microsoft.com/office/drawing/2014/main" id="{6DE26D17-5FAF-4ED5-850F-0D796BE16B3A}"/>
+                <a16:creationId xmlns:a16="http://schemas.microsoft.com/office/drawing/2014/main" id="{9EE0572B-0BAC-47B5-A565-D25738108890}"/>
               </a:ext>
             </a:extLst>
           </p:cNvPr>
@@ -15406,7 +15748,7 @@
           <p:cNvPr id="5" name="">
             <a:extLst xmlns:a="http://schemas.openxmlformats.org/drawingml/2006/main">
               <a:ext uri="{FF2B5EF4-FFF2-40B4-BE49-F238E27FC236}">
-                <a16:creationId xmlns:a16="http://schemas.microsoft.com/office/drawing/2014/main" id="{3A768B66-4F7C-4280-A4C9-643177A5E868}"/>
+                <a16:creationId xmlns:a16="http://schemas.microsoft.com/office/drawing/2014/main" id="{4F871FA3-2B31-47A4-BBA5-08C62D300563}"/>
               </a:ext>
             </a:extLst>
           </p:cNvPr>
@@ -15418,13 +15760,13 @@
         <p:spPr>
           <a:xfrm xmlns:a="http://schemas.openxmlformats.org/drawingml/2006/main">
             <a:off x="609600" y="1685925"/>
-            <a:ext cx="3429000" cy="2362200"/>
+            <a:ext cx="3429000" cy="2590800"/>
           </a:xfrm>
           <a:prstGeom xmlns:a="http://schemas.openxmlformats.org/drawingml/2006/main" prst="rect">
             <a:avLst/>
           </a:prstGeom>
           <a:solidFill xmlns:a="http://schemas.openxmlformats.org/drawingml/2006/main">
-            <a:srgbClr val="EAF4F3"/>
+            <a:srgbClr val="EDF5FA"/>
           </a:solidFill>
           <a:ln xmlns:a="http://schemas.openxmlformats.org/drawingml/2006/main" w="0">
             <a:noFill/>
@@ -15437,7 +15779,7 @@
           <p:cNvPr id="6" name="">
             <a:extLst xmlns:a="http://schemas.openxmlformats.org/drawingml/2006/main">
               <a:ext uri="{FF2B5EF4-FFF2-40B4-BE49-F238E27FC236}">
-                <a16:creationId xmlns:a16="http://schemas.microsoft.com/office/drawing/2014/main" id="{EE8F0A6D-8D5C-4505-B1FF-518C9B8BBCEC}"/>
+                <a16:creationId xmlns:a16="http://schemas.microsoft.com/office/drawing/2014/main" id="{4E9C527E-ADAC-4C3F-8B40-5C21B8E880AF}"/>
               </a:ext>
             </a:extLst>
           </p:cNvPr>
@@ -15449,13 +15791,13 @@
         <p:spPr>
           <a:xfrm xmlns:a="http://schemas.openxmlformats.org/drawingml/2006/main">
             <a:off x="609600" y="1685925"/>
-            <a:ext cx="47625" cy="2362200"/>
+            <a:ext cx="47625" cy="2590800"/>
           </a:xfrm>
           <a:prstGeom xmlns:a="http://schemas.openxmlformats.org/drawingml/2006/main" prst="rect">
             <a:avLst/>
           </a:prstGeom>
           <a:solidFill xmlns:a="http://schemas.openxmlformats.org/drawingml/2006/main">
-            <a:srgbClr val="687780"/>
+            <a:srgbClr val="3191B5"/>
           </a:solidFill>
           <a:ln xmlns:a="http://schemas.openxmlformats.org/drawingml/2006/main" w="0">
             <a:noFill/>
@@ -15468,7 +15810,7 @@
           <p:cNvPr id="7" name="">
             <a:extLst xmlns:a="http://schemas.openxmlformats.org/drawingml/2006/main">
               <a:ext uri="{FF2B5EF4-FFF2-40B4-BE49-F238E27FC236}">
-                <a16:creationId xmlns:a16="http://schemas.microsoft.com/office/drawing/2014/main" id="{F1B7F92F-599B-4266-A7CB-ED0FD3D89093}"/>
+                <a16:creationId xmlns:a16="http://schemas.microsoft.com/office/drawing/2014/main" id="{4B861253-F942-4758-9656-AFB38E63AAAA}"/>
               </a:ext>
             </a:extLst>
           </p:cNvPr>
@@ -15497,7 +15839,7 @@
             <a:defPPr>
               <a:defRPr sz="1800" b="1">
                 <a:solidFill>
-                  <a:srgbClr val="687780"/>
+                  <a:srgbClr val="3191B5"/>
                 </a:solidFill>
                 <a:latin typeface="Arial"/>
                 <a:ea typeface="Arial"/>
@@ -15507,7 +15849,7 @@
             <a:lvl1pPr>
               <a:defRPr sz="1800" b="1">
                 <a:solidFill>
-                  <a:srgbClr val="687780"/>
+                  <a:srgbClr val="3191B5"/>
                 </a:solidFill>
                 <a:latin typeface="Arial"/>
                 <a:ea typeface="Arial"/>
@@ -15517,7 +15859,7 @@
             <a:lvl2pPr>
               <a:defRPr sz="1800" b="1">
                 <a:solidFill>
-                  <a:srgbClr val="687780"/>
+                  <a:srgbClr val="3191B5"/>
                 </a:solidFill>
                 <a:latin typeface="Arial"/>
                 <a:ea typeface="Arial"/>
@@ -15527,7 +15869,7 @@
             <a:lvl3pPr>
               <a:defRPr sz="1800" b="1">
                 <a:solidFill>
-                  <a:srgbClr val="687780"/>
+                  <a:srgbClr val="3191B5"/>
                 </a:solidFill>
                 <a:latin typeface="Arial"/>
                 <a:ea typeface="Arial"/>
@@ -15537,7 +15879,7 @@
             <a:lvl4pPr>
               <a:defRPr sz="1800" b="1">
                 <a:solidFill>
-                  <a:srgbClr val="687780"/>
+                  <a:srgbClr val="3191B5"/>
                 </a:solidFill>
                 <a:latin typeface="Arial"/>
                 <a:ea typeface="Arial"/>
@@ -15547,7 +15889,7 @@
             <a:lvl5pPr>
               <a:defRPr sz="1800" b="1">
                 <a:solidFill>
-                  <a:srgbClr val="687780"/>
+                  <a:srgbClr val="3191B5"/>
                 </a:solidFill>
                 <a:latin typeface="Arial"/>
                 <a:ea typeface="Arial"/>
@@ -15557,7 +15899,7 @@
             <a:lvl6pPr>
               <a:defRPr sz="1800" b="1">
                 <a:solidFill>
-                  <a:srgbClr val="687780"/>
+                  <a:srgbClr val="3191B5"/>
                 </a:solidFill>
                 <a:latin typeface="Arial"/>
                 <a:ea typeface="Arial"/>
@@ -15567,7 +15909,7 @@
             <a:lvl7pPr>
               <a:defRPr sz="1800" b="1">
                 <a:solidFill>
-                  <a:srgbClr val="687780"/>
+                  <a:srgbClr val="3191B5"/>
                 </a:solidFill>
                 <a:latin typeface="Arial"/>
                 <a:ea typeface="Arial"/>
@@ -15577,7 +15919,7 @@
             <a:lvl8pPr>
               <a:defRPr sz="1800" b="1">
                 <a:solidFill>
-                  <a:srgbClr val="687780"/>
+                  <a:srgbClr val="3191B5"/>
                 </a:solidFill>
                 <a:latin typeface="Arial"/>
                 <a:ea typeface="Arial"/>
@@ -15587,7 +15929,7 @@
             <a:lvl9pPr>
               <a:defRPr sz="1800" b="1">
                 <a:solidFill>
-                  <a:srgbClr val="687780"/>
+                  <a:srgbClr val="3191B5"/>
                 </a:solidFill>
                 <a:latin typeface="Arial"/>
                 <a:ea typeface="Arial"/>
@@ -15599,7 +15941,7 @@
             <a:pPr>
               <a:defRPr sz="1800" b="1">
                 <a:solidFill>
-                  <a:srgbClr val="687780"/>
+                  <a:srgbClr val="3191B5"/>
                 </a:solidFill>
                 <a:latin typeface="Arial"/>
                 <a:ea typeface="Arial"/>
@@ -15609,13 +15951,13 @@
             <a:r>
               <a:rPr sz="1800" b="1">
                 <a:solidFill>
-                  <a:srgbClr val="687780"/>
+                  <a:srgbClr val="3191B5"/>
                 </a:solidFill>
                 <a:latin typeface="Arial"/>
                 <a:ea typeface="Arial"/>
                 <a:cs typeface="Arial"/>
               </a:rPr>
-              <a:t>Observed months</a:t>
+              <a:t>Different customer risks</a:t>
             </a:r>
           </a:p>
         </p:txBody>
@@ -15625,7 +15967,7 @@
           <p:cNvPr id="8" name="">
             <a:extLst xmlns:a="http://schemas.openxmlformats.org/drawingml/2006/main">
               <a:ext uri="{FF2B5EF4-FFF2-40B4-BE49-F238E27FC236}">
-                <a16:creationId xmlns:a16="http://schemas.microsoft.com/office/drawing/2014/main" id="{483DAEC3-A7A6-447C-9927-69735B836D9E}"/>
+                <a16:creationId xmlns:a16="http://schemas.microsoft.com/office/drawing/2014/main" id="{8F78CB94-809D-4EAF-B728-016C9ED277B6}"/>
               </a:ext>
             </a:extLst>
           </p:cNvPr>
@@ -15637,7 +15979,7 @@
         <p:spPr>
           <a:xfrm xmlns:a="http://schemas.openxmlformats.org/drawingml/2006/main">
             <a:off x="800100" y="2257425"/>
-            <a:ext cx="3048000" cy="1647825"/>
+            <a:ext cx="3048000" cy="1876425"/>
           </a:xfrm>
           <a:prstGeom xmlns:a="http://schemas.openxmlformats.org/drawingml/2006/main" prst="rect">
             <a:avLst/>
@@ -15772,7 +16114,7 @@
                 <a:ea typeface="Arial"/>
                 <a:cs typeface="Arial"/>
               </a:rPr>
-              <a:t>Use the contribution already recorded for the cohort, including zeros for customers who left.</a:t>
+              <a:t>The synthetic business gives each member a persistent baseline churn propensity. A mixture of two distributions creates heterogeneity within segments.</a:t>
             </a:r>
           </a:p>
         </p:txBody>
@@ -15782,7 +16124,7 @@
           <p:cNvPr id="9" name="">
             <a:extLst xmlns:a="http://schemas.openxmlformats.org/drawingml/2006/main">
               <a:ext uri="{FF2B5EF4-FFF2-40B4-BE49-F238E27FC236}">
-                <a16:creationId xmlns:a16="http://schemas.microsoft.com/office/drawing/2014/main" id="{B55E4065-64C8-466A-B4E5-138CD9FAE9A6}"/>
+                <a16:creationId xmlns:a16="http://schemas.microsoft.com/office/drawing/2014/main" id="{D591A1DB-B3FC-40F5-A16A-B8F8838C7B52}"/>
               </a:ext>
             </a:extLst>
           </p:cNvPr>
@@ -15794,13 +16136,13 @@
         <p:spPr>
           <a:xfrm xmlns:a="http://schemas.openxmlformats.org/drawingml/2006/main">
             <a:off x="4381500" y="1685925"/>
-            <a:ext cx="3429000" cy="2362200"/>
+            <a:ext cx="3429000" cy="2590800"/>
           </a:xfrm>
           <a:prstGeom xmlns:a="http://schemas.openxmlformats.org/drawingml/2006/main" prst="rect">
             <a:avLst/>
           </a:prstGeom>
           <a:solidFill xmlns:a="http://schemas.openxmlformats.org/drawingml/2006/main">
-            <a:srgbClr val="EAF4F3"/>
+            <a:srgbClr val="EDF5FA"/>
           </a:solidFill>
           <a:ln xmlns:a="http://schemas.openxmlformats.org/drawingml/2006/main" w="0">
             <a:noFill/>
@@ -15813,7 +16155,7 @@
           <p:cNvPr id="10" name="">
             <a:extLst xmlns:a="http://schemas.openxmlformats.org/drawingml/2006/main">
               <a:ext uri="{FF2B5EF4-FFF2-40B4-BE49-F238E27FC236}">
-                <a16:creationId xmlns:a16="http://schemas.microsoft.com/office/drawing/2014/main" id="{7BCF2D4D-EC65-4A68-8BA2-6F023939CFA9}"/>
+                <a16:creationId xmlns:a16="http://schemas.microsoft.com/office/drawing/2014/main" id="{93FFD39E-6EAC-4245-8E6E-EFB4F54F087D}"/>
               </a:ext>
             </a:extLst>
           </p:cNvPr>
@@ -15825,13 +16167,13 @@
         <p:spPr>
           <a:xfrm xmlns:a="http://schemas.openxmlformats.org/drawingml/2006/main">
             <a:off x="4381500" y="1685925"/>
-            <a:ext cx="47625" cy="2362200"/>
+            <a:ext cx="47625" cy="2590800"/>
           </a:xfrm>
           <a:prstGeom xmlns:a="http://schemas.openxmlformats.org/drawingml/2006/main" prst="rect">
             <a:avLst/>
           </a:prstGeom>
           <a:solidFill xmlns:a="http://schemas.openxmlformats.org/drawingml/2006/main">
-            <a:srgbClr val="087F8C"/>
+            <a:srgbClr val="3191B5"/>
           </a:solidFill>
           <a:ln xmlns:a="http://schemas.openxmlformats.org/drawingml/2006/main" w="0">
             <a:noFill/>
@@ -15844,7 +16186,7 @@
           <p:cNvPr id="11" name="">
             <a:extLst xmlns:a="http://schemas.openxmlformats.org/drawingml/2006/main">
               <a:ext uri="{FF2B5EF4-FFF2-40B4-BE49-F238E27FC236}">
-                <a16:creationId xmlns:a16="http://schemas.microsoft.com/office/drawing/2014/main" id="{618ED8FC-A4F1-45FE-82CC-4F59412CBCA9}"/>
+                <a16:creationId xmlns:a16="http://schemas.microsoft.com/office/drawing/2014/main" id="{1F09DB25-70A2-41AD-862F-FB23A2F2F640}"/>
               </a:ext>
             </a:extLst>
           </p:cNvPr>
@@ -15873,7 +16215,7 @@
             <a:defPPr>
               <a:defRPr sz="1800" b="1">
                 <a:solidFill>
-                  <a:srgbClr val="087F8C"/>
+                  <a:srgbClr val="3191B5"/>
                 </a:solidFill>
                 <a:latin typeface="Arial"/>
                 <a:ea typeface="Arial"/>
@@ -15883,7 +16225,7 @@
             <a:lvl1pPr>
               <a:defRPr sz="1800" b="1">
                 <a:solidFill>
-                  <a:srgbClr val="087F8C"/>
+                  <a:srgbClr val="3191B5"/>
                 </a:solidFill>
                 <a:latin typeface="Arial"/>
                 <a:ea typeface="Arial"/>
@@ -15893,7 +16235,7 @@
             <a:lvl2pPr>
               <a:defRPr sz="1800" b="1">
                 <a:solidFill>
-                  <a:srgbClr val="087F8C"/>
+                  <a:srgbClr val="3191B5"/>
                 </a:solidFill>
                 <a:latin typeface="Arial"/>
                 <a:ea typeface="Arial"/>
@@ -15903,7 +16245,7 @@
             <a:lvl3pPr>
               <a:defRPr sz="1800" b="1">
                 <a:solidFill>
-                  <a:srgbClr val="087F8C"/>
+                  <a:srgbClr val="3191B5"/>
                 </a:solidFill>
                 <a:latin typeface="Arial"/>
                 <a:ea typeface="Arial"/>
@@ -15913,7 +16255,7 @@
             <a:lvl4pPr>
               <a:defRPr sz="1800" b="1">
                 <a:solidFill>
-                  <a:srgbClr val="087F8C"/>
+                  <a:srgbClr val="3191B5"/>
                 </a:solidFill>
                 <a:latin typeface="Arial"/>
                 <a:ea typeface="Arial"/>
@@ -15923,7 +16265,7 @@
             <a:lvl5pPr>
               <a:defRPr sz="1800" b="1">
                 <a:solidFill>
-                  <a:srgbClr val="087F8C"/>
+                  <a:srgbClr val="3191B5"/>
                 </a:solidFill>
                 <a:latin typeface="Arial"/>
                 <a:ea typeface="Arial"/>
@@ -15933,7 +16275,7 @@
             <a:lvl6pPr>
               <a:defRPr sz="1800" b="1">
                 <a:solidFill>
-                  <a:srgbClr val="087F8C"/>
+                  <a:srgbClr val="3191B5"/>
                 </a:solidFill>
                 <a:latin typeface="Arial"/>
                 <a:ea typeface="Arial"/>
@@ -15943,7 +16285,7 @@
             <a:lvl7pPr>
               <a:defRPr sz="1800" b="1">
                 <a:solidFill>
-                  <a:srgbClr val="087F8C"/>
+                  <a:srgbClr val="3191B5"/>
                 </a:solidFill>
                 <a:latin typeface="Arial"/>
                 <a:ea typeface="Arial"/>
@@ -15953,7 +16295,7 @@
             <a:lvl8pPr>
               <a:defRPr sz="1800" b="1">
                 <a:solidFill>
-                  <a:srgbClr val="087F8C"/>
+                  <a:srgbClr val="3191B5"/>
                 </a:solidFill>
                 <a:latin typeface="Arial"/>
                 <a:ea typeface="Arial"/>
@@ -15963,7 +16305,7 @@
             <a:lvl9pPr>
               <a:defRPr sz="1800" b="1">
                 <a:solidFill>
-                  <a:srgbClr val="087F8C"/>
+                  <a:srgbClr val="3191B5"/>
                 </a:solidFill>
                 <a:latin typeface="Arial"/>
                 <a:ea typeface="Arial"/>
@@ -15975,7 +16317,7 @@
             <a:pPr>
               <a:defRPr sz="1800" b="1">
                 <a:solidFill>
-                  <a:srgbClr val="087F8C"/>
+                  <a:srgbClr val="3191B5"/>
                 </a:solidFill>
                 <a:latin typeface="Arial"/>
                 <a:ea typeface="Arial"/>
@@ -15985,13 +16327,13 @@
             <a:r>
               <a:rPr sz="1800" b="1">
                 <a:solidFill>
-                  <a:srgbClr val="087F8C"/>
+                  <a:srgbClr val="3191B5"/>
                 </a:solidFill>
                 <a:latin typeface="Arial"/>
                 <a:ea typeface="Arial"/>
                 <a:cs typeface="Arial"/>
               </a:rPr>
-              <a:t>Unobserved months</a:t>
+              <a:t>A simpler fitted model</a:t>
             </a:r>
           </a:p>
         </p:txBody>
@@ -16001,7 +16343,7 @@
           <p:cNvPr id="12" name="">
             <a:extLst xmlns:a="http://schemas.openxmlformats.org/drawingml/2006/main">
               <a:ext uri="{FF2B5EF4-FFF2-40B4-BE49-F238E27FC236}">
-                <a16:creationId xmlns:a16="http://schemas.microsoft.com/office/drawing/2014/main" id="{F116834F-76FA-4018-AA8C-4172BCE2C98D}"/>
+                <a16:creationId xmlns:a16="http://schemas.microsoft.com/office/drawing/2014/main" id="{6C8DD597-3306-46AA-8524-C48C056FA889}"/>
               </a:ext>
             </a:extLst>
           </p:cNvPr>
@@ -16013,7 +16355,7 @@
         <p:spPr>
           <a:xfrm xmlns:a="http://schemas.openxmlformats.org/drawingml/2006/main">
             <a:off x="4572000" y="2257425"/>
-            <a:ext cx="3048000" cy="1647825"/>
+            <a:ext cx="3048000" cy="1876425"/>
           </a:xfrm>
           <a:prstGeom xmlns:a="http://schemas.openxmlformats.org/drawingml/2006/main" prst="rect">
             <a:avLst/>
@@ -16148,7 +16490,7 @@
                 <a:ea typeface="Arial"/>
                 <a:cs typeface="Arial"/>
               </a:rPr>
-              <a:t>Predict retention and spending for the remaining months of one common 12-month horizon.</a:t>
+              <a:t>The main shifted Beta-Geometric model estimates one Beta distribution per cell, with partial pooling across cohorts. It learns from renewals and exits.</a:t>
             </a:r>
           </a:p>
         </p:txBody>
@@ -16158,7 +16500,7 @@
           <p:cNvPr id="13" name="">
             <a:extLst xmlns:a="http://schemas.openxmlformats.org/drawingml/2006/main">
               <a:ext uri="{FF2B5EF4-FFF2-40B4-BE49-F238E27FC236}">
-                <a16:creationId xmlns:a16="http://schemas.microsoft.com/office/drawing/2014/main" id="{43F5A29D-BE19-4A4F-BD92-0FAC6AD0809D}"/>
+                <a16:creationId xmlns:a16="http://schemas.microsoft.com/office/drawing/2014/main" id="{0DBB21A8-5898-4AFB-BD2D-BEA443AF0BD4}"/>
               </a:ext>
             </a:extLst>
           </p:cNvPr>
@@ -16170,13 +16512,13 @@
         <p:spPr>
           <a:xfrm xmlns:a="http://schemas.openxmlformats.org/drawingml/2006/main">
             <a:off x="8153400" y="1685925"/>
-            <a:ext cx="3429000" cy="2362200"/>
+            <a:ext cx="3429000" cy="2590800"/>
           </a:xfrm>
           <a:prstGeom xmlns:a="http://schemas.openxmlformats.org/drawingml/2006/main" prst="rect">
             <a:avLst/>
           </a:prstGeom>
           <a:solidFill xmlns:a="http://schemas.openxmlformats.org/drawingml/2006/main">
-            <a:srgbClr val="EAF4F3"/>
+            <a:srgbClr val="EDF5FA"/>
           </a:solidFill>
           <a:ln xmlns:a="http://schemas.openxmlformats.org/drawingml/2006/main" w="0">
             <a:noFill/>
@@ -16189,7 +16531,7 @@
           <p:cNvPr id="14" name="">
             <a:extLst xmlns:a="http://schemas.openxmlformats.org/drawingml/2006/main">
               <a:ext uri="{FF2B5EF4-FFF2-40B4-BE49-F238E27FC236}">
-                <a16:creationId xmlns:a16="http://schemas.microsoft.com/office/drawing/2014/main" id="{F016EB5E-5059-4C0F-93A9-C214257EDBF4}"/>
+                <a16:creationId xmlns:a16="http://schemas.microsoft.com/office/drawing/2014/main" id="{D3B5520E-FA24-4303-A005-2B3EF177E142}"/>
               </a:ext>
             </a:extLst>
           </p:cNvPr>
@@ -16201,7 +16543,7 @@
         <p:spPr>
           <a:xfrm xmlns:a="http://schemas.openxmlformats.org/drawingml/2006/main">
             <a:off x="8153400" y="1685925"/>
-            <a:ext cx="47625" cy="2362200"/>
+            <a:ext cx="47625" cy="2590800"/>
           </a:xfrm>
           <a:prstGeom xmlns:a="http://schemas.openxmlformats.org/drawingml/2006/main" prst="rect">
             <a:avLst/>
@@ -16220,7 +16562,7 @@
           <p:cNvPr id="15" name="">
             <a:extLst xmlns:a="http://schemas.openxmlformats.org/drawingml/2006/main">
               <a:ext uri="{FF2B5EF4-FFF2-40B4-BE49-F238E27FC236}">
-                <a16:creationId xmlns:a16="http://schemas.microsoft.com/office/drawing/2014/main" id="{413744D2-6D95-43C5-9753-8EC1ADA42D02}"/>
+                <a16:creationId xmlns:a16="http://schemas.microsoft.com/office/drawing/2014/main" id="{ABD43C1B-22DF-4F2E-BDB6-6B3D1E01CFC9}"/>
               </a:ext>
             </a:extLst>
           </p:cNvPr>
@@ -16367,7 +16709,7 @@
                 <a:ea typeface="Arial"/>
                 <a:cs typeface="Arial"/>
               </a:rPr>
-              <a:t>Per acquired customer</a:t>
+              <a:t>Revenue and value</a:t>
             </a:r>
           </a:p>
         </p:txBody>
@@ -16377,7 +16719,7 @@
           <p:cNvPr id="16" name="">
             <a:extLst xmlns:a="http://schemas.openxmlformats.org/drawingml/2006/main">
               <a:ext uri="{FF2B5EF4-FFF2-40B4-BE49-F238E27FC236}">
-                <a16:creationId xmlns:a16="http://schemas.microsoft.com/office/drawing/2014/main" id="{98D619AA-0798-494C-94DF-5E0056EFDC85}"/>
+                <a16:creationId xmlns:a16="http://schemas.microsoft.com/office/drawing/2014/main" id="{C115171D-3B04-4B6F-9E0A-247132472C2F}"/>
               </a:ext>
             </a:extLst>
           </p:cNvPr>
@@ -16389,7 +16731,7 @@
         <p:spPr>
           <a:xfrm xmlns:a="http://schemas.openxmlformats.org/drawingml/2006/main">
             <a:off x="8343900" y="2257425"/>
-            <a:ext cx="3048000" cy="1647825"/>
+            <a:ext cx="3048000" cy="1876425"/>
           </a:xfrm>
           <a:prstGeom xmlns:a="http://schemas.openxmlformats.org/drawingml/2006/main" prst="rect">
             <a:avLst/>
@@ -16524,7 +16866,7 @@
                 <a:ea typeface="Arial"/>
                 <a:cs typeface="Arial"/>
               </a:rPr>
-              <a:t>Discount each monthly contribution at 1% per month, divide by original cohort size, then subtract CAC for net LTV.</a:t>
+              <a:t>A Gamma revenue model forecasts spending. Combine retention, contribution and observed months over a common 12-month horizon; subtract CAC for net LTV.</a:t>
             </a:r>
           </a:p>
         </p:txBody>
@@ -16534,7 +16876,7 @@
           <p:cNvPr id="17" name="">
             <a:extLst xmlns:a="http://schemas.openxmlformats.org/drawingml/2006/main">
               <a:ext uri="{FF2B5EF4-FFF2-40B4-BE49-F238E27FC236}">
-                <a16:creationId xmlns:a16="http://schemas.microsoft.com/office/drawing/2014/main" id="{7A88D0C4-ECC4-4F41-95B7-3196AB5A6B9F}"/>
+                <a16:creationId xmlns:a16="http://schemas.microsoft.com/office/drawing/2014/main" id="{55FE941C-C406-48FF-8A8C-6C9D798D9CB5}"/>
               </a:ext>
             </a:extLst>
           </p:cNvPr>
@@ -16545,8 +16887,8 @@
         </p:nvSpPr>
         <p:spPr>
           <a:xfrm xmlns:a="http://schemas.openxmlformats.org/drawingml/2006/main">
-            <a:off x="609600" y="4391025"/>
-            <a:ext cx="10972800" cy="628650"/>
+            <a:off x="609600" y="4438650"/>
+            <a:ext cx="10972800" cy="762000"/>
           </a:xfrm>
           <a:prstGeom xmlns:a="http://schemas.openxmlformats.org/drawingml/2006/main" prst="rect">
             <a:avLst/>
@@ -16561,7 +16903,7 @@
           <a:bodyPr xmlns:a="http://schemas.openxmlformats.org/drawingml/2006/main" lIns="0" tIns="0" rIns="0" bIns="0" anchor="ctr"/>
           <a:lstStyle xmlns:a="http://schemas.openxmlformats.org/drawingml/2006/main">
             <a:defPPr>
-              <a:defRPr sz="2025" b="1">
+              <a:defRPr sz="1800" b="1">
                 <a:solidFill>
                   <a:srgbClr val="172D3C"/>
                 </a:solidFill>
@@ -16571,7 +16913,7 @@
               </a:defRPr>
             </a:defPPr>
             <a:lvl1pPr>
-              <a:defRPr sz="2025" b="1">
+              <a:defRPr sz="1800" b="1">
                 <a:solidFill>
                   <a:srgbClr val="172D3C"/>
                 </a:solidFill>
@@ -16581,7 +16923,7 @@
               </a:defRPr>
             </a:lvl1pPr>
             <a:lvl2pPr>
-              <a:defRPr sz="2025" b="1">
+              <a:defRPr sz="1800" b="1">
                 <a:solidFill>
                   <a:srgbClr val="172D3C"/>
                 </a:solidFill>
@@ -16591,7 +16933,7 @@
               </a:defRPr>
             </a:lvl2pPr>
             <a:lvl3pPr>
-              <a:defRPr sz="2025" b="1">
+              <a:defRPr sz="1800" b="1">
                 <a:solidFill>
                   <a:srgbClr val="172D3C"/>
                 </a:solidFill>
@@ -16601,7 +16943,7 @@
               </a:defRPr>
             </a:lvl3pPr>
             <a:lvl4pPr>
-              <a:defRPr sz="2025" b="1">
+              <a:defRPr sz="1800" b="1">
                 <a:solidFill>
                   <a:srgbClr val="172D3C"/>
                 </a:solidFill>
@@ -16611,7 +16953,7 @@
               </a:defRPr>
             </a:lvl4pPr>
             <a:lvl5pPr>
-              <a:defRPr sz="2025" b="1">
+              <a:defRPr sz="1800" b="1">
                 <a:solidFill>
                   <a:srgbClr val="172D3C"/>
                 </a:solidFill>
@@ -16621,7 +16963,7 @@
               </a:defRPr>
             </a:lvl5pPr>
             <a:lvl6pPr>
-              <a:defRPr sz="2025" b="1">
+              <a:defRPr sz="1800" b="1">
                 <a:solidFill>
                   <a:srgbClr val="172D3C"/>
                 </a:solidFill>
@@ -16631,7 +16973,7 @@
               </a:defRPr>
             </a:lvl6pPr>
             <a:lvl7pPr>
-              <a:defRPr sz="2025" b="1">
+              <a:defRPr sz="1800" b="1">
                 <a:solidFill>
                   <a:srgbClr val="172D3C"/>
                 </a:solidFill>
@@ -16641,7 +16983,7 @@
               </a:defRPr>
             </a:lvl7pPr>
             <a:lvl8pPr>
-              <a:defRPr sz="2025" b="1">
+              <a:defRPr sz="1800" b="1">
                 <a:solidFill>
                   <a:srgbClr val="172D3C"/>
                 </a:solidFill>
@@ -16651,7 +16993,7 @@
               </a:defRPr>
             </a:lvl8pPr>
             <a:lvl9pPr>
-              <a:defRPr sz="2025" b="1">
+              <a:defRPr sz="1800" b="1">
                 <a:solidFill>
                   <a:srgbClr val="172D3C"/>
                 </a:solidFill>
@@ -16663,7 +17005,7 @@
           </a:lstStyle>
           <a:p xmlns:a="http://schemas.openxmlformats.org/drawingml/2006/main">
             <a:pPr>
-              <a:defRPr sz="2025" b="1">
+              <a:defRPr sz="1800" b="1">
                 <a:solidFill>
                   <a:srgbClr val="172D3C"/>
                 </a:solidFill>
@@ -16673,7 +17015,7 @@
               </a:defRPr>
             </a:pPr>
             <a:r>
-              <a:rPr sz="2025" b="1">
+              <a:rPr sz="1800" b="1">
                 <a:solidFill>
                   <a:srgbClr val="172D3C"/>
                 </a:solidFill>
@@ -16681,7 +17023,7 @@
                 <a:ea typeface="Arial"/>
                 <a:cs typeface="Arial"/>
               </a:rPr>
-              <a:t>Model check: forecast outcomes that were withheld, and compare the error with a simpler baseline.</a:t>
+              <a:t>Separate benchmark: an Orduz-style Bayesian neural network. Compare both models with held-out outcomes and a simple baseline.</a:t>
             </a:r>
           </a:p>
         </p:txBody>
@@ -16691,7 +17033,7 @@
           <p:cNvPr id="18" name="">
             <a:extLst xmlns:a="http://schemas.openxmlformats.org/drawingml/2006/main">
               <a:ext uri="{FF2B5EF4-FFF2-40B4-BE49-F238E27FC236}">
-                <a16:creationId xmlns:a16="http://schemas.microsoft.com/office/drawing/2014/main" id="{98A08881-49C5-4713-85BC-C383B3F42B05}"/>
+                <a16:creationId xmlns:a16="http://schemas.microsoft.com/office/drawing/2014/main" id="{5B6042E9-B1CB-4963-AE02-F3EF18FB9C2C}"/>
               </a:ext>
             </a:extLst>
           </p:cNvPr>
@@ -16709,7 +17051,7 @@
             <a:avLst/>
           </a:prstGeom>
           <a:solidFill xmlns:a="http://schemas.openxmlformats.org/drawingml/2006/main">
-            <a:srgbClr val="EAF4F3"/>
+            <a:srgbClr val="EDF5FA"/>
           </a:solidFill>
           <a:ln xmlns:a="http://schemas.openxmlformats.org/drawingml/2006/main" w="0">
             <a:noFill/>
@@ -16722,7 +17064,7 @@
           <p:cNvPr id="19" name="">
             <a:extLst xmlns:a="http://schemas.openxmlformats.org/drawingml/2006/main">
               <a:ext uri="{FF2B5EF4-FFF2-40B4-BE49-F238E27FC236}">
-                <a16:creationId xmlns:a16="http://schemas.microsoft.com/office/drawing/2014/main" id="{806C2F20-7C4D-4A7F-BC22-E1D90BCB1F7C}"/>
+                <a16:creationId xmlns:a16="http://schemas.microsoft.com/office/drawing/2014/main" id="{E81B64DE-3CE9-4E78-BA56-501B871B9042}"/>
               </a:ext>
             </a:extLst>
           </p:cNvPr>
@@ -16869,7 +17211,7 @@
                 <a:ea typeface="Arial"/>
                 <a:cs typeface="Arial"/>
               </a:rPr>
-              <a:t>Cash payback is undiscounted. A model-based LTV prediction is not a causal return on marketing spending.</a:t>
+              <a:t>Describe the model before its results. Generation and inference differ; forecast performance must be tested.</a:t>
             </a:r>
           </a:p>
         </p:txBody>
@@ -16877,7 +17219,7 @@
     </p:spTree>
     <p:extLst>
       <p:ext uri="{BB962C8B-B14F-4D97-AF65-F5344CB8AC3E}">
-        <p14:creationId xmlns:p14="http://schemas.microsoft.com/office/powerpoint/2010/main" val="1212958558"/>
+        <p14:creationId xmlns:p14="http://schemas.microsoft.com/office/powerpoint/2010/main" val="1220965921"/>
       </p:ext>
     </p:extLst>
   </p:cSld>
@@ -16908,7 +17250,7 @@
           <p:cNvPr id="9" name="">
             <a:extLst xmlns:a="http://schemas.openxmlformats.org/drawingml/2006/main">
               <a:ext uri="{FF2B5EF4-FFF2-40B4-BE49-F238E27FC236}">
-                <a16:creationId xmlns:a16="http://schemas.microsoft.com/office/drawing/2014/main" id="{5816F141-BD0C-425B-8049-BF89A9813BFF}"/>
+                <a16:creationId xmlns:a16="http://schemas.microsoft.com/office/drawing/2014/main" id="{419776C8-2EF9-47E8-B4D2-9B09FE9D2F1A}"/>
               </a:ext>
             </a:extLst>
           </p:cNvPr>
@@ -16939,7 +17281,7 @@
           <p:cNvPr id="2" name="">
             <a:extLst xmlns:a="http://schemas.openxmlformats.org/drawingml/2006/main">
               <a:ext uri="{FF2B5EF4-FFF2-40B4-BE49-F238E27FC236}">
-                <a16:creationId xmlns:a16="http://schemas.microsoft.com/office/drawing/2014/main" id="{C8722B47-36AF-4B95-A459-FCB6174D60E2}"/>
+                <a16:creationId xmlns:a16="http://schemas.microsoft.com/office/drawing/2014/main" id="{D79AD6DB-102B-4A95-B446-9C43908F6F56}"/>
               </a:ext>
             </a:extLst>
           </p:cNvPr>
@@ -17086,7 +17428,7 @@
                 <a:ea typeface="Arial"/>
                 <a:cs typeface="Arial"/>
               </a:rPr>
-              <a:t>Resolve the opening question with a stated next action</a:t>
+              <a:t>Hand your team a decision and a reproducible report</a:t>
             </a:r>
           </a:p>
         </p:txBody>
@@ -17096,7 +17438,7 @@
           <p:cNvPr id="3" name="">
             <a:extLst xmlns:a="http://schemas.openxmlformats.org/drawingml/2006/main">
               <a:ext uri="{FF2B5EF4-FFF2-40B4-BE49-F238E27FC236}">
-                <a16:creationId xmlns:a16="http://schemas.microsoft.com/office/drawing/2014/main" id="{A6AE2E5B-6370-4A85-B9A3-4FCA4822875E}"/>
+                <a16:creationId xmlns:a16="http://schemas.microsoft.com/office/drawing/2014/main" id="{52DB604E-0B9C-4D77-8281-BC444C0AC11B}"/>
               </a:ext>
             </a:extLst>
           </p:cNvPr>
@@ -17253,7 +17595,7 @@
           <p:cNvPr id="4" name="">
             <a:extLst xmlns:a="http://schemas.openxmlformats.org/drawingml/2006/main">
               <a:ext uri="{FF2B5EF4-FFF2-40B4-BE49-F238E27FC236}">
-                <a16:creationId xmlns:a16="http://schemas.microsoft.com/office/drawing/2014/main" id="{D08AC32D-2C8B-4FC1-8F5E-5BB6A05EFCCE}"/>
+                <a16:creationId xmlns:a16="http://schemas.microsoft.com/office/drawing/2014/main" id="{33EB8221-E8DF-41BA-972D-4BC81D3463AC}"/>
               </a:ext>
             </a:extLst>
           </p:cNvPr>
@@ -17410,7 +17752,7 @@
           <p:cNvPr id="5" name="">
             <a:extLst xmlns:a="http://schemas.openxmlformats.org/drawingml/2006/main">
               <a:ext uri="{FF2B5EF4-FFF2-40B4-BE49-F238E27FC236}">
-                <a16:creationId xmlns:a16="http://schemas.microsoft.com/office/drawing/2014/main" id="{D22DF612-78D1-4031-964F-8863A7ED02F5}"/>
+                <a16:creationId xmlns:a16="http://schemas.microsoft.com/office/drawing/2014/main" id="{1B26CA6F-8F12-488B-99C9-A87A7437A1AC}"/>
               </a:ext>
             </a:extLst>
           </p:cNvPr>
@@ -17557,7 +17899,7 @@
                 <a:ea typeface="Arial"/>
                 <a:cs typeface="Arial"/>
               </a:rPr>
-              <a:t>Are we moving in the right direction as a company?</a:t>
+              <a:t>Are successive cohorts becoming more valuable relative to acquisition cost?</a:t>
             </a:r>
           </a:p>
         </p:txBody>
@@ -17567,7 +17909,7 @@
           <p:cNvPr id="6" name="">
             <a:extLst xmlns:a="http://schemas.openxmlformats.org/drawingml/2006/main">
               <a:ext uri="{FF2B5EF4-FFF2-40B4-BE49-F238E27FC236}">
-                <a16:creationId xmlns:a16="http://schemas.microsoft.com/office/drawing/2014/main" id="{2B2D81C5-B0DB-44ED-B24B-0D95BB16B180}"/>
+                <a16:creationId xmlns:a16="http://schemas.microsoft.com/office/drawing/2014/main" id="{9F2CF167-E83C-4F45-B377-9708BF58FB53}"/>
               </a:ext>
             </a:extLst>
           </p:cNvPr>
@@ -17601,7 +17943,7 @@
                           <a:ea typeface="Arial"/>
                           <a:cs typeface="Arial"/>
                         </a:rPr>
-                        <a:t>Evidence</a:t>
+                        <a:t>Report component</a:t>
                       </a:r>
                     </a:p>
                   </a:txBody>
@@ -17625,7 +17967,7 @@
                           <a:ea typeface="Arial"/>
                           <a:cs typeface="Arial"/>
                         </a:rPr>
-                        <a:t>What belongs in your answer</a:t>
+                        <a:t>What your team should receive</a:t>
                       </a:r>
                     </a:p>
                   </a:txBody>
@@ -17651,7 +17993,7 @@
                           <a:ea typeface="Arial"/>
                           <a:cs typeface="Arial"/>
                         </a:rPr>
-                        <a:t>Observed customer economics</a:t>
+                        <a:t>Executive summary</a:t>
                       </a:r>
                     </a:p>
                   </a:txBody>
@@ -17675,7 +18017,7 @@
                           <a:ea typeface="Arial"/>
                           <a:cs typeface="Arial"/>
                         </a:rPr>
-                        <a:t>Same-age retention, revenue, contribution, CAC and cash payback.</a:t>
+                        <a:t>The business, a supported verdict, a proposed action and what would change it.</a:t>
                       </a:r>
                     </a:p>
                   </a:txBody>
@@ -17701,7 +18043,7 @@
                           <a:ea typeface="Arial"/>
                           <a:cs typeface="Arial"/>
                         </a:rPr>
-                        <a:t>Company dynamics</a:t>
+                        <a:t>Observed and forecast evidence</a:t>
                       </a:r>
                     </a:p>
                   </a:txBody>
@@ -17725,7 +18067,7 @@
                           <a:ea typeface="Arial"/>
                           <a:cs typeface="Arial"/>
                         </a:rPr>
-                        <a:t>Whether retained older cohorts support the growing active base.</a:t>
+                        <a:t>Same-age retention, revenue, contribution, CAC and cash payback.</a:t>
                       </a:r>
                     </a:p>
                   </a:txBody>
@@ -17751,7 +18093,7 @@
                           <a:ea typeface="Arial"/>
                           <a:cs typeface="Arial"/>
                         </a:rPr>
-                        <a:t>Predicted value</a:t>
+                        <a:t>Model appendix</a:t>
                       </a:r>
                     </a:p>
                   </a:txBody>
@@ -17775,7 +18117,7 @@
                           <a:ea typeface="Arial"/>
                           <a:cs typeface="Arial"/>
                         </a:rPr>
-                        <a:t>A common horizon, held-out accuracy and explicit forecast assumptions.</a:t>
+                        <a:t>Model story, parameters, priors, uncertainty and chronological validation.</a:t>
                       </a:r>
                     </a:p>
                   </a:txBody>
@@ -17801,7 +18143,7 @@
                           <a:ea typeface="Arial"/>
                           <a:cs typeface="Arial"/>
                         </a:rPr>
-                        <a:t>Experimental effects</a:t>
+                        <a:t>Data and reproducibility appendix</a:t>
                       </a:r>
                     </a:p>
                   </a:txBody>
@@ -17825,7 +18167,7 @@
                           <a:ea typeface="Arial"/>
                           <a:cs typeface="Arial"/>
                         </a:rPr>
-                        <a:t>The tested campaign’s contribution after media relative to its control.</a:t>
+                        <a:t>UCV tables, Archify key map and saved SQL; saved manifests accompany the report.</a:t>
                       </a:r>
                     </a:p>
                   </a:txBody>
@@ -17845,7 +18187,7 @@
           <p:cNvPr id="7" name="">
             <a:extLst xmlns:a="http://schemas.openxmlformats.org/drawingml/2006/main">
               <a:ext uri="{FF2B5EF4-FFF2-40B4-BE49-F238E27FC236}">
-                <a16:creationId xmlns:a16="http://schemas.microsoft.com/office/drawing/2014/main" id="{B6694C95-C95C-4C2F-8E81-C9A2A1CF932C}"/>
+                <a16:creationId xmlns:a16="http://schemas.microsoft.com/office/drawing/2014/main" id="{947E5E8F-B403-4EA4-BCCE-89BBCCB4EF49}"/>
               </a:ext>
             </a:extLst>
           </p:cNvPr>
@@ -17876,7 +18218,7 @@
           <p:cNvPr id="8" name="">
             <a:extLst xmlns:a="http://schemas.openxmlformats.org/drawingml/2006/main">
               <a:ext uri="{FF2B5EF4-FFF2-40B4-BE49-F238E27FC236}">
-                <a16:creationId xmlns:a16="http://schemas.microsoft.com/office/drawing/2014/main" id="{B8EA9AEE-F67D-4243-8786-0D39C3884092}"/>
+                <a16:creationId xmlns:a16="http://schemas.microsoft.com/office/drawing/2014/main" id="{4AFE77C8-2452-4561-A971-210524C03011}"/>
               </a:ext>
             </a:extLst>
           </p:cNvPr>
@@ -18023,7 +18365,7 @@
                 <a:ea typeface="Arial"/>
                 <a:cs typeface="Arial"/>
               </a:rPr>
-              <a:t>Record your verdict and recommended action. The LaTeX report preserves both, together with the evidence and saved SQL.</a:t>
+              <a:t>The bundled report skill carries the formatting with the project. Each result traces to saved SQL or a documented model.</a:t>
             </a:r>
           </a:p>
         </p:txBody>
@@ -18031,7 +18373,7 @@
     </p:spTree>
     <p:extLst>
       <p:ext uri="{BB962C8B-B14F-4D97-AF65-F5344CB8AC3E}">
-        <p14:creationId xmlns:p14="http://schemas.microsoft.com/office/powerpoint/2010/main" val="136472970"/>
+        <p14:creationId xmlns:p14="http://schemas.microsoft.com/office/powerpoint/2010/main" val="899731711"/>
       </p:ext>
     </p:extLst>
   </p:cSld>
@@ -18062,7 +18404,7 @@
           <p:cNvPr id="17" name="">
             <a:extLst xmlns:a="http://schemas.openxmlformats.org/drawingml/2006/main">
               <a:ext uri="{FF2B5EF4-FFF2-40B4-BE49-F238E27FC236}">
-                <a16:creationId xmlns:a16="http://schemas.microsoft.com/office/drawing/2014/main" id="{8568697A-1779-4B3B-9A35-FBCD9DA4DC8C}"/>
+                <a16:creationId xmlns:a16="http://schemas.microsoft.com/office/drawing/2014/main" id="{60EE1687-ABE3-42B5-9474-719ADBA29BAE}"/>
               </a:ext>
             </a:extLst>
           </p:cNvPr>
@@ -18093,7 +18435,7 @@
           <p:cNvPr id="2" name="">
             <a:extLst xmlns:a="http://schemas.openxmlformats.org/drawingml/2006/main">
               <a:ext uri="{FF2B5EF4-FFF2-40B4-BE49-F238E27FC236}">
-                <a16:creationId xmlns:a16="http://schemas.microsoft.com/office/drawing/2014/main" id="{5D47E23F-6F9B-4E6A-BE12-D1841CBBA574}"/>
+                <a16:creationId xmlns:a16="http://schemas.microsoft.com/office/drawing/2014/main" id="{C2BCE2DC-F308-4321-9090-D3C8D1B29A30}"/>
               </a:ext>
             </a:extLst>
           </p:cNvPr>
@@ -18250,7 +18592,7 @@
           <p:cNvPr id="3" name="">
             <a:extLst xmlns:a="http://schemas.openxmlformats.org/drawingml/2006/main">
               <a:ext uri="{FF2B5EF4-FFF2-40B4-BE49-F238E27FC236}">
-                <a16:creationId xmlns:a16="http://schemas.microsoft.com/office/drawing/2014/main" id="{48352917-0C41-4860-B012-F1267798B536}"/>
+                <a16:creationId xmlns:a16="http://schemas.microsoft.com/office/drawing/2014/main" id="{F85FB19F-FCD2-4612-A2FB-A4084096C264}"/>
               </a:ext>
             </a:extLst>
           </p:cNvPr>
@@ -18407,7 +18749,7 @@
           <p:cNvPr id="4" name="">
             <a:extLst xmlns:a="http://schemas.openxmlformats.org/drawingml/2006/main">
               <a:ext uri="{FF2B5EF4-FFF2-40B4-BE49-F238E27FC236}">
-                <a16:creationId xmlns:a16="http://schemas.microsoft.com/office/drawing/2014/main" id="{7B8C6581-9DA8-4DBB-AF04-89B32FFDDB43}"/>
+                <a16:creationId xmlns:a16="http://schemas.microsoft.com/office/drawing/2014/main" id="{F7EE0C36-EA8A-4572-958B-472EB0D7468C}"/>
               </a:ext>
             </a:extLst>
           </p:cNvPr>
@@ -18564,7 +18906,7 @@
           <p:cNvPr id="5" name="">
             <a:extLst xmlns:a="http://schemas.openxmlformats.org/drawingml/2006/main">
               <a:ext uri="{FF2B5EF4-FFF2-40B4-BE49-F238E27FC236}">
-                <a16:creationId xmlns:a16="http://schemas.microsoft.com/office/drawing/2014/main" id="{749965D5-165D-4C43-87EC-BAD92868B39E}"/>
+                <a16:creationId xmlns:a16="http://schemas.microsoft.com/office/drawing/2014/main" id="{6D19C9C1-445B-4797-8ADB-8B0B52153596}"/>
               </a:ext>
             </a:extLst>
           </p:cNvPr>
@@ -18595,7 +18937,7 @@
           <p:cNvPr id="6" name="">
             <a:extLst xmlns:a="http://schemas.openxmlformats.org/drawingml/2006/main">
               <a:ext uri="{FF2B5EF4-FFF2-40B4-BE49-F238E27FC236}">
-                <a16:creationId xmlns:a16="http://schemas.microsoft.com/office/drawing/2014/main" id="{3AFD8B25-41C1-4F8F-BFAF-D1F223169D75}"/>
+                <a16:creationId xmlns:a16="http://schemas.microsoft.com/office/drawing/2014/main" id="{F4EFB578-3BF3-4610-B35A-FD9C31B2B3F7}"/>
               </a:ext>
             </a:extLst>
           </p:cNvPr>
@@ -18752,7 +19094,7 @@
           <p:cNvPr id="7" name="">
             <a:extLst xmlns:a="http://schemas.openxmlformats.org/drawingml/2006/main">
               <a:ext uri="{FF2B5EF4-FFF2-40B4-BE49-F238E27FC236}">
-                <a16:creationId xmlns:a16="http://schemas.microsoft.com/office/drawing/2014/main" id="{015DE1E2-233B-40C2-94BC-D0DD547C5BD0}"/>
+                <a16:creationId xmlns:a16="http://schemas.microsoft.com/office/drawing/2014/main" id="{1DE50703-247A-4E30-B04E-43B297B250AF}"/>
               </a:ext>
             </a:extLst>
           </p:cNvPr>
@@ -18909,7 +19251,7 @@
           <p:cNvPr id="8" name="">
             <a:extLst xmlns:a="http://schemas.openxmlformats.org/drawingml/2006/main">
               <a:ext uri="{FF2B5EF4-FFF2-40B4-BE49-F238E27FC236}">
-                <a16:creationId xmlns:a16="http://schemas.microsoft.com/office/drawing/2014/main" id="{2C876570-F433-4279-8743-B4A1B8DBC961}"/>
+                <a16:creationId xmlns:a16="http://schemas.microsoft.com/office/drawing/2014/main" id="{F9762466-A344-4435-8662-ADB0AD9473A9}"/>
               </a:ext>
             </a:extLst>
           </p:cNvPr>
@@ -18940,7 +19282,7 @@
           <p:cNvPr id="9" name="">
             <a:extLst xmlns:a="http://schemas.openxmlformats.org/drawingml/2006/main">
               <a:ext uri="{FF2B5EF4-FFF2-40B4-BE49-F238E27FC236}">
-                <a16:creationId xmlns:a16="http://schemas.microsoft.com/office/drawing/2014/main" id="{68E10EA7-FDC6-4768-A8BC-2BA8F4CF6236}"/>
+                <a16:creationId xmlns:a16="http://schemas.microsoft.com/office/drawing/2014/main" id="{42897613-F2FF-48F3-9D1A-E8DF82C5BF72}"/>
               </a:ext>
             </a:extLst>
           </p:cNvPr>
@@ -19097,7 +19439,7 @@
           <p:cNvPr id="10" name="">
             <a:extLst xmlns:a="http://schemas.openxmlformats.org/drawingml/2006/main">
               <a:ext uri="{FF2B5EF4-FFF2-40B4-BE49-F238E27FC236}">
-                <a16:creationId xmlns:a16="http://schemas.microsoft.com/office/drawing/2014/main" id="{52F7F49F-3780-4314-924B-80BD3236D264}"/>
+                <a16:creationId xmlns:a16="http://schemas.microsoft.com/office/drawing/2014/main" id="{2489FC51-9B6D-42A1-9920-CC6723443DE8}"/>
               </a:ext>
             </a:extLst>
           </p:cNvPr>
@@ -19244,7 +19586,7 @@
                 <a:ea typeface="Arial"/>
                 <a:cs typeface="Arial"/>
               </a:rPr>
-              <a:t>The fictional subscription business and its connected records.</a:t>
+              <a:t>Studio North and its connected customer records.</a:t>
             </a:r>
           </a:p>
         </p:txBody>
@@ -19254,7 +19596,7 @@
           <p:cNvPr id="11" name="">
             <a:extLst xmlns:a="http://schemas.openxmlformats.org/drawingml/2006/main">
               <a:ext uri="{FF2B5EF4-FFF2-40B4-BE49-F238E27FC236}">
-                <a16:creationId xmlns:a16="http://schemas.microsoft.com/office/drawing/2014/main" id="{64B2F969-6A39-4065-9BBE-E1C6215041E8}"/>
+                <a16:creationId xmlns:a16="http://schemas.microsoft.com/office/drawing/2014/main" id="{2AB296F9-B305-4105-906A-FBEAA1E65712}"/>
               </a:ext>
             </a:extLst>
           </p:cNvPr>
@@ -19285,7 +19627,7 @@
           <p:cNvPr id="12" name="">
             <a:extLst xmlns:a="http://schemas.openxmlformats.org/drawingml/2006/main">
               <a:ext uri="{FF2B5EF4-FFF2-40B4-BE49-F238E27FC236}">
-                <a16:creationId xmlns:a16="http://schemas.microsoft.com/office/drawing/2014/main" id="{D52C8805-53A0-4F81-8DAE-E98EE20D3E1E}"/>
+                <a16:creationId xmlns:a16="http://schemas.microsoft.com/office/drawing/2014/main" id="{EF2AA79F-04DF-48A7-BA86-30C32C07D61E}"/>
               </a:ext>
             </a:extLst>
           </p:cNvPr>
@@ -19442,7 +19784,7 @@
           <p:cNvPr id="13" name="">
             <a:extLst xmlns:a="http://schemas.openxmlformats.org/drawingml/2006/main">
               <a:ext uri="{FF2B5EF4-FFF2-40B4-BE49-F238E27FC236}">
-                <a16:creationId xmlns:a16="http://schemas.microsoft.com/office/drawing/2014/main" id="{DA6ADE2C-44CA-4980-898A-7E78D034C832}"/>
+                <a16:creationId xmlns:a16="http://schemas.microsoft.com/office/drawing/2014/main" id="{E3DDE389-4BE8-404A-BFA0-C30D2D7F52D5}"/>
               </a:ext>
             </a:extLst>
           </p:cNvPr>
@@ -19599,7 +19941,7 @@
           <p:cNvPr id="14" name="">
             <a:extLst xmlns:a="http://schemas.openxmlformats.org/drawingml/2006/main">
               <a:ext uri="{FF2B5EF4-FFF2-40B4-BE49-F238E27FC236}">
-                <a16:creationId xmlns:a16="http://schemas.microsoft.com/office/drawing/2014/main" id="{A998B466-29AF-4AAC-8DB8-5F57855E711E}"/>
+                <a16:creationId xmlns:a16="http://schemas.microsoft.com/office/drawing/2014/main" id="{6AD53F97-4F4F-4EDB-A9CF-4299A8C2AA12}"/>
               </a:ext>
             </a:extLst>
           </p:cNvPr>
@@ -19630,7 +19972,7 @@
           <p:cNvPr id="15" name="">
             <a:extLst xmlns:a="http://schemas.openxmlformats.org/drawingml/2006/main">
               <a:ext uri="{FF2B5EF4-FFF2-40B4-BE49-F238E27FC236}">
-                <a16:creationId xmlns:a16="http://schemas.microsoft.com/office/drawing/2014/main" id="{6B57D06A-8A04-4C01-82B0-1AB9EB37342A}"/>
+                <a16:creationId xmlns:a16="http://schemas.microsoft.com/office/drawing/2014/main" id="{77F11EB5-6D20-4369-A257-38D90D1DB4B0}"/>
               </a:ext>
             </a:extLst>
           </p:cNvPr>
@@ -19787,7 +20129,7 @@
           <p:cNvPr id="16" name="">
             <a:extLst xmlns:a="http://schemas.openxmlformats.org/drawingml/2006/main">
               <a:ext uri="{FF2B5EF4-FFF2-40B4-BE49-F238E27FC236}">
-                <a16:creationId xmlns:a16="http://schemas.microsoft.com/office/drawing/2014/main" id="{A1EEE566-963E-40B7-B7EA-7DA6E31E405F}"/>
+                <a16:creationId xmlns:a16="http://schemas.microsoft.com/office/drawing/2014/main" id="{3E32E7E2-BC66-4A09-BC66-397E3FA2FD58}"/>
               </a:ext>
             </a:extLst>
           </p:cNvPr>
@@ -19942,7 +20284,7 @@
     </p:spTree>
     <p:extLst>
       <p:ext uri="{BB962C8B-B14F-4D97-AF65-F5344CB8AC3E}">
-        <p14:creationId xmlns:p14="http://schemas.microsoft.com/office/powerpoint/2010/main" val="605600011"/>
+        <p14:creationId xmlns:p14="http://schemas.microsoft.com/office/powerpoint/2010/main" val="415089823"/>
       </p:ext>
     </p:extLst>
   </p:cSld>
@@ -19973,7 +20315,7 @@
           <p:cNvPr id="19" name="">
             <a:extLst xmlns:a="http://schemas.openxmlformats.org/drawingml/2006/main">
               <a:ext uri="{FF2B5EF4-FFF2-40B4-BE49-F238E27FC236}">
-                <a16:creationId xmlns:a16="http://schemas.microsoft.com/office/drawing/2014/main" id="{D5DF09BC-523B-43EB-8AF0-BF182815857C}"/>
+                <a16:creationId xmlns:a16="http://schemas.microsoft.com/office/drawing/2014/main" id="{3EB395BE-0869-42CD-8E3F-2C602BA5E7C4}"/>
               </a:ext>
             </a:extLst>
           </p:cNvPr>
@@ -20004,7 +20346,7 @@
           <p:cNvPr id="2" name="">
             <a:extLst xmlns:a="http://schemas.openxmlformats.org/drawingml/2006/main">
               <a:ext uri="{FF2B5EF4-FFF2-40B4-BE49-F238E27FC236}">
-                <a16:creationId xmlns:a16="http://schemas.microsoft.com/office/drawing/2014/main" id="{E87B8375-79C0-4AFE-BF88-1C8F4F4EA228}"/>
+                <a16:creationId xmlns:a16="http://schemas.microsoft.com/office/drawing/2014/main" id="{1A458932-E1DB-4802-A8D9-07629856EA29}"/>
               </a:ext>
             </a:extLst>
           </p:cNvPr>
@@ -20161,7 +20503,7 @@
           <p:cNvPr id="3" name="">
             <a:extLst xmlns:a="http://schemas.openxmlformats.org/drawingml/2006/main">
               <a:ext uri="{FF2B5EF4-FFF2-40B4-BE49-F238E27FC236}">
-                <a16:creationId xmlns:a16="http://schemas.microsoft.com/office/drawing/2014/main" id="{A39BC651-E49E-49BA-ACDF-DB36228C4715}"/>
+                <a16:creationId xmlns:a16="http://schemas.microsoft.com/office/drawing/2014/main" id="{41478C2B-D0A9-42EA-B8AC-490ECB5B6D37}"/>
               </a:ext>
             </a:extLst>
           </p:cNvPr>
@@ -20318,7 +20660,7 @@
           <p:cNvPr id="4" name="">
             <a:extLst xmlns:a="http://schemas.openxmlformats.org/drawingml/2006/main">
               <a:ext uri="{FF2B5EF4-FFF2-40B4-BE49-F238E27FC236}">
-                <a16:creationId xmlns:a16="http://schemas.microsoft.com/office/drawing/2014/main" id="{25439148-F8C1-4D56-BA72-0047C0B882AD}"/>
+                <a16:creationId xmlns:a16="http://schemas.microsoft.com/office/drawing/2014/main" id="{4EAE182D-ADCC-42F6-AB46-2673D7CA46DA}"/>
               </a:ext>
             </a:extLst>
           </p:cNvPr>
@@ -20475,7 +20817,7 @@
           <p:cNvPr id="5" name="">
             <a:extLst xmlns:a="http://schemas.openxmlformats.org/drawingml/2006/main">
               <a:ext uri="{FF2B5EF4-FFF2-40B4-BE49-F238E27FC236}">
-                <a16:creationId xmlns:a16="http://schemas.microsoft.com/office/drawing/2014/main" id="{CCE23514-0C31-4067-B87C-1E4453950039}"/>
+                <a16:creationId xmlns:a16="http://schemas.microsoft.com/office/drawing/2014/main" id="{DE3FA2FD-91BA-43D1-9B4D-BBF8E859BC6B}"/>
               </a:ext>
             </a:extLst>
           </p:cNvPr>
@@ -20493,7 +20835,7 @@
             <a:avLst/>
           </a:prstGeom>
           <a:solidFill xmlns:a="http://schemas.openxmlformats.org/drawingml/2006/main">
-            <a:srgbClr val="EAF4F3"/>
+            <a:srgbClr val="EDF5FA"/>
           </a:solidFill>
           <a:ln xmlns:a="http://schemas.openxmlformats.org/drawingml/2006/main" w="0">
             <a:noFill/>
@@ -20506,7 +20848,7 @@
           <p:cNvPr id="6" name="">
             <a:extLst xmlns:a="http://schemas.openxmlformats.org/drawingml/2006/main">
               <a:ext uri="{FF2B5EF4-FFF2-40B4-BE49-F238E27FC236}">
-                <a16:creationId xmlns:a16="http://schemas.microsoft.com/office/drawing/2014/main" id="{BFA47F4C-6FED-4A08-8078-A6F3103FF3B8}"/>
+                <a16:creationId xmlns:a16="http://schemas.microsoft.com/office/drawing/2014/main" id="{60F3BC94-D17C-4F5D-8C28-FB63992116FF}"/>
               </a:ext>
             </a:extLst>
           </p:cNvPr>
@@ -20537,7 +20879,7 @@
           <p:cNvPr id="7" name="">
             <a:extLst xmlns:a="http://schemas.openxmlformats.org/drawingml/2006/main">
               <a:ext uri="{FF2B5EF4-FFF2-40B4-BE49-F238E27FC236}">
-                <a16:creationId xmlns:a16="http://schemas.microsoft.com/office/drawing/2014/main" id="{BE44CC9F-A8A2-4787-9228-907530DCAF26}"/>
+                <a16:creationId xmlns:a16="http://schemas.microsoft.com/office/drawing/2014/main" id="{A6BBF72D-A343-409B-95B5-B58B0550D96F}"/>
               </a:ext>
             </a:extLst>
           </p:cNvPr>
@@ -20694,7 +21036,7 @@
           <p:cNvPr id="8" name="">
             <a:extLst xmlns:a="http://schemas.openxmlformats.org/drawingml/2006/main">
               <a:ext uri="{FF2B5EF4-FFF2-40B4-BE49-F238E27FC236}">
-                <a16:creationId xmlns:a16="http://schemas.microsoft.com/office/drawing/2014/main" id="{20A2C5A7-4FCC-44F8-9F99-53BE6327C974}"/>
+                <a16:creationId xmlns:a16="http://schemas.microsoft.com/office/drawing/2014/main" id="{A8BB2915-E300-4FB8-B143-315FC24C6823}"/>
               </a:ext>
             </a:extLst>
           </p:cNvPr>
@@ -20841,7 +21183,7 @@
                 <a:ea typeface="Arial"/>
                 <a:cs typeface="Arial"/>
               </a:rPr>
-              <a:t>A Universal Customer View connects identifiers, relationships, engagement and perceptions without confusing their meanings.</a:t>
+              <a:t>The Universal Customer View classifies each dataset’s fields as Identifiers, Engagement, Relationship or Perception. It reveals what is recorded and what is missing.</a:t>
             </a:r>
           </a:p>
         </p:txBody>
@@ -20851,7 +21193,7 @@
           <p:cNvPr id="9" name="">
             <a:extLst xmlns:a="http://schemas.openxmlformats.org/drawingml/2006/main">
               <a:ext uri="{FF2B5EF4-FFF2-40B4-BE49-F238E27FC236}">
-                <a16:creationId xmlns:a16="http://schemas.microsoft.com/office/drawing/2014/main" id="{5E9BDE4F-5D85-48D7-8890-04AA0BF4780C}"/>
+                <a16:creationId xmlns:a16="http://schemas.microsoft.com/office/drawing/2014/main" id="{3FB9E8B1-0E5D-41C1-B239-9A492BECF758}"/>
               </a:ext>
             </a:extLst>
           </p:cNvPr>
@@ -20869,7 +21211,7 @@
             <a:avLst/>
           </a:prstGeom>
           <a:solidFill xmlns:a="http://schemas.openxmlformats.org/drawingml/2006/main">
-            <a:srgbClr val="EAF4F3"/>
+            <a:srgbClr val="EDF5FA"/>
           </a:solidFill>
           <a:ln xmlns:a="http://schemas.openxmlformats.org/drawingml/2006/main" w="0">
             <a:noFill/>
@@ -20882,7 +21224,7 @@
           <p:cNvPr id="10" name="">
             <a:extLst xmlns:a="http://schemas.openxmlformats.org/drawingml/2006/main">
               <a:ext uri="{FF2B5EF4-FFF2-40B4-BE49-F238E27FC236}">
-                <a16:creationId xmlns:a16="http://schemas.microsoft.com/office/drawing/2014/main" id="{613E8AD0-8754-4383-A4E8-6777304A6E43}"/>
+                <a16:creationId xmlns:a16="http://schemas.microsoft.com/office/drawing/2014/main" id="{0AFCF7B4-1440-408E-8E07-AB32446E9293}"/>
               </a:ext>
             </a:extLst>
           </p:cNvPr>
@@ -20900,7 +21242,7 @@
             <a:avLst/>
           </a:prstGeom>
           <a:solidFill xmlns:a="http://schemas.openxmlformats.org/drawingml/2006/main">
-            <a:srgbClr val="087F8C"/>
+            <a:srgbClr val="3191B5"/>
           </a:solidFill>
           <a:ln xmlns:a="http://schemas.openxmlformats.org/drawingml/2006/main" w="0">
             <a:noFill/>
@@ -20913,7 +21255,7 @@
           <p:cNvPr id="11" name="">
             <a:extLst xmlns:a="http://schemas.openxmlformats.org/drawingml/2006/main">
               <a:ext uri="{FF2B5EF4-FFF2-40B4-BE49-F238E27FC236}">
-                <a16:creationId xmlns:a16="http://schemas.microsoft.com/office/drawing/2014/main" id="{2F123D92-D1E2-421D-B613-E111453B0F6D}"/>
+                <a16:creationId xmlns:a16="http://schemas.microsoft.com/office/drawing/2014/main" id="{A353F6CB-3F27-4FB5-8539-2CB75C9DE12D}"/>
               </a:ext>
             </a:extLst>
           </p:cNvPr>
@@ -20942,7 +21284,7 @@
             <a:defPPr>
               <a:defRPr sz="1800" b="1">
                 <a:solidFill>
-                  <a:srgbClr val="087F8C"/>
+                  <a:srgbClr val="3191B5"/>
                 </a:solidFill>
                 <a:latin typeface="Arial"/>
                 <a:ea typeface="Arial"/>
@@ -20952,7 +21294,7 @@
             <a:lvl1pPr>
               <a:defRPr sz="1800" b="1">
                 <a:solidFill>
-                  <a:srgbClr val="087F8C"/>
+                  <a:srgbClr val="3191B5"/>
                 </a:solidFill>
                 <a:latin typeface="Arial"/>
                 <a:ea typeface="Arial"/>
@@ -20962,7 +21304,7 @@
             <a:lvl2pPr>
               <a:defRPr sz="1800" b="1">
                 <a:solidFill>
-                  <a:srgbClr val="087F8C"/>
+                  <a:srgbClr val="3191B5"/>
                 </a:solidFill>
                 <a:latin typeface="Arial"/>
                 <a:ea typeface="Arial"/>
@@ -20972,7 +21314,7 @@
             <a:lvl3pPr>
               <a:defRPr sz="1800" b="1">
                 <a:solidFill>
-                  <a:srgbClr val="087F8C"/>
+                  <a:srgbClr val="3191B5"/>
                 </a:solidFill>
                 <a:latin typeface="Arial"/>
                 <a:ea typeface="Arial"/>
@@ -20982,7 +21324,7 @@
             <a:lvl4pPr>
               <a:defRPr sz="1800" b="1">
                 <a:solidFill>
-                  <a:srgbClr val="087F8C"/>
+                  <a:srgbClr val="3191B5"/>
                 </a:solidFill>
                 <a:latin typeface="Arial"/>
                 <a:ea typeface="Arial"/>
@@ -20992,7 +21334,7 @@
             <a:lvl5pPr>
               <a:defRPr sz="1800" b="1">
                 <a:solidFill>
-                  <a:srgbClr val="087F8C"/>
+                  <a:srgbClr val="3191B5"/>
                 </a:solidFill>
                 <a:latin typeface="Arial"/>
                 <a:ea typeface="Arial"/>
@@ -21002,7 +21344,7 @@
             <a:lvl6pPr>
               <a:defRPr sz="1800" b="1">
                 <a:solidFill>
-                  <a:srgbClr val="087F8C"/>
+                  <a:srgbClr val="3191B5"/>
                 </a:solidFill>
                 <a:latin typeface="Arial"/>
                 <a:ea typeface="Arial"/>
@@ -21012,7 +21354,7 @@
             <a:lvl7pPr>
               <a:defRPr sz="1800" b="1">
                 <a:solidFill>
-                  <a:srgbClr val="087F8C"/>
+                  <a:srgbClr val="3191B5"/>
                 </a:solidFill>
                 <a:latin typeface="Arial"/>
                 <a:ea typeface="Arial"/>
@@ -21022,7 +21364,7 @@
             <a:lvl8pPr>
               <a:defRPr sz="1800" b="1">
                 <a:solidFill>
-                  <a:srgbClr val="087F8C"/>
+                  <a:srgbClr val="3191B5"/>
                 </a:solidFill>
                 <a:latin typeface="Arial"/>
                 <a:ea typeface="Arial"/>
@@ -21032,7 +21374,7 @@
             <a:lvl9pPr>
               <a:defRPr sz="1800" b="1">
                 <a:solidFill>
-                  <a:srgbClr val="087F8C"/>
+                  <a:srgbClr val="3191B5"/>
                 </a:solidFill>
                 <a:latin typeface="Arial"/>
                 <a:ea typeface="Arial"/>
@@ -21044,7 +21386,7 @@
             <a:pPr>
               <a:defRPr sz="1800" b="1">
                 <a:solidFill>
-                  <a:srgbClr val="087F8C"/>
+                  <a:srgbClr val="3191B5"/>
                 </a:solidFill>
                 <a:latin typeface="Arial"/>
                 <a:ea typeface="Arial"/>
@@ -21054,7 +21396,7 @@
             <a:r>
               <a:rPr sz="1800" b="1">
                 <a:solidFill>
-                  <a:srgbClr val="087F8C"/>
+                  <a:srgbClr val="3191B5"/>
                 </a:solidFill>
                 <a:latin typeface="Arial"/>
                 <a:ea typeface="Arial"/>
@@ -21070,7 +21412,7 @@
           <p:cNvPr id="12" name="">
             <a:extLst xmlns:a="http://schemas.openxmlformats.org/drawingml/2006/main">
               <a:ext uri="{FF2B5EF4-FFF2-40B4-BE49-F238E27FC236}">
-                <a16:creationId xmlns:a16="http://schemas.microsoft.com/office/drawing/2014/main" id="{A7B161B4-D054-46D4-84EF-13D2A61D2D84}"/>
+                <a16:creationId xmlns:a16="http://schemas.microsoft.com/office/drawing/2014/main" id="{438D9143-7545-4ED7-AC93-74C3BDDE798D}"/>
               </a:ext>
             </a:extLst>
           </p:cNvPr>
@@ -21227,7 +21569,7 @@
           <p:cNvPr id="13" name="">
             <a:extLst xmlns:a="http://schemas.openxmlformats.org/drawingml/2006/main">
               <a:ext uri="{FF2B5EF4-FFF2-40B4-BE49-F238E27FC236}">
-                <a16:creationId xmlns:a16="http://schemas.microsoft.com/office/drawing/2014/main" id="{54C2E587-2225-425C-A356-FDB48737B7CA}"/>
+                <a16:creationId xmlns:a16="http://schemas.microsoft.com/office/drawing/2014/main" id="{CDAB41C4-EC11-47F6-A6E4-EDA4E00D9754}"/>
               </a:ext>
             </a:extLst>
           </p:cNvPr>
@@ -21245,7 +21587,7 @@
             <a:avLst/>
           </a:prstGeom>
           <a:solidFill xmlns:a="http://schemas.openxmlformats.org/drawingml/2006/main">
-            <a:srgbClr val="EAF4F3"/>
+            <a:srgbClr val="EDF5FA"/>
           </a:solidFill>
           <a:ln xmlns:a="http://schemas.openxmlformats.org/drawingml/2006/main" w="0">
             <a:noFill/>
@@ -21258,7 +21600,7 @@
           <p:cNvPr id="14" name="">
             <a:extLst xmlns:a="http://schemas.openxmlformats.org/drawingml/2006/main">
               <a:ext uri="{FF2B5EF4-FFF2-40B4-BE49-F238E27FC236}">
-                <a16:creationId xmlns:a16="http://schemas.microsoft.com/office/drawing/2014/main" id="{A6722C4A-BAA8-4CF5-A4A5-410291E1DDF5}"/>
+                <a16:creationId xmlns:a16="http://schemas.microsoft.com/office/drawing/2014/main" id="{759733E4-3C9F-4730-8143-96F610E7A857}"/>
               </a:ext>
             </a:extLst>
           </p:cNvPr>
@@ -21276,7 +21618,7 @@
             <a:avLst/>
           </a:prstGeom>
           <a:solidFill xmlns:a="http://schemas.openxmlformats.org/drawingml/2006/main">
-            <a:srgbClr val="687780"/>
+            <a:srgbClr val="3191B5"/>
           </a:solidFill>
           <a:ln xmlns:a="http://schemas.openxmlformats.org/drawingml/2006/main" w="0">
             <a:noFill/>
@@ -21289,7 +21631,7 @@
           <p:cNvPr id="15" name="">
             <a:extLst xmlns:a="http://schemas.openxmlformats.org/drawingml/2006/main">
               <a:ext uri="{FF2B5EF4-FFF2-40B4-BE49-F238E27FC236}">
-                <a16:creationId xmlns:a16="http://schemas.microsoft.com/office/drawing/2014/main" id="{C9FC0CE1-7A72-42E8-9DF3-BDEE21148ECF}"/>
+                <a16:creationId xmlns:a16="http://schemas.microsoft.com/office/drawing/2014/main" id="{2A8AC89A-E1E6-4D76-AAB4-ECA8EB0377E2}"/>
               </a:ext>
             </a:extLst>
           </p:cNvPr>
@@ -21318,7 +21660,7 @@
             <a:defPPr>
               <a:defRPr sz="1800" b="1">
                 <a:solidFill>
-                  <a:srgbClr val="687780"/>
+                  <a:srgbClr val="3191B5"/>
                 </a:solidFill>
                 <a:latin typeface="Arial"/>
                 <a:ea typeface="Arial"/>
@@ -21328,7 +21670,7 @@
             <a:lvl1pPr>
               <a:defRPr sz="1800" b="1">
                 <a:solidFill>
-                  <a:srgbClr val="687780"/>
+                  <a:srgbClr val="3191B5"/>
                 </a:solidFill>
                 <a:latin typeface="Arial"/>
                 <a:ea typeface="Arial"/>
@@ -21338,7 +21680,7 @@
             <a:lvl2pPr>
               <a:defRPr sz="1800" b="1">
                 <a:solidFill>
-                  <a:srgbClr val="687780"/>
+                  <a:srgbClr val="3191B5"/>
                 </a:solidFill>
                 <a:latin typeface="Arial"/>
                 <a:ea typeface="Arial"/>
@@ -21348,7 +21690,7 @@
             <a:lvl3pPr>
               <a:defRPr sz="1800" b="1">
                 <a:solidFill>
-                  <a:srgbClr val="687780"/>
+                  <a:srgbClr val="3191B5"/>
                 </a:solidFill>
                 <a:latin typeface="Arial"/>
                 <a:ea typeface="Arial"/>
@@ -21358,7 +21700,7 @@
             <a:lvl4pPr>
               <a:defRPr sz="1800" b="1">
                 <a:solidFill>
-                  <a:srgbClr val="687780"/>
+                  <a:srgbClr val="3191B5"/>
                 </a:solidFill>
                 <a:latin typeface="Arial"/>
                 <a:ea typeface="Arial"/>
@@ -21368,7 +21710,7 @@
             <a:lvl5pPr>
               <a:defRPr sz="1800" b="1">
                 <a:solidFill>
-                  <a:srgbClr val="687780"/>
+                  <a:srgbClr val="3191B5"/>
                 </a:solidFill>
                 <a:latin typeface="Arial"/>
                 <a:ea typeface="Arial"/>
@@ -21378,7 +21720,7 @@
             <a:lvl6pPr>
               <a:defRPr sz="1800" b="1">
                 <a:solidFill>
-                  <a:srgbClr val="687780"/>
+                  <a:srgbClr val="3191B5"/>
                 </a:solidFill>
                 <a:latin typeface="Arial"/>
                 <a:ea typeface="Arial"/>
@@ -21388,7 +21730,7 @@
             <a:lvl7pPr>
               <a:defRPr sz="1800" b="1">
                 <a:solidFill>
-                  <a:srgbClr val="687780"/>
+                  <a:srgbClr val="3191B5"/>
                 </a:solidFill>
                 <a:latin typeface="Arial"/>
                 <a:ea typeface="Arial"/>
@@ -21398,7 +21740,7 @@
             <a:lvl8pPr>
               <a:defRPr sz="1800" b="1">
                 <a:solidFill>
-                  <a:srgbClr val="687780"/>
+                  <a:srgbClr val="3191B5"/>
                 </a:solidFill>
                 <a:latin typeface="Arial"/>
                 <a:ea typeface="Arial"/>
@@ -21408,7 +21750,7 @@
             <a:lvl9pPr>
               <a:defRPr sz="1800" b="1">
                 <a:solidFill>
-                  <a:srgbClr val="687780"/>
+                  <a:srgbClr val="3191B5"/>
                 </a:solidFill>
                 <a:latin typeface="Arial"/>
                 <a:ea typeface="Arial"/>
@@ -21420,7 +21762,7 @@
             <a:pPr>
               <a:defRPr sz="1800" b="1">
                 <a:solidFill>
-                  <a:srgbClr val="687780"/>
+                  <a:srgbClr val="3191B5"/>
                 </a:solidFill>
                 <a:latin typeface="Arial"/>
                 <a:ea typeface="Arial"/>
@@ -21430,7 +21772,7 @@
             <a:r>
               <a:rPr sz="1800" b="1">
                 <a:solidFill>
-                  <a:srgbClr val="687780"/>
+                  <a:srgbClr val="3191B5"/>
                 </a:solidFill>
                 <a:latin typeface="Arial"/>
                 <a:ea typeface="Arial"/>
@@ -21446,7 +21788,7 @@
           <p:cNvPr id="16" name="">
             <a:extLst xmlns:a="http://schemas.openxmlformats.org/drawingml/2006/main">
               <a:ext uri="{FF2B5EF4-FFF2-40B4-BE49-F238E27FC236}">
-                <a16:creationId xmlns:a16="http://schemas.microsoft.com/office/drawing/2014/main" id="{8B2D03C5-D68C-4828-8785-8732A20DA174}"/>
+                <a16:creationId xmlns:a16="http://schemas.microsoft.com/office/drawing/2014/main" id="{17CCDE0E-5F8F-4DE0-B954-943A67A0ACF4}"/>
               </a:ext>
             </a:extLst>
           </p:cNvPr>
@@ -21603,7 +21945,7 @@
           <p:cNvPr id="17" name="">
             <a:extLst xmlns:a="http://schemas.openxmlformats.org/drawingml/2006/main">
               <a:ext uri="{FF2B5EF4-FFF2-40B4-BE49-F238E27FC236}">
-                <a16:creationId xmlns:a16="http://schemas.microsoft.com/office/drawing/2014/main" id="{267E30EF-265C-4CB9-A7D1-E39D5CC9C0B5}"/>
+                <a16:creationId xmlns:a16="http://schemas.microsoft.com/office/drawing/2014/main" id="{1B096DDE-6E4D-4873-9AD6-8DEA82C1E4E0}"/>
               </a:ext>
             </a:extLst>
           </p:cNvPr>
@@ -21621,7 +21963,7 @@
             <a:avLst/>
           </a:prstGeom>
           <a:solidFill xmlns:a="http://schemas.openxmlformats.org/drawingml/2006/main">
-            <a:srgbClr val="EAF4F3"/>
+            <a:srgbClr val="EDF5FA"/>
           </a:solidFill>
           <a:ln xmlns:a="http://schemas.openxmlformats.org/drawingml/2006/main" w="0">
             <a:noFill/>
@@ -21634,7 +21976,7 @@
           <p:cNvPr id="18" name="">
             <a:extLst xmlns:a="http://schemas.openxmlformats.org/drawingml/2006/main">
               <a:ext uri="{FF2B5EF4-FFF2-40B4-BE49-F238E27FC236}">
-                <a16:creationId xmlns:a16="http://schemas.microsoft.com/office/drawing/2014/main" id="{C055977D-FB4B-4B10-B9A1-1AE9BB542F59}"/>
+                <a16:creationId xmlns:a16="http://schemas.microsoft.com/office/drawing/2014/main" id="{2D0E4296-E5BD-497E-B305-A0DE63ECB121}"/>
               </a:ext>
             </a:extLst>
           </p:cNvPr>
@@ -21789,7 +22131,7 @@
     </p:spTree>
     <p:extLst>
       <p:ext uri="{BB962C8B-B14F-4D97-AF65-F5344CB8AC3E}">
-        <p14:creationId xmlns:p14="http://schemas.microsoft.com/office/powerpoint/2010/main" val="511528168"/>
+        <p14:creationId xmlns:p14="http://schemas.microsoft.com/office/powerpoint/2010/main" val="199436009"/>
       </p:ext>
     </p:extLst>
   </p:cSld>
@@ -21817,10 +22159,10 @@
       </p:grpSpPr>
       <p:sp>
         <p:nvSpPr>
-          <p:cNvPr id="8" name="">
+          <p:cNvPr id="10" name="">
             <a:extLst xmlns:a="http://schemas.openxmlformats.org/drawingml/2006/main">
               <a:ext uri="{FF2B5EF4-FFF2-40B4-BE49-F238E27FC236}">
-                <a16:creationId xmlns:a16="http://schemas.microsoft.com/office/drawing/2014/main" id="{135C5B6A-2E5C-4021-A0F7-FD5701A246AC}"/>
+                <a16:creationId xmlns:a16="http://schemas.microsoft.com/office/drawing/2014/main" id="{76454171-54A4-4250-A847-7D9765F2ADE2}"/>
               </a:ext>
             </a:extLst>
           </p:cNvPr>
@@ -21851,7 +22193,7 @@
           <p:cNvPr id="2" name="">
             <a:extLst xmlns:a="http://schemas.openxmlformats.org/drawingml/2006/main">
               <a:ext uri="{FF2B5EF4-FFF2-40B4-BE49-F238E27FC236}">
-                <a16:creationId xmlns:a16="http://schemas.microsoft.com/office/drawing/2014/main" id="{E69FE4D9-6999-4E0E-B223-980D39754855}"/>
+                <a16:creationId xmlns:a16="http://schemas.microsoft.com/office/drawing/2014/main" id="{5341C614-ABD5-40E8-8A17-F48C0D48AA94}"/>
               </a:ext>
             </a:extLst>
           </p:cNvPr>
@@ -21998,7 +22340,7 @@
                 <a:ea typeface="Arial"/>
                 <a:cs typeface="Arial"/>
               </a:rPr>
-              <a:t>Eight exports describe different objects</a:t>
+              <a:t>Every dataset gets its own Universal Customer View</a:t>
             </a:r>
           </a:p>
         </p:txBody>
@@ -22008,7 +22350,7 @@
           <p:cNvPr id="3" name="">
             <a:extLst xmlns:a="http://schemas.openxmlformats.org/drawingml/2006/main">
               <a:ext uri="{FF2B5EF4-FFF2-40B4-BE49-F238E27FC236}">
-                <a16:creationId xmlns:a16="http://schemas.microsoft.com/office/drawing/2014/main" id="{E68F9887-5191-4247-AC70-D43711E3A48B}"/>
+                <a16:creationId xmlns:a16="http://schemas.microsoft.com/office/drawing/2014/main" id="{70F3538A-4ECC-4470-869C-7430AC239323}"/>
               </a:ext>
             </a:extLst>
           </p:cNvPr>
@@ -22165,7 +22507,7 @@
           <p:cNvPr id="4" name="">
             <a:extLst xmlns:a="http://schemas.openxmlformats.org/drawingml/2006/main">
               <a:ext uri="{FF2B5EF4-FFF2-40B4-BE49-F238E27FC236}">
-                <a16:creationId xmlns:a16="http://schemas.microsoft.com/office/drawing/2014/main" id="{D478C090-E20F-422E-A42F-DBDB81A5AC6B}"/>
+                <a16:creationId xmlns:a16="http://schemas.microsoft.com/office/drawing/2014/main" id="{59A3B599-55A4-4B12-8309-350366AEA5EF}"/>
               </a:ext>
             </a:extLst>
           </p:cNvPr>
@@ -22317,12 +22659,169 @@
           </a:p>
         </p:txBody>
       </p:sp>
-      <p:graphicFrame>
-        <p:nvGraphicFramePr>
+      <p:sp>
+        <p:nvSpPr>
           <p:cNvPr id="5" name="">
             <a:extLst xmlns:a="http://schemas.openxmlformats.org/drawingml/2006/main">
               <a:ext uri="{FF2B5EF4-FFF2-40B4-BE49-F238E27FC236}">
-                <a16:creationId xmlns:a16="http://schemas.microsoft.com/office/drawing/2014/main" id="{269CAFE6-49FB-4B77-A98C-8331E6F51313}"/>
+                <a16:creationId xmlns:a16="http://schemas.microsoft.com/office/drawing/2014/main" id="{594511D0-9A7C-464A-9A46-DA4B0A015744}"/>
+              </a:ext>
+            </a:extLst>
+          </p:cNvPr>
+          <p:cNvSpPr>
+            <a:spLocks xmlns:a="http://schemas.openxmlformats.org/drawingml/2006/main" noGrp="1"/>
+          </p:cNvSpPr>
+          <p:nvPr/>
+        </p:nvSpPr>
+        <p:spPr>
+          <a:xfrm xmlns:a="http://schemas.openxmlformats.org/drawingml/2006/main">
+            <a:off x="609600" y="1466850"/>
+            <a:ext cx="10972800" cy="571500"/>
+          </a:xfrm>
+          <a:prstGeom xmlns:a="http://schemas.openxmlformats.org/drawingml/2006/main" prst="rect">
+            <a:avLst/>
+          </a:prstGeom>
+          <a:noFill xmlns:a="http://schemas.openxmlformats.org/drawingml/2006/main"/>
+          <a:ln xmlns:a="http://schemas.openxmlformats.org/drawingml/2006/main" w="0">
+            <a:noFill/>
+            <a:prstDash val="solid"/>
+          </a:ln>
+        </p:spPr>
+        <p:txBody>
+          <a:bodyPr xmlns:a="http://schemas.openxmlformats.org/drawingml/2006/main" lIns="0" tIns="0" rIns="0" bIns="0" anchor="ctr"/>
+          <a:lstStyle xmlns:a="http://schemas.openxmlformats.org/drawingml/2006/main">
+            <a:defPPr>
+              <a:defRPr sz="1800" b="0">
+                <a:solidFill>
+                  <a:srgbClr val="172D3C"/>
+                </a:solidFill>
+                <a:latin typeface="Arial"/>
+                <a:ea typeface="Arial"/>
+                <a:cs typeface="Arial"/>
+              </a:defRPr>
+            </a:defPPr>
+            <a:lvl1pPr>
+              <a:defRPr sz="1800" b="0">
+                <a:solidFill>
+                  <a:srgbClr val="172D3C"/>
+                </a:solidFill>
+                <a:latin typeface="Arial"/>
+                <a:ea typeface="Arial"/>
+                <a:cs typeface="Arial"/>
+              </a:defRPr>
+            </a:lvl1pPr>
+            <a:lvl2pPr>
+              <a:defRPr sz="1800" b="0">
+                <a:solidFill>
+                  <a:srgbClr val="172D3C"/>
+                </a:solidFill>
+                <a:latin typeface="Arial"/>
+                <a:ea typeface="Arial"/>
+                <a:cs typeface="Arial"/>
+              </a:defRPr>
+            </a:lvl2pPr>
+            <a:lvl3pPr>
+              <a:defRPr sz="1800" b="0">
+                <a:solidFill>
+                  <a:srgbClr val="172D3C"/>
+                </a:solidFill>
+                <a:latin typeface="Arial"/>
+                <a:ea typeface="Arial"/>
+                <a:cs typeface="Arial"/>
+              </a:defRPr>
+            </a:lvl3pPr>
+            <a:lvl4pPr>
+              <a:defRPr sz="1800" b="0">
+                <a:solidFill>
+                  <a:srgbClr val="172D3C"/>
+                </a:solidFill>
+                <a:latin typeface="Arial"/>
+                <a:ea typeface="Arial"/>
+                <a:cs typeface="Arial"/>
+              </a:defRPr>
+            </a:lvl4pPr>
+            <a:lvl5pPr>
+              <a:defRPr sz="1800" b="0">
+                <a:solidFill>
+                  <a:srgbClr val="172D3C"/>
+                </a:solidFill>
+                <a:latin typeface="Arial"/>
+                <a:ea typeface="Arial"/>
+                <a:cs typeface="Arial"/>
+              </a:defRPr>
+            </a:lvl5pPr>
+            <a:lvl6pPr>
+              <a:defRPr sz="1800" b="0">
+                <a:solidFill>
+                  <a:srgbClr val="172D3C"/>
+                </a:solidFill>
+                <a:latin typeface="Arial"/>
+                <a:ea typeface="Arial"/>
+                <a:cs typeface="Arial"/>
+              </a:defRPr>
+            </a:lvl6pPr>
+            <a:lvl7pPr>
+              <a:defRPr sz="1800" b="0">
+                <a:solidFill>
+                  <a:srgbClr val="172D3C"/>
+                </a:solidFill>
+                <a:latin typeface="Arial"/>
+                <a:ea typeface="Arial"/>
+                <a:cs typeface="Arial"/>
+              </a:defRPr>
+            </a:lvl7pPr>
+            <a:lvl8pPr>
+              <a:defRPr sz="1800" b="0">
+                <a:solidFill>
+                  <a:srgbClr val="172D3C"/>
+                </a:solidFill>
+                <a:latin typeface="Arial"/>
+                <a:ea typeface="Arial"/>
+                <a:cs typeface="Arial"/>
+              </a:defRPr>
+            </a:lvl8pPr>
+            <a:lvl9pPr>
+              <a:defRPr sz="1800" b="0">
+                <a:solidFill>
+                  <a:srgbClr val="172D3C"/>
+                </a:solidFill>
+                <a:latin typeface="Arial"/>
+                <a:ea typeface="Arial"/>
+                <a:cs typeface="Arial"/>
+              </a:defRPr>
+            </a:lvl9pPr>
+          </a:lstStyle>
+          <a:p xmlns:a="http://schemas.openxmlformats.org/drawingml/2006/main">
+            <a:pPr>
+              <a:defRPr sz="1800" b="0">
+                <a:solidFill>
+                  <a:srgbClr val="172D3C"/>
+                </a:solidFill>
+                <a:latin typeface="Arial"/>
+                <a:ea typeface="Arial"/>
+                <a:cs typeface="Arial"/>
+              </a:defRPr>
+            </a:pPr>
+            <a:r>
+              <a:rPr sz="1800" b="0">
+                <a:solidFill>
+                  <a:srgbClr val="172D3C"/>
+                </a:solidFill>
+                <a:latin typeface="Arial"/>
+                <a:ea typeface="Arial"/>
+                <a:cs typeface="Arial"/>
+              </a:rPr>
+              <a:t>Example: people.csv contains one record per person, including prospects who never buy.</a:t>
+            </a:r>
+          </a:p>
+        </p:txBody>
+      </p:sp>
+      <p:graphicFrame>
+        <p:nvGraphicFramePr>
+          <p:cNvPr id="6" name="">
+            <a:extLst xmlns:a="http://schemas.openxmlformats.org/drawingml/2006/main">
+              <a:ext uri="{FF2B5EF4-FFF2-40B4-BE49-F238E27FC236}">
+                <a16:creationId xmlns:a16="http://schemas.microsoft.com/office/drawing/2014/main" id="{419E2165-41A9-4D7B-84B8-280C3128C6A7}"/>
               </a:ext>
             </a:extLst>
           </p:cNvPr>
@@ -22330,19 +22829,20 @@
           <p:nvPr/>
         </p:nvGraphicFramePr>
         <p:xfrm>
-          <a:off xmlns:a="http://schemas.openxmlformats.org/drawingml/2006/main" x="609600" y="1543050"/>
-          <a:ext xmlns:a="http://schemas.openxmlformats.org/drawingml/2006/main" cx="10972800" cy="3143250"/>
+          <a:off xmlns:a="http://schemas.openxmlformats.org/drawingml/2006/main" x="609600" y="2324100"/>
+          <a:ext xmlns:a="http://schemas.openxmlformats.org/drawingml/2006/main" cx="10972800" cy="2228850"/>
         </p:xfrm>
         <a:graphic xmlns:a="http://schemas.openxmlformats.org/drawingml/2006/main">
           <a:graphicData uri="http://schemas.openxmlformats.org/drawingml/2006/table">
             <a:tbl>
               <a:tblPr/>
               <a:tblGrid>
-                <a:gridCol w="2819400"/>
-                <a:gridCol w="3524250"/>
-                <a:gridCol w="4629150"/>
+                <a:gridCol w="2743200"/>
+                <a:gridCol w="2743200"/>
+                <a:gridCol w="2743200"/>
+                <a:gridCol w="2743200"/>
               </a:tblGrid>
-              <a:tr h="523875">
+              <a:tr h="476250">
                 <a:tc>
                   <a:txBody>
                     <a:bodyPr/>
@@ -22357,7 +22857,7 @@
                           <a:ea typeface="Arial"/>
                           <a:cs typeface="Arial"/>
                         </a:rPr>
-                        <a:t>Source exports</a:t>
+                        <a:t>Identifiers</a:t>
                       </a:r>
                     </a:p>
                   </a:txBody>
@@ -22381,7 +22881,7 @@
                           <a:ea typeface="Arial"/>
                           <a:cs typeface="Arial"/>
                         </a:rPr>
-                        <a:t>One row represents</a:t>
+                        <a:t>Engagement</a:t>
                       </a:r>
                     </a:p>
                   </a:txBody>
@@ -22405,7 +22905,31 @@
                           <a:ea typeface="Arial"/>
                           <a:cs typeface="Arial"/>
                         </a:rPr>
-                        <a:t>Question it helps answer</a:t>
+                        <a:t>Relationship</a:t>
+                      </a:r>
+                    </a:p>
+                  </a:txBody>
+                  <a:tcPr marL="91440" marR="91440" marT="45720" marB="45720">
+                    <a:solidFill>
+                      <a:srgbClr val="172D3C"/>
+                    </a:solidFill>
+                  </a:tcPr>
+                </a:tc>
+                <a:tc>
+                  <a:txBody>
+                    <a:bodyPr/>
+                    <a:lstStyle/>
+                    <a:p>
+                      <a:r>
+                        <a:rPr sz="1350" b="1">
+                          <a:solidFill>
+                            <a:srgbClr val="FFFFFF"/>
+                          </a:solidFill>
+                          <a:latin typeface="Arial"/>
+                          <a:ea typeface="Arial"/>
+                          <a:cs typeface="Arial"/>
+                        </a:rPr>
+                        <a:t>Perception</a:t>
                       </a:r>
                     </a:p>
                   </a:txBody>
@@ -22416,7 +22940,7 @@
                   </a:tcPr>
                 </a:tc>
               </a:tr>
-              <a:tr h="523875">
+              <a:tr h="1752600">
                 <a:tc>
                   <a:txBody>
                     <a:bodyPr/>
@@ -22431,7 +22955,46 @@
                           <a:ea typeface="Arial"/>
                           <a:cs typeface="Arial"/>
                         </a:rPr>
-                        <a:t>People</a:t>
+                        <a:t>person_id</a:t>
+                      </a:r>
+                    </a:p>
+                    <a:p>
+                      <a:r>
+                        <a:rPr sz="1425" b="0">
+                          <a:solidFill>
+                            <a:srgbClr val="172D3C"/>
+                          </a:solidFill>
+                          <a:latin typeface="Arial"/>
+                          <a:ea typeface="Arial"/>
+                          <a:cs typeface="Arial"/>
+                        </a:rPr>
+                        <a:t>age_band</a:t>
+                      </a:r>
+                    </a:p>
+                    <a:p>
+                      <a:r>
+                        <a:rPr sz="1425" b="0">
+                          <a:solidFill>
+                            <a:srgbClr val="172D3C"/>
+                          </a:solidFill>
+                          <a:latin typeface="Arial"/>
+                          <a:ea typeface="Arial"/>
+                          <a:cs typeface="Arial"/>
+                        </a:rPr>
+                        <a:t>household_type</a:t>
+                      </a:r>
+                    </a:p>
+                    <a:p>
+                      <a:r>
+                        <a:rPr sz="1425" b="0">
+                          <a:solidFill>
+                            <a:srgbClr val="172D3C"/>
+                          </a:solidFill>
+                          <a:latin typeface="Arial"/>
+                          <a:ea typeface="Arial"/>
+                          <a:cs typeface="Arial"/>
+                        </a:rPr>
+                        <a:t>region</a:t>
                       </a:r>
                     </a:p>
                   </a:txBody>
@@ -22455,7 +23018,7 @@
                           <a:ea typeface="Arial"/>
                           <a:cs typeface="Arial"/>
                         </a:rPr>
-                        <a:t>A person, including nonbuyers</a:t>
+                        <a:t>—</a:t>
                       </a:r>
                     </a:p>
                   </a:txBody>
@@ -22479,22 +23042,9 @@
                           <a:ea typeface="Arial"/>
                           <a:cs typeface="Arial"/>
                         </a:rPr>
-                        <a:t>Who is eligible and what need was stated?</a:t>
+                        <a:t>record_created_at</a:t>
                       </a:r>
                     </a:p>
-                  </a:txBody>
-                  <a:tcPr marL="91440" marR="91440" marT="45720" marB="45720">
-                    <a:solidFill>
-                      <a:srgbClr val="F0F5F6"/>
-                    </a:solidFill>
-                  </a:tcPr>
-                </a:tc>
-              </a:tr>
-              <a:tr h="523875">
-                <a:tc>
-                  <a:txBody>
-                    <a:bodyPr/>
-                    <a:lstStyle/>
                     <a:p>
                       <a:r>
                         <a:rPr sz="1425" b="0">
@@ -22505,81 +23055,7 @@
                           <a:ea typeface="Arial"/>
                           <a:cs typeface="Arial"/>
                         </a:rPr>
-                        <a:t>Renewals / Transactions</a:t>
-                      </a:r>
-                    </a:p>
-                  </a:txBody>
-                  <a:tcPr marL="91440" marR="91440" marT="45720" marB="45720">
-                    <a:solidFill>
-                      <a:srgbClr val="FFFFFF"/>
-                    </a:solidFill>
-                  </a:tcPr>
-                </a:tc>
-                <a:tc>
-                  <a:txBody>
-                    <a:bodyPr/>
-                    <a:lstStyle/>
-                    <a:p>
-                      <a:r>
-                        <a:rPr sz="1425" b="0">
-                          <a:solidFill>
-                            <a:srgbClr val="172D3C"/>
-                          </a:solidFill>
-                          <a:latin typeface="Arial"/>
-                          <a:ea typeface="Arial"/>
-                          <a:cs typeface="Arial"/>
-                        </a:rPr>
-                        <a:t>A subscription period / a financial event</a:t>
-                      </a:r>
-                    </a:p>
-                  </a:txBody>
-                  <a:tcPr marL="91440" marR="91440" marT="45720" marB="45720">
-                    <a:solidFill>
-                      <a:srgbClr val="FFFFFF"/>
-                    </a:solidFill>
-                  </a:tcPr>
-                </a:tc>
-                <a:tc>
-                  <a:txBody>
-                    <a:bodyPr/>
-                    <a:lstStyle/>
-                    <a:p>
-                      <a:r>
-                        <a:rPr sz="1425" b="0">
-                          <a:solidFill>
-                            <a:srgbClr val="172D3C"/>
-                          </a:solidFill>
-                          <a:latin typeface="Arial"/>
-                          <a:ea typeface="Arial"/>
-                          <a:cs typeface="Arial"/>
-                        </a:rPr>
-                        <a:t>Who remains, who paid, and what was refunded?</a:t>
-                      </a:r>
-                    </a:p>
-                  </a:txBody>
-                  <a:tcPr marL="91440" marR="91440" marT="45720" marB="45720">
-                    <a:solidFill>
-                      <a:srgbClr val="FFFFFF"/>
-                    </a:solidFill>
-                  </a:tcPr>
-                </a:tc>
-              </a:tr>
-              <a:tr h="523875">
-                <a:tc>
-                  <a:txBody>
-                    <a:bodyPr/>
-                    <a:lstStyle/>
-                    <a:p>
-                      <a:r>
-                        <a:rPr sz="1425" b="0">
-                          <a:solidFill>
-                            <a:srgbClr val="172D3C"/>
-                          </a:solidFill>
-                          <a:latin typeface="Arial"/>
-                          <a:ea typeface="Arial"/>
-                          <a:cs typeface="Arial"/>
-                        </a:rPr>
-                        <a:t>Product events / Feedback</a:t>
+                        <a:t>attributes_recorded_at</a:t>
                       </a:r>
                     </a:p>
                   </a:txBody>
@@ -22603,179 +23079,7 @@
                           <a:ea typeface="Arial"/>
                           <a:cs typeface="Arial"/>
                         </a:rPr>
-                        <a:t>An interaction / a response</a:t>
-                      </a:r>
-                    </a:p>
-                  </a:txBody>
-                  <a:tcPr marL="91440" marR="91440" marT="45720" marB="45720">
-                    <a:solidFill>
-                      <a:srgbClr val="F0F5F6"/>
-                    </a:solidFill>
-                  </a:tcPr>
-                </a:tc>
-                <a:tc>
-                  <a:txBody>
-                    <a:bodyPr/>
-                    <a:lstStyle/>
-                    <a:p>
-                      <a:r>
-                        <a:rPr sz="1425" b="0">
-                          <a:solidFill>
-                            <a:srgbClr val="172D3C"/>
-                          </a:solidFill>
-                          <a:latin typeface="Arial"/>
-                          <a:ea typeface="Arial"/>
-                          <a:cs typeface="Arial"/>
-                        </a:rPr>
-                        <a:t>What happened and what was reported?</a:t>
-                      </a:r>
-                    </a:p>
-                  </a:txBody>
-                  <a:tcPr marL="91440" marR="91440" marT="45720" marB="45720">
-                    <a:solidFill>
-                      <a:srgbClr val="F0F5F6"/>
-                    </a:solidFill>
-                  </a:tcPr>
-                </a:tc>
-              </a:tr>
-              <a:tr h="523875">
-                <a:tc>
-                  <a:txBody>
-                    <a:bodyPr/>
-                    <a:lstStyle/>
-                    <a:p>
-                      <a:r>
-                        <a:rPr sz="1425" b="0">
-                          <a:solidFill>
-                            <a:srgbClr val="172D3C"/>
-                          </a:solidFill>
-                          <a:latin typeface="Arial"/>
-                          <a:ea typeface="Arial"/>
-                          <a:cs typeface="Arial"/>
-                        </a:rPr>
-                        <a:t>Spend / Source credit</a:t>
-                      </a:r>
-                    </a:p>
-                  </a:txBody>
-                  <a:tcPr marL="91440" marR="91440" marT="45720" marB="45720">
-                    <a:solidFill>
-                      <a:srgbClr val="FFFFFF"/>
-                    </a:solidFill>
-                  </a:tcPr>
-                </a:tc>
-                <a:tc>
-                  <a:txBody>
-                    <a:bodyPr/>
-                    <a:lstStyle/>
-                    <a:p>
-                      <a:r>
-                        <a:rPr sz="1425" b="0">
-                          <a:solidFill>
-                            <a:srgbClr val="172D3C"/>
-                          </a:solidFill>
-                          <a:latin typeface="Arial"/>
-                          <a:ea typeface="Arial"/>
-                          <a:cs typeface="Arial"/>
-                        </a:rPr>
-                        <a:t>A campaign date / an acquired person</a:t>
-                      </a:r>
-                    </a:p>
-                  </a:txBody>
-                  <a:tcPr marL="91440" marR="91440" marT="45720" marB="45720">
-                    <a:solidFill>
-                      <a:srgbClr val="FFFFFF"/>
-                    </a:solidFill>
-                  </a:tcPr>
-                </a:tc>
-                <a:tc>
-                  <a:txBody>
-                    <a:bodyPr/>
-                    <a:lstStyle/>
-                    <a:p>
-                      <a:r>
-                        <a:rPr sz="1425" b="0">
-                          <a:solidFill>
-                            <a:srgbClr val="172D3C"/>
-                          </a:solidFill>
-                          <a:latin typeface="Arial"/>
-                          <a:ea typeface="Arial"/>
-                          <a:cs typeface="Arial"/>
-                        </a:rPr>
-                        <a:t>What did acquisition cost, and who received credit?</a:t>
-                      </a:r>
-                    </a:p>
-                  </a:txBody>
-                  <a:tcPr marL="91440" marR="91440" marT="45720" marB="45720">
-                    <a:solidFill>
-                      <a:srgbClr val="FFFFFF"/>
-                    </a:solidFill>
-                  </a:tcPr>
-                </a:tc>
-              </a:tr>
-              <a:tr h="523875">
-                <a:tc>
-                  <a:txBody>
-                    <a:bodyPr/>
-                    <a:lstStyle/>
-                    <a:p>
-                      <a:r>
-                        <a:rPr sz="1425" b="0">
-                          <a:solidFill>
-                            <a:srgbClr val="172D3C"/>
-                          </a:solidFill>
-                          <a:latin typeface="Arial"/>
-                          <a:ea typeface="Arial"/>
-                          <a:cs typeface="Arial"/>
-                        </a:rPr>
-                        <a:t>Assignments</a:t>
-                      </a:r>
-                    </a:p>
-                  </a:txBody>
-                  <a:tcPr marL="91440" marR="91440" marT="45720" marB="45720">
-                    <a:solidFill>
-                      <a:srgbClr val="F0F5F6"/>
-                    </a:solidFill>
-                  </a:tcPr>
-                </a:tc>
-                <a:tc>
-                  <a:txBody>
-                    <a:bodyPr/>
-                    <a:lstStyle/>
-                    <a:p>
-                      <a:r>
-                        <a:rPr sz="1425" b="0">
-                          <a:solidFill>
-                            <a:srgbClr val="172D3C"/>
-                          </a:solidFill>
-                          <a:latin typeface="Arial"/>
-                          <a:ea typeface="Arial"/>
-                          <a:cs typeface="Arial"/>
-                        </a:rPr>
-                        <a:t>An eligible person in an experiment</a:t>
-                      </a:r>
-                    </a:p>
-                  </a:txBody>
-                  <a:tcPr marL="91440" marR="91440" marT="45720" marB="45720">
-                    <a:solidFill>
-                      <a:srgbClr val="F0F5F6"/>
-                    </a:solidFill>
-                  </a:tcPr>
-                </a:tc>
-                <a:tc>
-                  <a:txBody>
-                    <a:bodyPr/>
-                    <a:lstStyle/>
-                    <a:p>
-                      <a:r>
-                        <a:rPr sz="1425" b="0">
-                          <a:solidFill>
-                            <a:srgbClr val="172D3C"/>
-                          </a:solidFill>
-                          <a:latin typeface="Arial"/>
-                          <a:ea typeface="Arial"/>
-                          <a:cs typeface="Arial"/>
-                        </a:rPr>
-                        <a:t>What was assigned, including for nonbuyers?</a:t>
+                        <a:t>primary_need</a:t>
                       </a:r>
                     </a:p>
                   </a:txBody>
@@ -22792,10 +23096,167 @@
       </p:graphicFrame>
       <p:sp>
         <p:nvSpPr>
-          <p:cNvPr id="6" name="">
+          <p:cNvPr id="7" name="">
             <a:extLst xmlns:a="http://schemas.openxmlformats.org/drawingml/2006/main">
               <a:ext uri="{FF2B5EF4-FFF2-40B4-BE49-F238E27FC236}">
-                <a16:creationId xmlns:a16="http://schemas.microsoft.com/office/drawing/2014/main" id="{1CFB5EE7-50AF-46F5-9498-DF2979F8B961}"/>
+                <a16:creationId xmlns:a16="http://schemas.microsoft.com/office/drawing/2014/main" id="{BACFB3AE-1BF1-4302-A333-89417E238B3A}"/>
+              </a:ext>
+            </a:extLst>
+          </p:cNvPr>
+          <p:cNvSpPr>
+            <a:spLocks xmlns:a="http://schemas.openxmlformats.org/drawingml/2006/main" noGrp="1"/>
+          </p:cNvSpPr>
+          <p:nvPr/>
+        </p:nvSpPr>
+        <p:spPr>
+          <a:xfrm xmlns:a="http://schemas.openxmlformats.org/drawingml/2006/main">
+            <a:off x="609600" y="4724400"/>
+            <a:ext cx="10972800" cy="552450"/>
+          </a:xfrm>
+          <a:prstGeom xmlns:a="http://schemas.openxmlformats.org/drawingml/2006/main" prst="rect">
+            <a:avLst/>
+          </a:prstGeom>
+          <a:noFill xmlns:a="http://schemas.openxmlformats.org/drawingml/2006/main"/>
+          <a:ln xmlns:a="http://schemas.openxmlformats.org/drawingml/2006/main" w="0">
+            <a:noFill/>
+            <a:prstDash val="solid"/>
+          </a:ln>
+        </p:spPr>
+        <p:txBody>
+          <a:bodyPr xmlns:a="http://schemas.openxmlformats.org/drawingml/2006/main" lIns="0" tIns="0" rIns="0" bIns="0" anchor="ctr"/>
+          <a:lstStyle xmlns:a="http://schemas.openxmlformats.org/drawingml/2006/main">
+            <a:defPPr>
+              <a:defRPr sz="1650" b="0">
+                <a:solidFill>
+                  <a:srgbClr val="172D3C"/>
+                </a:solidFill>
+                <a:latin typeface="Arial"/>
+                <a:ea typeface="Arial"/>
+                <a:cs typeface="Arial"/>
+              </a:defRPr>
+            </a:defPPr>
+            <a:lvl1pPr>
+              <a:defRPr sz="1650" b="0">
+                <a:solidFill>
+                  <a:srgbClr val="172D3C"/>
+                </a:solidFill>
+                <a:latin typeface="Arial"/>
+                <a:ea typeface="Arial"/>
+                <a:cs typeface="Arial"/>
+              </a:defRPr>
+            </a:lvl1pPr>
+            <a:lvl2pPr>
+              <a:defRPr sz="1650" b="0">
+                <a:solidFill>
+                  <a:srgbClr val="172D3C"/>
+                </a:solidFill>
+                <a:latin typeface="Arial"/>
+                <a:ea typeface="Arial"/>
+                <a:cs typeface="Arial"/>
+              </a:defRPr>
+            </a:lvl2pPr>
+            <a:lvl3pPr>
+              <a:defRPr sz="1650" b="0">
+                <a:solidFill>
+                  <a:srgbClr val="172D3C"/>
+                </a:solidFill>
+                <a:latin typeface="Arial"/>
+                <a:ea typeface="Arial"/>
+                <a:cs typeface="Arial"/>
+              </a:defRPr>
+            </a:lvl3pPr>
+            <a:lvl4pPr>
+              <a:defRPr sz="1650" b="0">
+                <a:solidFill>
+                  <a:srgbClr val="172D3C"/>
+                </a:solidFill>
+                <a:latin typeface="Arial"/>
+                <a:ea typeface="Arial"/>
+                <a:cs typeface="Arial"/>
+              </a:defRPr>
+            </a:lvl4pPr>
+            <a:lvl5pPr>
+              <a:defRPr sz="1650" b="0">
+                <a:solidFill>
+                  <a:srgbClr val="172D3C"/>
+                </a:solidFill>
+                <a:latin typeface="Arial"/>
+                <a:ea typeface="Arial"/>
+                <a:cs typeface="Arial"/>
+              </a:defRPr>
+            </a:lvl5pPr>
+            <a:lvl6pPr>
+              <a:defRPr sz="1650" b="0">
+                <a:solidFill>
+                  <a:srgbClr val="172D3C"/>
+                </a:solidFill>
+                <a:latin typeface="Arial"/>
+                <a:ea typeface="Arial"/>
+                <a:cs typeface="Arial"/>
+              </a:defRPr>
+            </a:lvl6pPr>
+            <a:lvl7pPr>
+              <a:defRPr sz="1650" b="0">
+                <a:solidFill>
+                  <a:srgbClr val="172D3C"/>
+                </a:solidFill>
+                <a:latin typeface="Arial"/>
+                <a:ea typeface="Arial"/>
+                <a:cs typeface="Arial"/>
+              </a:defRPr>
+            </a:lvl7pPr>
+            <a:lvl8pPr>
+              <a:defRPr sz="1650" b="0">
+                <a:solidFill>
+                  <a:srgbClr val="172D3C"/>
+                </a:solidFill>
+                <a:latin typeface="Arial"/>
+                <a:ea typeface="Arial"/>
+                <a:cs typeface="Arial"/>
+              </a:defRPr>
+            </a:lvl8pPr>
+            <a:lvl9pPr>
+              <a:defRPr sz="1650" b="0">
+                <a:solidFill>
+                  <a:srgbClr val="172D3C"/>
+                </a:solidFill>
+                <a:latin typeface="Arial"/>
+                <a:ea typeface="Arial"/>
+                <a:cs typeface="Arial"/>
+              </a:defRPr>
+            </a:lvl9pPr>
+          </a:lstStyle>
+          <a:p xmlns:a="http://schemas.openxmlformats.org/drawingml/2006/main">
+            <a:pPr>
+              <a:defRPr sz="1650" b="0">
+                <a:solidFill>
+                  <a:srgbClr val="172D3C"/>
+                </a:solidFill>
+                <a:latin typeface="Arial"/>
+                <a:ea typeface="Arial"/>
+                <a:cs typeface="Arial"/>
+              </a:defRPr>
+            </a:pPr>
+            <a:r>
+              <a:rPr sz="1650" b="0">
+                <a:solidFill>
+                  <a:srgbClr val="172D3C"/>
+                </a:solidFill>
+                <a:latin typeface="Arial"/>
+                <a:ea typeface="Arial"/>
+                <a:cs typeface="Arial"/>
+              </a:rPr>
+              <a:t>The stated need is a reported intention. Profile timestamps document when the relationship information became available.</a:t>
+            </a:r>
+          </a:p>
+        </p:txBody>
+      </p:sp>
+      <p:sp>
+        <p:nvSpPr>
+          <p:cNvPr id="8" name="">
+            <a:extLst xmlns:a="http://schemas.openxmlformats.org/drawingml/2006/main">
+              <a:ext uri="{FF2B5EF4-FFF2-40B4-BE49-F238E27FC236}">
+                <a16:creationId xmlns:a16="http://schemas.microsoft.com/office/drawing/2014/main" id="{453792B2-EB37-4138-8E27-7786A071355B}"/>
               </a:ext>
             </a:extLst>
           </p:cNvPr>
@@ -22823,10 +23284,10 @@
       </p:sp>
       <p:sp>
         <p:nvSpPr>
-          <p:cNvPr id="7" name="">
+          <p:cNvPr id="9" name="">
             <a:extLst xmlns:a="http://schemas.openxmlformats.org/drawingml/2006/main">
               <a:ext uri="{FF2B5EF4-FFF2-40B4-BE49-F238E27FC236}">
-                <a16:creationId xmlns:a16="http://schemas.microsoft.com/office/drawing/2014/main" id="{C58F538A-9538-46BF-AEE8-7EC32E533F38}"/>
+                <a16:creationId xmlns:a16="http://schemas.microsoft.com/office/drawing/2014/main" id="{4F793C7A-C882-4B2A-83F3-43A7AC4361DA}"/>
               </a:ext>
             </a:extLst>
           </p:cNvPr>
@@ -22973,7 +23434,7 @@
                 <a:ea typeface="Arial"/>
                 <a:cs typeface="Arial"/>
               </a:rPr>
-              <a:t>Ask AI to inspect the files, identify their grains, and draw the system before it joins them.</a:t>
+              <a:t>Repeat this field-level table for all eight exports, then open the Archify map of keys, grains and connections.</a:t>
             </a:r>
           </a:p>
         </p:txBody>
@@ -22981,7 +23442,7 @@
     </p:spTree>
     <p:extLst>
       <p:ext uri="{BB962C8B-B14F-4D97-AF65-F5344CB8AC3E}">
-        <p14:creationId xmlns:p14="http://schemas.microsoft.com/office/powerpoint/2010/main" val="1635235509"/>
+        <p14:creationId xmlns:p14="http://schemas.microsoft.com/office/powerpoint/2010/main" val="1395821952"/>
       </p:ext>
     </p:extLst>
   </p:cSld>
@@ -23012,7 +23473,7 @@
           <p:cNvPr id="10" name="">
             <a:extLst xmlns:a="http://schemas.openxmlformats.org/drawingml/2006/main">
               <a:ext uri="{FF2B5EF4-FFF2-40B4-BE49-F238E27FC236}">
-                <a16:creationId xmlns:a16="http://schemas.microsoft.com/office/drawing/2014/main" id="{3245394C-B157-4AA3-96CB-807C3ACE6C15}"/>
+                <a16:creationId xmlns:a16="http://schemas.microsoft.com/office/drawing/2014/main" id="{40806A56-EE38-4F2E-B421-A2CC81B8DDF2}"/>
               </a:ext>
             </a:extLst>
           </p:cNvPr>
@@ -23043,7 +23504,7 @@
           <p:cNvPr id="2" name="">
             <a:extLst xmlns:a="http://schemas.openxmlformats.org/drawingml/2006/main">
               <a:ext uri="{FF2B5EF4-FFF2-40B4-BE49-F238E27FC236}">
-                <a16:creationId xmlns:a16="http://schemas.microsoft.com/office/drawing/2014/main" id="{176DD04C-6F02-4CCC-A3FF-09CFE88447EB}"/>
+                <a16:creationId xmlns:a16="http://schemas.microsoft.com/office/drawing/2014/main" id="{D4DE1894-6374-4608-8CC0-503AA702F717}"/>
               </a:ext>
             </a:extLst>
           </p:cNvPr>
@@ -23200,7 +23661,7 @@
           <p:cNvPr id="3" name="">
             <a:extLst xmlns:a="http://schemas.openxmlformats.org/drawingml/2006/main">
               <a:ext uri="{FF2B5EF4-FFF2-40B4-BE49-F238E27FC236}">
-                <a16:creationId xmlns:a16="http://schemas.microsoft.com/office/drawing/2014/main" id="{9156715B-B7E6-4B84-A9D8-208C26B496F9}"/>
+                <a16:creationId xmlns:a16="http://schemas.microsoft.com/office/drawing/2014/main" id="{25D3EB67-EFDC-4A4A-9E10-74D82E84A3D1}"/>
               </a:ext>
             </a:extLst>
           </p:cNvPr>
@@ -23357,7 +23818,7 @@
           <p:cNvPr id="4" name="">
             <a:extLst xmlns:a="http://schemas.openxmlformats.org/drawingml/2006/main">
               <a:ext uri="{FF2B5EF4-FFF2-40B4-BE49-F238E27FC236}">
-                <a16:creationId xmlns:a16="http://schemas.microsoft.com/office/drawing/2014/main" id="{59E61EDE-11F3-4E0A-9B8B-ECA90B02AB0F}"/>
+                <a16:creationId xmlns:a16="http://schemas.microsoft.com/office/drawing/2014/main" id="{E4EE8A25-BFCB-4DAD-8803-581679A43533}"/>
               </a:ext>
             </a:extLst>
           </p:cNvPr>
@@ -23514,7 +23975,7 @@
           <p:cNvPr id="5" name="">
             <a:extLst xmlns:a="http://schemas.openxmlformats.org/drawingml/2006/main">
               <a:ext uri="{FF2B5EF4-FFF2-40B4-BE49-F238E27FC236}">
-                <a16:creationId xmlns:a16="http://schemas.microsoft.com/office/drawing/2014/main" id="{8C968F81-7002-4767-8A10-0CB39350B32B}"/>
+                <a16:creationId xmlns:a16="http://schemas.microsoft.com/office/drawing/2014/main" id="{60126420-3B61-4BE8-9BEB-A6B4A901BA5A}"/>
               </a:ext>
             </a:extLst>
           </p:cNvPr>
@@ -23661,7 +24122,7 @@
                 <a:ea typeface="Arial"/>
                 <a:cs typeface="Arial"/>
               </a:rPr>
-              <a:t>Product can offer two routes: a fast first result or guided practice. Which existing grouping should inform this design?</a:t>
+              <a:t>Studio North can offer a ready-to-use template or a guided lesson. Which recorded grouping should inform these onboarding routes?</a:t>
             </a:r>
           </a:p>
         </p:txBody>
@@ -23671,7 +24132,7 @@
           <p:cNvPr id="6" name="">
             <a:extLst xmlns:a="http://schemas.openxmlformats.org/drawingml/2006/main">
               <a:ext uri="{FF2B5EF4-FFF2-40B4-BE49-F238E27FC236}">
-                <a16:creationId xmlns:a16="http://schemas.microsoft.com/office/drawing/2014/main" id="{586E5889-13D0-48B0-BFAC-2941D092EDD9}"/>
+                <a16:creationId xmlns:a16="http://schemas.microsoft.com/office/drawing/2014/main" id="{A3B5448A-6B38-4BF8-A09D-CCF4D7130268}"/>
               </a:ext>
             </a:extLst>
           </p:cNvPr>
@@ -23922,7 +24383,7 @@
           <p:cNvPr id="7" name="">
             <a:extLst xmlns:a="http://schemas.openxmlformats.org/drawingml/2006/main">
               <a:ext uri="{FF2B5EF4-FFF2-40B4-BE49-F238E27FC236}">
-                <a16:creationId xmlns:a16="http://schemas.microsoft.com/office/drawing/2014/main" id="{378BA159-29D0-4205-9580-F63025374042}"/>
+                <a16:creationId xmlns:a16="http://schemas.microsoft.com/office/drawing/2014/main" id="{7292F957-2894-4184-93B0-CBF8F9B7C4AA}"/>
               </a:ext>
             </a:extLst>
           </p:cNvPr>
@@ -24079,7 +24540,7 @@
           <p:cNvPr id="8" name="">
             <a:extLst xmlns:a="http://schemas.openxmlformats.org/drawingml/2006/main">
               <a:ext uri="{FF2B5EF4-FFF2-40B4-BE49-F238E27FC236}">
-                <a16:creationId xmlns:a16="http://schemas.microsoft.com/office/drawing/2014/main" id="{281A72FD-B36C-4B9E-981E-79ACD4F229BB}"/>
+                <a16:creationId xmlns:a16="http://schemas.microsoft.com/office/drawing/2014/main" id="{85B2B318-9603-4E93-9729-2A15A8989A10}"/>
               </a:ext>
             </a:extLst>
           </p:cNvPr>
@@ -24110,7 +24571,7 @@
           <p:cNvPr id="9" name="">
             <a:extLst xmlns:a="http://schemas.openxmlformats.org/drawingml/2006/main">
               <a:ext uri="{FF2B5EF4-FFF2-40B4-BE49-F238E27FC236}">
-                <a16:creationId xmlns:a16="http://schemas.microsoft.com/office/drawing/2014/main" id="{BA901FDB-133C-4E14-8C66-36CE1605BD76}"/>
+                <a16:creationId xmlns:a16="http://schemas.microsoft.com/office/drawing/2014/main" id="{AC916ECF-CC16-4D62-A424-8D3DEC10D865}"/>
               </a:ext>
             </a:extLst>
           </p:cNvPr>
@@ -24265,7 +24726,7 @@
     </p:spTree>
     <p:extLst>
       <p:ext uri="{BB962C8B-B14F-4D97-AF65-F5344CB8AC3E}">
-        <p14:creationId xmlns:p14="http://schemas.microsoft.com/office/powerpoint/2010/main" val="679807406"/>
+        <p14:creationId xmlns:p14="http://schemas.microsoft.com/office/powerpoint/2010/main" val="1694790522"/>
       </p:ext>
     </p:extLst>
   </p:cSld>
@@ -24296,7 +24757,7 @@
           <p:cNvPr id="28" name="">
             <a:extLst xmlns:a="http://schemas.openxmlformats.org/drawingml/2006/main">
               <a:ext uri="{FF2B5EF4-FFF2-40B4-BE49-F238E27FC236}">
-                <a16:creationId xmlns:a16="http://schemas.microsoft.com/office/drawing/2014/main" id="{D9B58A4C-4890-4656-9E89-643E83CDF618}"/>
+                <a16:creationId xmlns:a16="http://schemas.microsoft.com/office/drawing/2014/main" id="{D009E939-1432-4CD3-914E-632B65A6CFF2}"/>
               </a:ext>
             </a:extLst>
           </p:cNvPr>
@@ -24327,7 +24788,7 @@
           <p:cNvPr id="2" name="">
             <a:extLst xmlns:a="http://schemas.openxmlformats.org/drawingml/2006/main">
               <a:ext uri="{FF2B5EF4-FFF2-40B4-BE49-F238E27FC236}">
-                <a16:creationId xmlns:a16="http://schemas.microsoft.com/office/drawing/2014/main" id="{F45BBF37-480A-4BD2-A5FB-EA658272DCD3}"/>
+                <a16:creationId xmlns:a16="http://schemas.microsoft.com/office/drawing/2014/main" id="{F408F38C-1876-4F59-B396-84939749A02A}"/>
               </a:ext>
             </a:extLst>
           </p:cNvPr>
@@ -24484,7 +24945,7 @@
           <p:cNvPr id="3" name="">
             <a:extLst xmlns:a="http://schemas.openxmlformats.org/drawingml/2006/main">
               <a:ext uri="{FF2B5EF4-FFF2-40B4-BE49-F238E27FC236}">
-                <a16:creationId xmlns:a16="http://schemas.microsoft.com/office/drawing/2014/main" id="{E3D14CB2-C911-469E-BC6D-C9AE3158DA25}"/>
+                <a16:creationId xmlns:a16="http://schemas.microsoft.com/office/drawing/2014/main" id="{BA17F55F-B913-42BB-89BE-9135B821CEE8}"/>
               </a:ext>
             </a:extLst>
           </p:cNvPr>
@@ -24641,7 +25102,7 @@
           <p:cNvPr id="4" name="">
             <a:extLst xmlns:a="http://schemas.openxmlformats.org/drawingml/2006/main">
               <a:ext uri="{FF2B5EF4-FFF2-40B4-BE49-F238E27FC236}">
-                <a16:creationId xmlns:a16="http://schemas.microsoft.com/office/drawing/2014/main" id="{E95AC85A-F01F-404D-A557-8D3B19DB2F29}"/>
+                <a16:creationId xmlns:a16="http://schemas.microsoft.com/office/drawing/2014/main" id="{52A6D4EA-4400-49A9-80F0-73D6311D7144}"/>
               </a:ext>
             </a:extLst>
           </p:cNvPr>
@@ -24798,7 +25259,7 @@
           <p:cNvPr id="5" name="">
             <a:extLst xmlns:a="http://schemas.openxmlformats.org/drawingml/2006/main">
               <a:ext uri="{FF2B5EF4-FFF2-40B4-BE49-F238E27FC236}">
-                <a16:creationId xmlns:a16="http://schemas.microsoft.com/office/drawing/2014/main" id="{8D1FF8AE-F33B-4E95-996F-475A4AE5EB18}"/>
+                <a16:creationId xmlns:a16="http://schemas.microsoft.com/office/drawing/2014/main" id="{7D1B543A-8265-4A46-881C-4678A9F914F8}"/>
               </a:ext>
             </a:extLst>
           </p:cNvPr>
@@ -24816,7 +25277,7 @@
             <a:avLst/>
           </a:prstGeom>
           <a:solidFill xmlns:a="http://schemas.openxmlformats.org/drawingml/2006/main">
-            <a:srgbClr val="EAF4F3"/>
+            <a:srgbClr val="EDF5FA"/>
           </a:solidFill>
           <a:ln xmlns:a="http://schemas.openxmlformats.org/drawingml/2006/main" w="0">
             <a:noFill/>
@@ -24829,7 +25290,7 @@
           <p:cNvPr id="6" name="">
             <a:extLst xmlns:a="http://schemas.openxmlformats.org/drawingml/2006/main">
               <a:ext uri="{FF2B5EF4-FFF2-40B4-BE49-F238E27FC236}">
-                <a16:creationId xmlns:a16="http://schemas.microsoft.com/office/drawing/2014/main" id="{B1CF466C-128A-472C-A140-C7C67E075900}"/>
+                <a16:creationId xmlns:a16="http://schemas.microsoft.com/office/drawing/2014/main" id="{73D4283C-AA92-40A2-B565-586C6A1C223C}"/>
               </a:ext>
             </a:extLst>
           </p:cNvPr>
@@ -24860,7 +25321,7 @@
           <p:cNvPr id="7" name="">
             <a:extLst xmlns:a="http://schemas.openxmlformats.org/drawingml/2006/main">
               <a:ext uri="{FF2B5EF4-FFF2-40B4-BE49-F238E27FC236}">
-                <a16:creationId xmlns:a16="http://schemas.microsoft.com/office/drawing/2014/main" id="{3C4AAE15-121E-465A-A208-986D0D2C01F4}"/>
+                <a16:creationId xmlns:a16="http://schemas.microsoft.com/office/drawing/2014/main" id="{836C75DE-38E9-401D-8C34-A20E23AC3D88}"/>
               </a:ext>
             </a:extLst>
           </p:cNvPr>
@@ -25017,7 +25478,7 @@
           <p:cNvPr id="8" name="">
             <a:extLst xmlns:a="http://schemas.openxmlformats.org/drawingml/2006/main">
               <a:ext uri="{FF2B5EF4-FFF2-40B4-BE49-F238E27FC236}">
-                <a16:creationId xmlns:a16="http://schemas.microsoft.com/office/drawing/2014/main" id="{34BBB546-20B7-405F-9B15-1A8CA037FAE2}"/>
+                <a16:creationId xmlns:a16="http://schemas.microsoft.com/office/drawing/2014/main" id="{4F2D7ABF-B4A3-4E20-889F-3287CA447503}"/>
               </a:ext>
             </a:extLst>
           </p:cNvPr>
@@ -25197,7 +25658,7 @@
           <p:cNvPr id="9" name="">
             <a:extLst xmlns:a="http://schemas.openxmlformats.org/drawingml/2006/main">
               <a:ext uri="{FF2B5EF4-FFF2-40B4-BE49-F238E27FC236}">
-                <a16:creationId xmlns:a16="http://schemas.microsoft.com/office/drawing/2014/main" id="{B9DB4076-8103-449F-BEB4-D11FE68CFA67}"/>
+                <a16:creationId xmlns:a16="http://schemas.microsoft.com/office/drawing/2014/main" id="{6D556B4E-C698-4EAB-B5A2-F6A292515431}"/>
               </a:ext>
             </a:extLst>
           </p:cNvPr>
@@ -25228,7 +25689,7 @@
           <p:cNvPr id="10" name="">
             <a:extLst xmlns:a="http://schemas.openxmlformats.org/drawingml/2006/main">
               <a:ext uri="{FF2B5EF4-FFF2-40B4-BE49-F238E27FC236}">
-                <a16:creationId xmlns:a16="http://schemas.microsoft.com/office/drawing/2014/main" id="{F02A891A-FD0F-4260-8288-BDFAAE0C57F6}"/>
+                <a16:creationId xmlns:a16="http://schemas.microsoft.com/office/drawing/2014/main" id="{7EEDCAC3-5395-4769-97EE-32045301AC74}"/>
               </a:ext>
             </a:extLst>
           </p:cNvPr>
@@ -25246,7 +25707,7 @@
             <a:avLst/>
           </a:prstGeom>
           <a:solidFill xmlns:a="http://schemas.openxmlformats.org/drawingml/2006/main">
-            <a:srgbClr val="EAF4F3"/>
+            <a:srgbClr val="EDF5FA"/>
           </a:solidFill>
           <a:ln xmlns:a="http://schemas.openxmlformats.org/drawingml/2006/main" w="0">
             <a:noFill/>
@@ -25259,7 +25720,7 @@
           <p:cNvPr id="11" name="">
             <a:extLst xmlns:a="http://schemas.openxmlformats.org/drawingml/2006/main">
               <a:ext uri="{FF2B5EF4-FFF2-40B4-BE49-F238E27FC236}">
-                <a16:creationId xmlns:a16="http://schemas.microsoft.com/office/drawing/2014/main" id="{69770077-5A32-4347-AD1B-5E9B1C7AC6E8}"/>
+                <a16:creationId xmlns:a16="http://schemas.microsoft.com/office/drawing/2014/main" id="{0835FF76-5604-42D5-ACD9-9CCDD6CBF002}"/>
               </a:ext>
             </a:extLst>
           </p:cNvPr>
@@ -25277,7 +25738,7 @@
             <a:avLst/>
           </a:prstGeom>
           <a:solidFill xmlns:a="http://schemas.openxmlformats.org/drawingml/2006/main">
-            <a:srgbClr val="087F8C"/>
+            <a:srgbClr val="3191B5"/>
           </a:solidFill>
           <a:ln xmlns:a="http://schemas.openxmlformats.org/drawingml/2006/main" w="0">
             <a:noFill/>
@@ -25290,7 +25751,7 @@
           <p:cNvPr id="12" name="">
             <a:extLst xmlns:a="http://schemas.openxmlformats.org/drawingml/2006/main">
               <a:ext uri="{FF2B5EF4-FFF2-40B4-BE49-F238E27FC236}">
-                <a16:creationId xmlns:a16="http://schemas.microsoft.com/office/drawing/2014/main" id="{854773A9-FA05-417D-B3ED-C62FBCEFFF87}"/>
+                <a16:creationId xmlns:a16="http://schemas.microsoft.com/office/drawing/2014/main" id="{0FA68D8D-2E46-4F56-8129-FD7921569815}"/>
               </a:ext>
             </a:extLst>
           </p:cNvPr>
@@ -25319,7 +25780,7 @@
             <a:defPPr>
               <a:defRPr sz="1800" b="1">
                 <a:solidFill>
-                  <a:srgbClr val="087F8C"/>
+                  <a:srgbClr val="3191B5"/>
                 </a:solidFill>
                 <a:latin typeface="Arial"/>
                 <a:ea typeface="Arial"/>
@@ -25329,7 +25790,7 @@
             <a:lvl1pPr>
               <a:defRPr sz="1800" b="1">
                 <a:solidFill>
-                  <a:srgbClr val="087F8C"/>
+                  <a:srgbClr val="3191B5"/>
                 </a:solidFill>
                 <a:latin typeface="Arial"/>
                 <a:ea typeface="Arial"/>
@@ -25339,7 +25800,7 @@
             <a:lvl2pPr>
               <a:defRPr sz="1800" b="1">
                 <a:solidFill>
-                  <a:srgbClr val="087F8C"/>
+                  <a:srgbClr val="3191B5"/>
                 </a:solidFill>
                 <a:latin typeface="Arial"/>
                 <a:ea typeface="Arial"/>
@@ -25349,7 +25810,7 @@
             <a:lvl3pPr>
               <a:defRPr sz="1800" b="1">
                 <a:solidFill>
-                  <a:srgbClr val="087F8C"/>
+                  <a:srgbClr val="3191B5"/>
                 </a:solidFill>
                 <a:latin typeface="Arial"/>
                 <a:ea typeface="Arial"/>
@@ -25359,7 +25820,7 @@
             <a:lvl4pPr>
               <a:defRPr sz="1800" b="1">
                 <a:solidFill>
-                  <a:srgbClr val="087F8C"/>
+                  <a:srgbClr val="3191B5"/>
                 </a:solidFill>
                 <a:latin typeface="Arial"/>
                 <a:ea typeface="Arial"/>
@@ -25369,7 +25830,7 @@
             <a:lvl5pPr>
               <a:defRPr sz="1800" b="1">
                 <a:solidFill>
-                  <a:srgbClr val="087F8C"/>
+                  <a:srgbClr val="3191B5"/>
                 </a:solidFill>
                 <a:latin typeface="Arial"/>
                 <a:ea typeface="Arial"/>
@@ -25379,7 +25840,7 @@
             <a:lvl6pPr>
               <a:defRPr sz="1800" b="1">
                 <a:solidFill>
-                  <a:srgbClr val="087F8C"/>
+                  <a:srgbClr val="3191B5"/>
                 </a:solidFill>
                 <a:latin typeface="Arial"/>
                 <a:ea typeface="Arial"/>
@@ -25389,7 +25850,7 @@
             <a:lvl7pPr>
               <a:defRPr sz="1800" b="1">
                 <a:solidFill>
-                  <a:srgbClr val="087F8C"/>
+                  <a:srgbClr val="3191B5"/>
                 </a:solidFill>
                 <a:latin typeface="Arial"/>
                 <a:ea typeface="Arial"/>
@@ -25399,7 +25860,7 @@
             <a:lvl8pPr>
               <a:defRPr sz="1800" b="1">
                 <a:solidFill>
-                  <a:srgbClr val="087F8C"/>
+                  <a:srgbClr val="3191B5"/>
                 </a:solidFill>
                 <a:latin typeface="Arial"/>
                 <a:ea typeface="Arial"/>
@@ -25409,7 +25870,7 @@
             <a:lvl9pPr>
               <a:defRPr sz="1800" b="1">
                 <a:solidFill>
-                  <a:srgbClr val="087F8C"/>
+                  <a:srgbClr val="3191B5"/>
                 </a:solidFill>
                 <a:latin typeface="Arial"/>
                 <a:ea typeface="Arial"/>
@@ -25421,7 +25882,7 @@
             <a:pPr>
               <a:defRPr sz="1800" b="1">
                 <a:solidFill>
-                  <a:srgbClr val="087F8C"/>
+                  <a:srgbClr val="3191B5"/>
                 </a:solidFill>
                 <a:latin typeface="Arial"/>
                 <a:ea typeface="Arial"/>
@@ -25431,7 +25892,7 @@
             <a:r>
               <a:rPr sz="1800" b="1">
                 <a:solidFill>
-                  <a:srgbClr val="087F8C"/>
+                  <a:srgbClr val="3191B5"/>
                 </a:solidFill>
                 <a:latin typeface="Arial"/>
                 <a:ea typeface="Arial"/>
@@ -25447,7 +25908,7 @@
           <p:cNvPr id="13" name="">
             <a:extLst xmlns:a="http://schemas.openxmlformats.org/drawingml/2006/main">
               <a:ext uri="{FF2B5EF4-FFF2-40B4-BE49-F238E27FC236}">
-                <a16:creationId xmlns:a16="http://schemas.microsoft.com/office/drawing/2014/main" id="{773EEFA4-7EBD-4246-8A73-189720DE1256}"/>
+                <a16:creationId xmlns:a16="http://schemas.microsoft.com/office/drawing/2014/main" id="{8E1B5AC0-01E9-4576-8553-61DDF29DFBEE}"/>
               </a:ext>
             </a:extLst>
           </p:cNvPr>
@@ -25627,7 +26088,7 @@
           <p:cNvPr id="14" name="">
             <a:extLst xmlns:a="http://schemas.openxmlformats.org/drawingml/2006/main">
               <a:ext uri="{FF2B5EF4-FFF2-40B4-BE49-F238E27FC236}">
-                <a16:creationId xmlns:a16="http://schemas.microsoft.com/office/drawing/2014/main" id="{35C460D1-19F6-4B39-BB47-EAFD9ED9C71E}"/>
+                <a16:creationId xmlns:a16="http://schemas.microsoft.com/office/drawing/2014/main" id="{9D1AB0A9-0E11-40D6-B76F-4AFC97EEC1D1}"/>
               </a:ext>
             </a:extLst>
           </p:cNvPr>
@@ -25658,7 +26119,7 @@
           <p:cNvPr id="15" name="">
             <a:extLst xmlns:a="http://schemas.openxmlformats.org/drawingml/2006/main">
               <a:ext uri="{FF2B5EF4-FFF2-40B4-BE49-F238E27FC236}">
-                <a16:creationId xmlns:a16="http://schemas.microsoft.com/office/drawing/2014/main" id="{0643190A-E781-45EC-8D7D-945AD49837E5}"/>
+                <a16:creationId xmlns:a16="http://schemas.microsoft.com/office/drawing/2014/main" id="{47051C65-9DCA-4A99-BF69-A866964FC269}"/>
               </a:ext>
             </a:extLst>
           </p:cNvPr>
@@ -25676,7 +26137,7 @@
             <a:avLst/>
           </a:prstGeom>
           <a:solidFill xmlns:a="http://schemas.openxmlformats.org/drawingml/2006/main">
-            <a:srgbClr val="EAF4F3"/>
+            <a:srgbClr val="EDF5FA"/>
           </a:solidFill>
           <a:ln xmlns:a="http://schemas.openxmlformats.org/drawingml/2006/main" w="0">
             <a:noFill/>
@@ -25689,7 +26150,7 @@
           <p:cNvPr id="16" name="">
             <a:extLst xmlns:a="http://schemas.openxmlformats.org/drawingml/2006/main">
               <a:ext uri="{FF2B5EF4-FFF2-40B4-BE49-F238E27FC236}">
-                <a16:creationId xmlns:a16="http://schemas.microsoft.com/office/drawing/2014/main" id="{33894F50-4E67-4B03-B33E-792296DDC20F}"/>
+                <a16:creationId xmlns:a16="http://schemas.microsoft.com/office/drawing/2014/main" id="{C9DD0B6D-94F7-49E9-8FD4-D50AD2B7274F}"/>
               </a:ext>
             </a:extLst>
           </p:cNvPr>
@@ -25720,7 +26181,7 @@
           <p:cNvPr id="17" name="">
             <a:extLst xmlns:a="http://schemas.openxmlformats.org/drawingml/2006/main">
               <a:ext uri="{FF2B5EF4-FFF2-40B4-BE49-F238E27FC236}">
-                <a16:creationId xmlns:a16="http://schemas.microsoft.com/office/drawing/2014/main" id="{889171A7-22C7-45AE-AA5C-33D00F0D712A}"/>
+                <a16:creationId xmlns:a16="http://schemas.microsoft.com/office/drawing/2014/main" id="{339FF956-47EC-45F4-8E15-34A9AA887FE2}"/>
               </a:ext>
             </a:extLst>
           </p:cNvPr>
@@ -25877,7 +26338,7 @@
           <p:cNvPr id="18" name="">
             <a:extLst xmlns:a="http://schemas.openxmlformats.org/drawingml/2006/main">
               <a:ext uri="{FF2B5EF4-FFF2-40B4-BE49-F238E27FC236}">
-                <a16:creationId xmlns:a16="http://schemas.microsoft.com/office/drawing/2014/main" id="{5C13C6BF-34D1-4D1C-810D-6A70C93B1E2B}"/>
+                <a16:creationId xmlns:a16="http://schemas.microsoft.com/office/drawing/2014/main" id="{1D8A5C2F-785E-44FC-8979-AC2FD4F4E651}"/>
               </a:ext>
             </a:extLst>
           </p:cNvPr>
@@ -26057,7 +26518,7 @@
           <p:cNvPr id="19" name="">
             <a:extLst xmlns:a="http://schemas.openxmlformats.org/drawingml/2006/main">
               <a:ext uri="{FF2B5EF4-FFF2-40B4-BE49-F238E27FC236}">
-                <a16:creationId xmlns:a16="http://schemas.microsoft.com/office/drawing/2014/main" id="{5C3E2D4E-939C-465D-B810-6EE1B170A534}"/>
+                <a16:creationId xmlns:a16="http://schemas.microsoft.com/office/drawing/2014/main" id="{E2384146-5AA0-4750-923E-9963938F128A}"/>
               </a:ext>
             </a:extLst>
           </p:cNvPr>
@@ -26088,7 +26549,7 @@
           <p:cNvPr id="20" name="">
             <a:extLst xmlns:a="http://schemas.openxmlformats.org/drawingml/2006/main">
               <a:ext uri="{FF2B5EF4-FFF2-40B4-BE49-F238E27FC236}">
-                <a16:creationId xmlns:a16="http://schemas.microsoft.com/office/drawing/2014/main" id="{3FE8BB15-EF3A-4089-B53E-50AC2BBC7352}"/>
+                <a16:creationId xmlns:a16="http://schemas.microsoft.com/office/drawing/2014/main" id="{A03A017F-D908-46A3-80BA-EE0ED7228C13}"/>
               </a:ext>
             </a:extLst>
           </p:cNvPr>
@@ -26106,7 +26567,7 @@
             <a:avLst/>
           </a:prstGeom>
           <a:solidFill xmlns:a="http://schemas.openxmlformats.org/drawingml/2006/main">
-            <a:srgbClr val="EAF4F3"/>
+            <a:srgbClr val="EDF5FA"/>
           </a:solidFill>
           <a:ln xmlns:a="http://schemas.openxmlformats.org/drawingml/2006/main" w="0">
             <a:noFill/>
@@ -26119,7 +26580,7 @@
           <p:cNvPr id="21" name="">
             <a:extLst xmlns:a="http://schemas.openxmlformats.org/drawingml/2006/main">
               <a:ext uri="{FF2B5EF4-FFF2-40B4-BE49-F238E27FC236}">
-                <a16:creationId xmlns:a16="http://schemas.microsoft.com/office/drawing/2014/main" id="{2AEEB5C4-9229-42B0-8025-E3C3D04A0C56}"/>
+                <a16:creationId xmlns:a16="http://schemas.microsoft.com/office/drawing/2014/main" id="{0D946D95-8784-458D-A066-F1C219BE1C8F}"/>
               </a:ext>
             </a:extLst>
           </p:cNvPr>
@@ -26137,7 +26598,7 @@
             <a:avLst/>
           </a:prstGeom>
           <a:solidFill xmlns:a="http://schemas.openxmlformats.org/drawingml/2006/main">
-            <a:srgbClr val="087F8C"/>
+            <a:srgbClr val="3191B5"/>
           </a:solidFill>
           <a:ln xmlns:a="http://schemas.openxmlformats.org/drawingml/2006/main" w="0">
             <a:noFill/>
@@ -26150,7 +26611,7 @@
           <p:cNvPr id="22" name="">
             <a:extLst xmlns:a="http://schemas.openxmlformats.org/drawingml/2006/main">
               <a:ext uri="{FF2B5EF4-FFF2-40B4-BE49-F238E27FC236}">
-                <a16:creationId xmlns:a16="http://schemas.microsoft.com/office/drawing/2014/main" id="{CECD9AC9-4186-4E77-AE81-8A6C5F79B415}"/>
+                <a16:creationId xmlns:a16="http://schemas.microsoft.com/office/drawing/2014/main" id="{A80B8704-A892-4FE1-A4BF-052EF61889D5}"/>
               </a:ext>
             </a:extLst>
           </p:cNvPr>
@@ -26179,7 +26640,7 @@
             <a:defPPr>
               <a:defRPr sz="1800" b="1">
                 <a:solidFill>
-                  <a:srgbClr val="087F8C"/>
+                  <a:srgbClr val="3191B5"/>
                 </a:solidFill>
                 <a:latin typeface="Arial"/>
                 <a:ea typeface="Arial"/>
@@ -26189,7 +26650,7 @@
             <a:lvl1pPr>
               <a:defRPr sz="1800" b="1">
                 <a:solidFill>
-                  <a:srgbClr val="087F8C"/>
+                  <a:srgbClr val="3191B5"/>
                 </a:solidFill>
                 <a:latin typeface="Arial"/>
                 <a:ea typeface="Arial"/>
@@ -26199,7 +26660,7 @@
             <a:lvl2pPr>
               <a:defRPr sz="1800" b="1">
                 <a:solidFill>
-                  <a:srgbClr val="087F8C"/>
+                  <a:srgbClr val="3191B5"/>
                 </a:solidFill>
                 <a:latin typeface="Arial"/>
                 <a:ea typeface="Arial"/>
@@ -26209,7 +26670,7 @@
             <a:lvl3pPr>
               <a:defRPr sz="1800" b="1">
                 <a:solidFill>
-                  <a:srgbClr val="087F8C"/>
+                  <a:srgbClr val="3191B5"/>
                 </a:solidFill>
                 <a:latin typeface="Arial"/>
                 <a:ea typeface="Arial"/>
@@ -26219,7 +26680,7 @@
             <a:lvl4pPr>
               <a:defRPr sz="1800" b="1">
                 <a:solidFill>
-                  <a:srgbClr val="087F8C"/>
+                  <a:srgbClr val="3191B5"/>
                 </a:solidFill>
                 <a:latin typeface="Arial"/>
                 <a:ea typeface="Arial"/>
@@ -26229,7 +26690,7 @@
             <a:lvl5pPr>
               <a:defRPr sz="1800" b="1">
                 <a:solidFill>
-                  <a:srgbClr val="087F8C"/>
+                  <a:srgbClr val="3191B5"/>
                 </a:solidFill>
                 <a:latin typeface="Arial"/>
                 <a:ea typeface="Arial"/>
@@ -26239,7 +26700,7 @@
             <a:lvl6pPr>
               <a:defRPr sz="1800" b="1">
                 <a:solidFill>
-                  <a:srgbClr val="087F8C"/>
+                  <a:srgbClr val="3191B5"/>
                 </a:solidFill>
                 <a:latin typeface="Arial"/>
                 <a:ea typeface="Arial"/>
@@ -26249,7 +26710,7 @@
             <a:lvl7pPr>
               <a:defRPr sz="1800" b="1">
                 <a:solidFill>
-                  <a:srgbClr val="087F8C"/>
+                  <a:srgbClr val="3191B5"/>
                 </a:solidFill>
                 <a:latin typeface="Arial"/>
                 <a:ea typeface="Arial"/>
@@ -26259,7 +26720,7 @@
             <a:lvl8pPr>
               <a:defRPr sz="1800" b="1">
                 <a:solidFill>
-                  <a:srgbClr val="087F8C"/>
+                  <a:srgbClr val="3191B5"/>
                 </a:solidFill>
                 <a:latin typeface="Arial"/>
                 <a:ea typeface="Arial"/>
@@ -26269,7 +26730,7 @@
             <a:lvl9pPr>
               <a:defRPr sz="1800" b="1">
                 <a:solidFill>
-                  <a:srgbClr val="087F8C"/>
+                  <a:srgbClr val="3191B5"/>
                 </a:solidFill>
                 <a:latin typeface="Arial"/>
                 <a:ea typeface="Arial"/>
@@ -26281,7 +26742,7 @@
             <a:pPr>
               <a:defRPr sz="1800" b="1">
                 <a:solidFill>
-                  <a:srgbClr val="087F8C"/>
+                  <a:srgbClr val="3191B5"/>
                 </a:solidFill>
                 <a:latin typeface="Arial"/>
                 <a:ea typeface="Arial"/>
@@ -26291,7 +26752,7 @@
             <a:r>
               <a:rPr sz="1800" b="1">
                 <a:solidFill>
-                  <a:srgbClr val="087F8C"/>
+                  <a:srgbClr val="3191B5"/>
                 </a:solidFill>
                 <a:latin typeface="Arial"/>
                 <a:ea typeface="Arial"/>
@@ -26307,7 +26768,7 @@
           <p:cNvPr id="23" name="">
             <a:extLst xmlns:a="http://schemas.openxmlformats.org/drawingml/2006/main">
               <a:ext uri="{FF2B5EF4-FFF2-40B4-BE49-F238E27FC236}">
-                <a16:creationId xmlns:a16="http://schemas.microsoft.com/office/drawing/2014/main" id="{992DD0F3-F117-4F9A-BE21-E17BD162F48A}"/>
+                <a16:creationId xmlns:a16="http://schemas.microsoft.com/office/drawing/2014/main" id="{E444C5E6-5232-4326-8820-B692B58E9B82}"/>
               </a:ext>
             </a:extLst>
           </p:cNvPr>
@@ -26487,7 +26948,7 @@
           <p:cNvPr id="24" name="">
             <a:extLst xmlns:a="http://schemas.openxmlformats.org/drawingml/2006/main">
               <a:ext uri="{FF2B5EF4-FFF2-40B4-BE49-F238E27FC236}">
-                <a16:creationId xmlns:a16="http://schemas.microsoft.com/office/drawing/2014/main" id="{643D976F-732A-4D2D-A1F5-7DEDAB6F3A8A}"/>
+                <a16:creationId xmlns:a16="http://schemas.microsoft.com/office/drawing/2014/main" id="{E0E0EF20-9326-4E1D-8550-F2926B090492}"/>
               </a:ext>
             </a:extLst>
           </p:cNvPr>
@@ -26644,7 +27105,7 @@
           <p:cNvPr id="25" name="">
             <a:extLst xmlns:a="http://schemas.openxmlformats.org/drawingml/2006/main">
               <a:ext uri="{FF2B5EF4-FFF2-40B4-BE49-F238E27FC236}">
-                <a16:creationId xmlns:a16="http://schemas.microsoft.com/office/drawing/2014/main" id="{29BB5A55-29E2-4EF8-9E78-C70C0C09046E}"/>
+                <a16:creationId xmlns:a16="http://schemas.microsoft.com/office/drawing/2014/main" id="{FE7231C6-873D-4648-A507-C2272873A0B9}"/>
               </a:ext>
             </a:extLst>
           </p:cNvPr>
@@ -26801,7 +27262,7 @@
           <p:cNvPr id="26" name="">
             <a:extLst xmlns:a="http://schemas.openxmlformats.org/drawingml/2006/main">
               <a:ext uri="{FF2B5EF4-FFF2-40B4-BE49-F238E27FC236}">
-                <a16:creationId xmlns:a16="http://schemas.microsoft.com/office/drawing/2014/main" id="{AFF65CD4-3C5C-46DA-A73A-30B300DA49E5}"/>
+                <a16:creationId xmlns:a16="http://schemas.microsoft.com/office/drawing/2014/main" id="{AD3EF119-F5AF-4C2B-9979-6AC46FCD2D19}"/>
               </a:ext>
             </a:extLst>
           </p:cNvPr>
@@ -26819,7 +27280,7 @@
             <a:avLst/>
           </a:prstGeom>
           <a:solidFill xmlns:a="http://schemas.openxmlformats.org/drawingml/2006/main">
-            <a:srgbClr val="EAF4F3"/>
+            <a:srgbClr val="EDF5FA"/>
           </a:solidFill>
           <a:ln xmlns:a="http://schemas.openxmlformats.org/drawingml/2006/main" w="0">
             <a:noFill/>
@@ -26832,7 +27293,7 @@
           <p:cNvPr id="27" name="">
             <a:extLst xmlns:a="http://schemas.openxmlformats.org/drawingml/2006/main">
               <a:ext uri="{FF2B5EF4-FFF2-40B4-BE49-F238E27FC236}">
-                <a16:creationId xmlns:a16="http://schemas.microsoft.com/office/drawing/2014/main" id="{5E11517B-E857-481E-9E0B-E1197F5695D3}"/>
+                <a16:creationId xmlns:a16="http://schemas.microsoft.com/office/drawing/2014/main" id="{CF939BCD-7418-43E6-8A38-5DB86AB32CCF}"/>
               </a:ext>
             </a:extLst>
           </p:cNvPr>
@@ -26987,7 +27448,7 @@
     </p:spTree>
     <p:extLst>
       <p:ext uri="{BB962C8B-B14F-4D97-AF65-F5344CB8AC3E}">
-        <p14:creationId xmlns:p14="http://schemas.microsoft.com/office/powerpoint/2010/main" val="1791300165"/>
+        <p14:creationId xmlns:p14="http://schemas.microsoft.com/office/powerpoint/2010/main" val="1345497035"/>
       </p:ext>
     </p:extLst>
   </p:cSld>
@@ -27018,7 +27479,7 @@
           <p:cNvPr id="9" name="">
             <a:extLst xmlns:a="http://schemas.openxmlformats.org/drawingml/2006/main">
               <a:ext uri="{FF2B5EF4-FFF2-40B4-BE49-F238E27FC236}">
-                <a16:creationId xmlns:a16="http://schemas.microsoft.com/office/drawing/2014/main" id="{734560AF-3550-45EE-85D0-D8DA718EB00C}"/>
+                <a16:creationId xmlns:a16="http://schemas.microsoft.com/office/drawing/2014/main" id="{7A160381-9CD6-47E4-8716-6D4C983813C0}"/>
               </a:ext>
             </a:extLst>
           </p:cNvPr>
@@ -27049,7 +27510,7 @@
           <p:cNvPr id="2" name="">
             <a:extLst xmlns:a="http://schemas.openxmlformats.org/drawingml/2006/main">
               <a:ext uri="{FF2B5EF4-FFF2-40B4-BE49-F238E27FC236}">
-                <a16:creationId xmlns:a16="http://schemas.microsoft.com/office/drawing/2014/main" id="{57F0B8C9-BAC2-49FD-85F1-8B834A61DD46}"/>
+                <a16:creationId xmlns:a16="http://schemas.microsoft.com/office/drawing/2014/main" id="{24968157-E153-499A-A46F-A2CFA7D02019}"/>
               </a:ext>
             </a:extLst>
           </p:cNvPr>
@@ -27206,7 +27667,7 @@
           <p:cNvPr id="3" name="">
             <a:extLst xmlns:a="http://schemas.openxmlformats.org/drawingml/2006/main">
               <a:ext uri="{FF2B5EF4-FFF2-40B4-BE49-F238E27FC236}">
-                <a16:creationId xmlns:a16="http://schemas.microsoft.com/office/drawing/2014/main" id="{24B2DB8B-24C9-4615-8DB5-CD54A647B45F}"/>
+                <a16:creationId xmlns:a16="http://schemas.microsoft.com/office/drawing/2014/main" id="{E05E2D30-7B83-44AA-B0F3-948B0D3B17AD}"/>
               </a:ext>
             </a:extLst>
           </p:cNvPr>
@@ -27363,7 +27824,7 @@
           <p:cNvPr id="4" name="">
             <a:extLst xmlns:a="http://schemas.openxmlformats.org/drawingml/2006/main">
               <a:ext uri="{FF2B5EF4-FFF2-40B4-BE49-F238E27FC236}">
-                <a16:creationId xmlns:a16="http://schemas.microsoft.com/office/drawing/2014/main" id="{4AB0030E-2623-4639-A490-A2AC09F21E8B}"/>
+                <a16:creationId xmlns:a16="http://schemas.microsoft.com/office/drawing/2014/main" id="{7931BAB8-4512-44B4-8D98-E17D96D05F02}"/>
               </a:ext>
             </a:extLst>
           </p:cNvPr>
@@ -27520,7 +27981,7 @@
           <p:cNvPr id="5" name="">
             <a:extLst xmlns:a="http://schemas.openxmlformats.org/drawingml/2006/main">
               <a:ext uri="{FF2B5EF4-FFF2-40B4-BE49-F238E27FC236}">
-                <a16:creationId xmlns:a16="http://schemas.microsoft.com/office/drawing/2014/main" id="{767DAA71-C437-4E82-827C-96A230825B0C}"/>
+                <a16:creationId xmlns:a16="http://schemas.microsoft.com/office/drawing/2014/main" id="{AEF86DD3-F869-4423-9669-28FAD6CB48B5}"/>
               </a:ext>
             </a:extLst>
           </p:cNvPr>
@@ -27777,7 +28238,7 @@
                           <a:ea typeface="Arial"/>
                           <a:cs typeface="Arial"/>
                         </a:rPr>
-                        <a:t>76%</a:t>
+                        <a:t>87%</a:t>
                       </a:r>
                     </a:p>
                   </a:txBody>
@@ -27801,7 +28262,7 @@
                           <a:ea typeface="Arial"/>
                           <a:cs typeface="Arial"/>
                         </a:rPr>
-                        <a:t>70%</a:t>
+                        <a:t>78%</a:t>
                       </a:r>
                     </a:p>
                   </a:txBody>
@@ -27825,7 +28286,7 @@
                           <a:ea typeface="Arial"/>
                           <a:cs typeface="Arial"/>
                         </a:rPr>
-                        <a:t>64%</a:t>
+                        <a:t>72%</a:t>
                       </a:r>
                     </a:p>
                   </a:txBody>
@@ -27849,7 +28310,7 @@
                           <a:ea typeface="Arial"/>
                           <a:cs typeface="Arial"/>
                         </a:rPr>
-                        <a:t>60%</a:t>
+                        <a:t>68%</a:t>
                       </a:r>
                     </a:p>
                   </a:txBody>
@@ -27873,7 +28334,7 @@
                           <a:ea typeface="Arial"/>
                           <a:cs typeface="Arial"/>
                         </a:rPr>
-                        <a:t>55%</a:t>
+                        <a:t>63%</a:t>
                       </a:r>
                     </a:p>
                   </a:txBody>
@@ -27947,7 +28408,7 @@
                           <a:ea typeface="Arial"/>
                           <a:cs typeface="Arial"/>
                         </a:rPr>
-                        <a:t>82%</a:t>
+                        <a:t>86%</a:t>
                       </a:r>
                     </a:p>
                   </a:txBody>
@@ -27971,7 +28432,7 @@
                           <a:ea typeface="Arial"/>
                           <a:cs typeface="Arial"/>
                         </a:rPr>
-                        <a:t>74%</a:t>
+                        <a:t>81%</a:t>
                       </a:r>
                     </a:p>
                   </a:txBody>
@@ -27995,7 +28456,7 @@
                           <a:ea typeface="Arial"/>
                           <a:cs typeface="Arial"/>
                         </a:rPr>
-                        <a:t>71%</a:t>
+                        <a:t>75%</a:t>
                       </a:r>
                     </a:p>
                   </a:txBody>
@@ -28019,7 +28480,7 @@
                           <a:ea typeface="Arial"/>
                           <a:cs typeface="Arial"/>
                         </a:rPr>
-                        <a:t>70%</a:t>
+                        <a:t>72%</a:t>
                       </a:r>
                     </a:p>
                   </a:txBody>
@@ -28043,7 +28504,7 @@
                           <a:ea typeface="Arial"/>
                           <a:cs typeface="Arial"/>
                         </a:rPr>
-                        <a:t>67%</a:t>
+                        <a:t>66%</a:t>
                       </a:r>
                     </a:p>
                   </a:txBody>
@@ -28117,7 +28578,7 @@
                           <a:ea typeface="Arial"/>
                           <a:cs typeface="Arial"/>
                         </a:rPr>
-                        <a:t>83%</a:t>
+                        <a:t>91%</a:t>
                       </a:r>
                     </a:p>
                   </a:txBody>
@@ -28141,7 +28602,7 @@
                           <a:ea typeface="Arial"/>
                           <a:cs typeface="Arial"/>
                         </a:rPr>
-                        <a:t>78%</a:t>
+                        <a:t>82%</a:t>
                       </a:r>
                     </a:p>
                   </a:txBody>
@@ -28165,7 +28626,7 @@
                           <a:ea typeface="Arial"/>
                           <a:cs typeface="Arial"/>
                         </a:rPr>
-                        <a:t>75%</a:t>
+                        <a:t>76%</a:t>
                       </a:r>
                     </a:p>
                   </a:txBody>
@@ -28189,7 +28650,7 @@
                           <a:ea typeface="Arial"/>
                           <a:cs typeface="Arial"/>
                         </a:rPr>
-                        <a:t>71%</a:t>
+                        <a:t>70%</a:t>
                       </a:r>
                     </a:p>
                   </a:txBody>
@@ -28213,7 +28674,7 @@
                           <a:ea typeface="Arial"/>
                           <a:cs typeface="Arial"/>
                         </a:rPr>
-                        <a:t>69%</a:t>
+                        <a:t>68%</a:t>
                       </a:r>
                     </a:p>
                   </a:txBody>
@@ -28403,7 +28864,7 @@
           <p:cNvPr id="6" name="">
             <a:extLst xmlns:a="http://schemas.openxmlformats.org/drawingml/2006/main">
               <a:ext uri="{FF2B5EF4-FFF2-40B4-BE49-F238E27FC236}">
-                <a16:creationId xmlns:a16="http://schemas.microsoft.com/office/drawing/2014/main" id="{6824528F-D737-4640-A1DA-4D1719E54CE6}"/>
+                <a16:creationId xmlns:a16="http://schemas.microsoft.com/office/drawing/2014/main" id="{9F040F8E-4D44-48FE-928E-7CB74794D200}"/>
               </a:ext>
             </a:extLst>
           </p:cNvPr>
@@ -28560,7 +29021,7 @@
           <p:cNvPr id="7" name="">
             <a:extLst xmlns:a="http://schemas.openxmlformats.org/drawingml/2006/main">
               <a:ext uri="{FF2B5EF4-FFF2-40B4-BE49-F238E27FC236}">
-                <a16:creationId xmlns:a16="http://schemas.microsoft.com/office/drawing/2014/main" id="{A17412D7-1FBB-4468-A869-5F999E96CF8E}"/>
+                <a16:creationId xmlns:a16="http://schemas.microsoft.com/office/drawing/2014/main" id="{F863A330-36D0-4B9A-9F71-F64DD825BDA4}"/>
               </a:ext>
             </a:extLst>
           </p:cNvPr>
@@ -28578,7 +29039,7 @@
             <a:avLst/>
           </a:prstGeom>
           <a:solidFill xmlns:a="http://schemas.openxmlformats.org/drawingml/2006/main">
-            <a:srgbClr val="EAF4F3"/>
+            <a:srgbClr val="F1F3F4"/>
           </a:solidFill>
           <a:ln xmlns:a="http://schemas.openxmlformats.org/drawingml/2006/main" w="0">
             <a:noFill/>
@@ -28591,7 +29052,7 @@
           <p:cNvPr id="8" name="">
             <a:extLst xmlns:a="http://schemas.openxmlformats.org/drawingml/2006/main">
               <a:ext uri="{FF2B5EF4-FFF2-40B4-BE49-F238E27FC236}">
-                <a16:creationId xmlns:a16="http://schemas.microsoft.com/office/drawing/2014/main" id="{9EF21985-05C4-4A5F-B561-3A7C22316BF8}"/>
+                <a16:creationId xmlns:a16="http://schemas.microsoft.com/office/drawing/2014/main" id="{C46F3BFD-CEFD-4D09-A5AC-EACB7C23B114}"/>
               </a:ext>
             </a:extLst>
           </p:cNvPr>
@@ -28738,7 +29199,7 @@
                 <a:ea typeface="Arial"/>
                 <a:cs typeface="Arial"/>
               </a:rPr>
-              <a:t>A blank is not zero. The newest cohort has not had time to reach later ages.</a:t>
+              <a:t>As of January 1, 2026, December’s cohort has only age 0 observed. Later ages remain blank.</a:t>
             </a:r>
           </a:p>
         </p:txBody>
@@ -28746,7 +29207,7 @@
     </p:spTree>
     <p:extLst>
       <p:ext uri="{BB962C8B-B14F-4D97-AF65-F5344CB8AC3E}">
-        <p14:creationId xmlns:p14="http://schemas.microsoft.com/office/powerpoint/2010/main" val="349383084"/>
+        <p14:creationId xmlns:p14="http://schemas.microsoft.com/office/powerpoint/2010/main" val="1627579047"/>
       </p:ext>
     </p:extLst>
   </p:cSld>
@@ -28777,7 +29238,7 @@
           <p:cNvPr id="17" name="">
             <a:extLst xmlns:a="http://schemas.openxmlformats.org/drawingml/2006/main">
               <a:ext uri="{FF2B5EF4-FFF2-40B4-BE49-F238E27FC236}">
-                <a16:creationId xmlns:a16="http://schemas.microsoft.com/office/drawing/2014/main" id="{007052FE-5851-4936-B1F0-652C7C6BAEF9}"/>
+                <a16:creationId xmlns:a16="http://schemas.microsoft.com/office/drawing/2014/main" id="{1B4E0A62-FF82-4858-AA90-01CEAAD7EF8D}"/>
               </a:ext>
             </a:extLst>
           </p:cNvPr>
@@ -28808,7 +29269,7 @@
           <p:cNvPr id="2" name="">
             <a:extLst xmlns:a="http://schemas.openxmlformats.org/drawingml/2006/main">
               <a:ext uri="{FF2B5EF4-FFF2-40B4-BE49-F238E27FC236}">
-                <a16:creationId xmlns:a16="http://schemas.microsoft.com/office/drawing/2014/main" id="{954D387D-1AC5-4DB4-95F6-5E23E2714EFF}"/>
+                <a16:creationId xmlns:a16="http://schemas.microsoft.com/office/drawing/2014/main" id="{178DBE67-0EE7-4BA8-BD7D-8B818A2CE3A8}"/>
               </a:ext>
             </a:extLst>
           </p:cNvPr>
@@ -28965,7 +29426,7 @@
           <p:cNvPr id="3" name="">
             <a:extLst xmlns:a="http://schemas.openxmlformats.org/drawingml/2006/main">
               <a:ext uri="{FF2B5EF4-FFF2-40B4-BE49-F238E27FC236}">
-                <a16:creationId xmlns:a16="http://schemas.microsoft.com/office/drawing/2014/main" id="{FAC7FCB6-9846-457B-A681-7FC551649F37}"/>
+                <a16:creationId xmlns:a16="http://schemas.microsoft.com/office/drawing/2014/main" id="{809342AE-2F8B-4243-98BF-12282F416D29}"/>
               </a:ext>
             </a:extLst>
           </p:cNvPr>
@@ -29122,7 +29583,7 @@
           <p:cNvPr id="4" name="">
             <a:extLst xmlns:a="http://schemas.openxmlformats.org/drawingml/2006/main">
               <a:ext uri="{FF2B5EF4-FFF2-40B4-BE49-F238E27FC236}">
-                <a16:creationId xmlns:a16="http://schemas.microsoft.com/office/drawing/2014/main" id="{AE6140D8-EBF3-4C1F-AD8E-A95DCC619A62}"/>
+                <a16:creationId xmlns:a16="http://schemas.microsoft.com/office/drawing/2014/main" id="{9BDEF1BA-D31C-460E-B580-423FF40880DE}"/>
               </a:ext>
             </a:extLst>
           </p:cNvPr>
@@ -29279,7 +29740,7 @@
           <p:cNvPr id="5" name="">
             <a:extLst xmlns:a="http://schemas.openxmlformats.org/drawingml/2006/main">
               <a:ext uri="{FF2B5EF4-FFF2-40B4-BE49-F238E27FC236}">
-                <a16:creationId xmlns:a16="http://schemas.microsoft.com/office/drawing/2014/main" id="{8ED792AF-0599-4DFF-83D6-605083808F21}"/>
+                <a16:creationId xmlns:a16="http://schemas.microsoft.com/office/drawing/2014/main" id="{C93B70D1-1AA6-489D-8128-E077864CD834}"/>
               </a:ext>
             </a:extLst>
           </p:cNvPr>
@@ -29310,7 +29771,7 @@
           <p:cNvPr id="6" name="">
             <a:extLst xmlns:a="http://schemas.openxmlformats.org/drawingml/2006/main">
               <a:ext uri="{FF2B5EF4-FFF2-40B4-BE49-F238E27FC236}">
-                <a16:creationId xmlns:a16="http://schemas.microsoft.com/office/drawing/2014/main" id="{71E856C3-A9F8-43B3-8B3C-2934905B68D3}"/>
+                <a16:creationId xmlns:a16="http://schemas.microsoft.com/office/drawing/2014/main" id="{7D6E2840-F8A6-4B4E-8559-14550169480B}"/>
               </a:ext>
             </a:extLst>
           </p:cNvPr>
@@ -29467,7 +29928,7 @@
           <p:cNvPr id="7" name="">
             <a:extLst xmlns:a="http://schemas.openxmlformats.org/drawingml/2006/main">
               <a:ext uri="{FF2B5EF4-FFF2-40B4-BE49-F238E27FC236}">
-                <a16:creationId xmlns:a16="http://schemas.microsoft.com/office/drawing/2014/main" id="{B697E1CF-3ECE-4525-997B-D97AA620847D}"/>
+                <a16:creationId xmlns:a16="http://schemas.microsoft.com/office/drawing/2014/main" id="{099EBF2A-6488-4D50-9D33-0412B2BEBB03}"/>
               </a:ext>
             </a:extLst>
           </p:cNvPr>
@@ -29498,7 +29959,7 @@
           <p:cNvPr id="8" name="">
             <a:extLst xmlns:a="http://schemas.openxmlformats.org/drawingml/2006/main">
               <a:ext uri="{FF2B5EF4-FFF2-40B4-BE49-F238E27FC236}">
-                <a16:creationId xmlns:a16="http://schemas.microsoft.com/office/drawing/2014/main" id="{987D6B2E-F88B-4550-846C-E5E7A4E86E18}"/>
+                <a16:creationId xmlns:a16="http://schemas.microsoft.com/office/drawing/2014/main" id="{74628CB3-1318-4E8A-88E4-F2BC6CDBE5E4}"/>
               </a:ext>
             </a:extLst>
           </p:cNvPr>
@@ -29655,7 +30116,7 @@
           <p:cNvPr id="9" name="">
             <a:extLst xmlns:a="http://schemas.openxmlformats.org/drawingml/2006/main">
               <a:ext uri="{FF2B5EF4-FFF2-40B4-BE49-F238E27FC236}">
-                <a16:creationId xmlns:a16="http://schemas.microsoft.com/office/drawing/2014/main" id="{430DF1F8-5CAF-4098-840C-8DAF2AF9A405}"/>
+                <a16:creationId xmlns:a16="http://schemas.microsoft.com/office/drawing/2014/main" id="{DBE1BB12-D310-43AC-95BD-FBA835B8DBE5}"/>
               </a:ext>
             </a:extLst>
           </p:cNvPr>
@@ -29686,7 +30147,7 @@
           <p:cNvPr id="10" name="">
             <a:extLst xmlns:a="http://schemas.openxmlformats.org/drawingml/2006/main">
               <a:ext uri="{FF2B5EF4-FFF2-40B4-BE49-F238E27FC236}">
-                <a16:creationId xmlns:a16="http://schemas.microsoft.com/office/drawing/2014/main" id="{B25C3A5B-778B-44AF-8AD3-13C882493F6E}"/>
+                <a16:creationId xmlns:a16="http://schemas.microsoft.com/office/drawing/2014/main" id="{0D880E33-18E0-46B4-A0C2-1023702EFD48}"/>
               </a:ext>
             </a:extLst>
           </p:cNvPr>
@@ -29843,7 +30304,7 @@
           <p:cNvPr id="11" name="Chart">
             <a:extLst xmlns:a="http://schemas.openxmlformats.org/drawingml/2006/main">
               <a:ext uri="{FF2B5EF4-FFF2-40B4-BE49-F238E27FC236}">
-                <a16:creationId xmlns:a16="http://schemas.microsoft.com/office/drawing/2014/main" id="{54D9C900-2489-42BB-BCAC-64F125040FF5}"/>
+                <a16:creationId xmlns:a16="http://schemas.microsoft.com/office/drawing/2014/main" id="{2DEB98C0-9CCB-4D57-A99F-D19230301D66}"/>
               </a:ext>
             </a:extLst>
           </p:cNvPr>
@@ -29856,7 +30317,7 @@
         </p:xfrm>
         <a:graphic xmlns:a="http://schemas.openxmlformats.org/drawingml/2006/main">
           <a:graphicData uri="http://schemas.openxmlformats.org/drawingml/2006/chart">
-            <c:chart xmlns:r="http://schemas.openxmlformats.org/officeDocument/2006/relationships" xmlns:c="http://schemas.openxmlformats.org/drawingml/2006/chart" r:id="Rf39151a1b3d64592"/>
+            <c:chart xmlns:r="http://schemas.openxmlformats.org/officeDocument/2006/relationships" xmlns:c="http://schemas.openxmlformats.org/drawingml/2006/chart" r:id="R0c5128facb2947be"/>
           </a:graphicData>
         </a:graphic>
       </p:graphicFrame>
@@ -29865,7 +30326,7 @@
           <p:cNvPr id="12" name="Chart">
             <a:extLst xmlns:a="http://schemas.openxmlformats.org/drawingml/2006/main">
               <a:ext uri="{FF2B5EF4-FFF2-40B4-BE49-F238E27FC236}">
-                <a16:creationId xmlns:a16="http://schemas.microsoft.com/office/drawing/2014/main" id="{EE12E31D-4BDF-4D7E-A483-79074497EC53}"/>
+                <a16:creationId xmlns:a16="http://schemas.microsoft.com/office/drawing/2014/main" id="{C0D18650-2AFF-420B-B46B-D2016ADB9A3B}"/>
               </a:ext>
             </a:extLst>
           </p:cNvPr>
@@ -29878,7 +30339,7 @@
         </p:xfrm>
         <a:graphic xmlns:a="http://schemas.openxmlformats.org/drawingml/2006/main">
           <a:graphicData uri="http://schemas.openxmlformats.org/drawingml/2006/chart">
-            <c:chart xmlns:r="http://schemas.openxmlformats.org/officeDocument/2006/relationships" xmlns:c="http://schemas.openxmlformats.org/drawingml/2006/chart" r:id="Rc6de1baec5dc4143"/>
+            <c:chart xmlns:r="http://schemas.openxmlformats.org/officeDocument/2006/relationships" xmlns:c="http://schemas.openxmlformats.org/drawingml/2006/chart" r:id="R3882b08676814721"/>
           </a:graphicData>
         </a:graphic>
       </p:graphicFrame>
@@ -29887,7 +30348,7 @@
           <p:cNvPr id="13" name="Chart">
             <a:extLst xmlns:a="http://schemas.openxmlformats.org/drawingml/2006/main">
               <a:ext uri="{FF2B5EF4-FFF2-40B4-BE49-F238E27FC236}">
-                <a16:creationId xmlns:a16="http://schemas.microsoft.com/office/drawing/2014/main" id="{E53796C9-FF45-4BD1-9569-D0E6AAE43D1D}"/>
+                <a16:creationId xmlns:a16="http://schemas.microsoft.com/office/drawing/2014/main" id="{4F2DA782-E40F-40C8-B3D6-8B56FB089027}"/>
               </a:ext>
             </a:extLst>
           </p:cNvPr>
@@ -29900,7 +30361,7 @@
         </p:xfrm>
         <a:graphic xmlns:a="http://schemas.openxmlformats.org/drawingml/2006/main">
           <a:graphicData uri="http://schemas.openxmlformats.org/drawingml/2006/chart">
-            <c:chart xmlns:r="http://schemas.openxmlformats.org/officeDocument/2006/relationships" xmlns:c="http://schemas.openxmlformats.org/drawingml/2006/chart" r:id="Rb42be948e9704b7d"/>
+            <c:chart xmlns:r="http://schemas.openxmlformats.org/officeDocument/2006/relationships" xmlns:c="http://schemas.openxmlformats.org/drawingml/2006/chart" r:id="R4cceba9dd3744065"/>
           </a:graphicData>
         </a:graphic>
       </p:graphicFrame>
@@ -29909,7 +30370,7 @@
           <p:cNvPr id="14" name="Chart">
             <a:extLst xmlns:a="http://schemas.openxmlformats.org/drawingml/2006/main">
               <a:ext uri="{FF2B5EF4-FFF2-40B4-BE49-F238E27FC236}">
-                <a16:creationId xmlns:a16="http://schemas.microsoft.com/office/drawing/2014/main" id="{09A8E1B0-EB0C-4E82-9764-2F4F12263DEF}"/>
+                <a16:creationId xmlns:a16="http://schemas.microsoft.com/office/drawing/2014/main" id="{9C7AD9A5-E23A-4BD5-9924-9EBD8562B3B6}"/>
               </a:ext>
             </a:extLst>
           </p:cNvPr>
@@ -29922,7 +30383,7 @@
         </p:xfrm>
         <a:graphic xmlns:a="http://schemas.openxmlformats.org/drawingml/2006/main">
           <a:graphicData uri="http://schemas.openxmlformats.org/drawingml/2006/chart">
-            <c:chart xmlns:r="http://schemas.openxmlformats.org/officeDocument/2006/relationships" xmlns:c="http://schemas.openxmlformats.org/drawingml/2006/chart" r:id="Rb9e316d0201d4bcc"/>
+            <c:chart xmlns:r="http://schemas.openxmlformats.org/officeDocument/2006/relationships" xmlns:c="http://schemas.openxmlformats.org/drawingml/2006/chart" r:id="R419cce86652d4e1a"/>
           </a:graphicData>
         </a:graphic>
       </p:graphicFrame>
@@ -29931,7 +30392,7 @@
           <p:cNvPr id="15" name="">
             <a:extLst xmlns:a="http://schemas.openxmlformats.org/drawingml/2006/main">
               <a:ext uri="{FF2B5EF4-FFF2-40B4-BE49-F238E27FC236}">
-                <a16:creationId xmlns:a16="http://schemas.microsoft.com/office/drawing/2014/main" id="{A0867DF3-7727-4A0B-A3B4-CE8BAEF6B337}"/>
+                <a16:creationId xmlns:a16="http://schemas.microsoft.com/office/drawing/2014/main" id="{310BB047-A2C4-4A40-A9D0-03AC4AF3ED69}"/>
               </a:ext>
             </a:extLst>
           </p:cNvPr>
@@ -29962,7 +30423,7 @@
           <p:cNvPr id="16" name="">
             <a:extLst xmlns:a="http://schemas.openxmlformats.org/drawingml/2006/main">
               <a:ext uri="{FF2B5EF4-FFF2-40B4-BE49-F238E27FC236}">
-                <a16:creationId xmlns:a16="http://schemas.microsoft.com/office/drawing/2014/main" id="{4170FF4B-0E13-4482-8D85-0B55784785EA}"/>
+                <a16:creationId xmlns:a16="http://schemas.microsoft.com/office/drawing/2014/main" id="{B4972C91-450F-40D3-A7A5-873C15333DBD}"/>
               </a:ext>
             </a:extLst>
           </p:cNvPr>
@@ -30109,7 +30570,7 @@
                 <a:ea typeface="Arial"/>
                 <a:cs typeface="Arial"/>
               </a:rPr>
-              <a:t>Compare joining cohorts inside the same channel and need. What improves at matching ages—and what remains unobserved?</a:t>
+              <a:t>Compare cohorts within each channel and need. Is progress broad, or concentrated in particular groups?</a:t>
             </a:r>
           </a:p>
         </p:txBody>
@@ -30117,7 +30578,7 @@
     </p:spTree>
     <p:extLst>
       <p:ext uri="{BB962C8B-B14F-4D97-AF65-F5344CB8AC3E}">
-        <p14:creationId xmlns:p14="http://schemas.microsoft.com/office/powerpoint/2010/main" val="1357578845"/>
+        <p14:creationId xmlns:p14="http://schemas.microsoft.com/office/powerpoint/2010/main" val="982980118"/>
       </p:ext>
     </p:extLst>
   </p:cSld>
@@ -30148,7 +30609,7 @@
           <p:cNvPr id="8" name="">
             <a:extLst xmlns:a="http://schemas.openxmlformats.org/drawingml/2006/main">
               <a:ext uri="{FF2B5EF4-FFF2-40B4-BE49-F238E27FC236}">
-                <a16:creationId xmlns:a16="http://schemas.microsoft.com/office/drawing/2014/main" id="{90F6AB62-7E4F-49E7-87C4-6257EF370723}"/>
+                <a16:creationId xmlns:a16="http://schemas.microsoft.com/office/drawing/2014/main" id="{06BA5270-06F3-4058-9F35-522C5916C852}"/>
               </a:ext>
             </a:extLst>
           </p:cNvPr>
@@ -30179,7 +30640,7 @@
           <p:cNvPr id="2" name="">
             <a:extLst xmlns:a="http://schemas.openxmlformats.org/drawingml/2006/main">
               <a:ext uri="{FF2B5EF4-FFF2-40B4-BE49-F238E27FC236}">
-                <a16:creationId xmlns:a16="http://schemas.microsoft.com/office/drawing/2014/main" id="{9CE9F4EA-2222-42C8-A4C2-040E4DBA4991}"/>
+                <a16:creationId xmlns:a16="http://schemas.microsoft.com/office/drawing/2014/main" id="{C72D3DD3-9E48-4147-814F-5A19E4AD1E50}"/>
               </a:ext>
             </a:extLst>
           </p:cNvPr>
@@ -30336,7 +30797,7 @@
           <p:cNvPr id="3" name="">
             <a:extLst xmlns:a="http://schemas.openxmlformats.org/drawingml/2006/main">
               <a:ext uri="{FF2B5EF4-FFF2-40B4-BE49-F238E27FC236}">
-                <a16:creationId xmlns:a16="http://schemas.microsoft.com/office/drawing/2014/main" id="{FA7A2A17-D28C-431B-82BC-F8C1987F610C}"/>
+                <a16:creationId xmlns:a16="http://schemas.microsoft.com/office/drawing/2014/main" id="{75528C28-DA6C-4794-A405-6AA117996807}"/>
               </a:ext>
             </a:extLst>
           </p:cNvPr>
@@ -30493,7 +30954,7 @@
           <p:cNvPr id="4" name="">
             <a:extLst xmlns:a="http://schemas.openxmlformats.org/drawingml/2006/main">
               <a:ext uri="{FF2B5EF4-FFF2-40B4-BE49-F238E27FC236}">
-                <a16:creationId xmlns:a16="http://schemas.microsoft.com/office/drawing/2014/main" id="{294D0324-32C9-4FB2-AF9F-C576795AC935}"/>
+                <a16:creationId xmlns:a16="http://schemas.microsoft.com/office/drawing/2014/main" id="{E12E8FD4-1E09-4F3D-97F0-E543A1615CF5}"/>
               </a:ext>
             </a:extLst>
           </p:cNvPr>
@@ -30650,7 +31111,7 @@
           <p:cNvPr id="5" name="Chart">
             <a:extLst xmlns:a="http://schemas.openxmlformats.org/drawingml/2006/main">
               <a:ext uri="{FF2B5EF4-FFF2-40B4-BE49-F238E27FC236}">
-                <a16:creationId xmlns:a16="http://schemas.microsoft.com/office/drawing/2014/main" id="{240478F0-D5DC-4B4D-B20D-78F20558A2D1}"/>
+                <a16:creationId xmlns:a16="http://schemas.microsoft.com/office/drawing/2014/main" id="{9D5D049C-F0D5-47BF-945F-D477431D01EA}"/>
               </a:ext>
             </a:extLst>
           </p:cNvPr>
@@ -30663,7 +31124,7 @@
         </p:xfrm>
         <a:graphic xmlns:a="http://schemas.openxmlformats.org/drawingml/2006/main">
           <a:graphicData uri="http://schemas.openxmlformats.org/drawingml/2006/chart">
-            <c:chart xmlns:r="http://schemas.openxmlformats.org/officeDocument/2006/relationships" xmlns:c="http://schemas.openxmlformats.org/drawingml/2006/chart" r:id="Rad8b27ee23e74669"/>
+            <c:chart xmlns:r="http://schemas.openxmlformats.org/officeDocument/2006/relationships" xmlns:c="http://schemas.openxmlformats.org/drawingml/2006/chart" r:id="R5bbc165a84a84afc"/>
           </a:graphicData>
         </a:graphic>
       </p:graphicFrame>
@@ -30672,7 +31133,7 @@
           <p:cNvPr id="6" name="">
             <a:extLst xmlns:a="http://schemas.openxmlformats.org/drawingml/2006/main">
               <a:ext uri="{FF2B5EF4-FFF2-40B4-BE49-F238E27FC236}">
-                <a16:creationId xmlns:a16="http://schemas.microsoft.com/office/drawing/2014/main" id="{E109C0F6-EB32-45BB-85B1-784A9E4DB388}"/>
+                <a16:creationId xmlns:a16="http://schemas.microsoft.com/office/drawing/2014/main" id="{4CB05A46-5F21-4234-B92A-5E5A13FDDDA0}"/>
               </a:ext>
             </a:extLst>
           </p:cNvPr>
@@ -30690,7 +31151,7 @@
             <a:avLst/>
           </a:prstGeom>
           <a:solidFill xmlns:a="http://schemas.openxmlformats.org/drawingml/2006/main">
-            <a:srgbClr val="EAF4F3"/>
+            <a:srgbClr val="F1F3F4"/>
           </a:solidFill>
           <a:ln xmlns:a="http://schemas.openxmlformats.org/drawingml/2006/main" w="0">
             <a:noFill/>
@@ -30703,7 +31164,7 @@
           <p:cNvPr id="7" name="">
             <a:extLst xmlns:a="http://schemas.openxmlformats.org/drawingml/2006/main">
               <a:ext uri="{FF2B5EF4-FFF2-40B4-BE49-F238E27FC236}">
-                <a16:creationId xmlns:a16="http://schemas.microsoft.com/office/drawing/2014/main" id="{9D7B7E9D-FA9E-4F42-A3F5-0374CB7092E6}"/>
+                <a16:creationId xmlns:a16="http://schemas.microsoft.com/office/drawing/2014/main" id="{C3F33190-5F16-463D-8DA3-2CD0538DA85F}"/>
               </a:ext>
             </a:extLst>
           </p:cNvPr>
@@ -30858,7 +31319,7 @@
     </p:spTree>
     <p:extLst>
       <p:ext uri="{BB962C8B-B14F-4D97-AF65-F5344CB8AC3E}">
-        <p14:creationId xmlns:p14="http://schemas.microsoft.com/office/powerpoint/2010/main" val="1659617868"/>
+        <p14:creationId xmlns:p14="http://schemas.microsoft.com/office/powerpoint/2010/main" val="1531994624"/>
       </p:ext>
     </p:extLst>
   </p:cSld>
